--- a/app/assets/templates/visual-classroom.pptx
+++ b/app/assets/templates/visual-classroom.pptx
@@ -2,26 +2,26 @@
 <file path=ppt/presentation.xml><?xml version="1.0" encoding="utf-8"?>
 <p:presentation xmlns:p="http://schemas.openxmlformats.org/presentationml/2006/main">
   <p:sldMasterIdLst>
-    <p:sldMasterId xmlns:r="http://schemas.openxmlformats.org/officeDocument/2006/relationships" id="2147483648" r:id="Rfc0fe2dfd1b0496e"/>
+    <p:sldMasterId xmlns:r="http://schemas.openxmlformats.org/officeDocument/2006/relationships" id="2147483648" r:id="Rd91a1a67458543bc"/>
   </p:sldMasterIdLst>
   <p:notesMasterIdLst>
-    <p:notesMasterId xmlns:r="http://schemas.openxmlformats.org/officeDocument/2006/relationships" r:id="R06e50d3f1e2044f9"/>
+    <p:notesMasterId xmlns:r="http://schemas.openxmlformats.org/officeDocument/2006/relationships" r:id="R387c903e92a54a67"/>
   </p:notesMasterIdLst>
   <p:sldIdLst>
-    <p:sldId xmlns:r="http://schemas.openxmlformats.org/officeDocument/2006/relationships" id="256" r:id="Rc0a96f1f64b740bc"/>
-    <p:sldId xmlns:r="http://schemas.openxmlformats.org/officeDocument/2006/relationships" id="257" r:id="R09ae31f950bf422a"/>
-    <p:sldId xmlns:r="http://schemas.openxmlformats.org/officeDocument/2006/relationships" id="258" r:id="Rd8f1cb23418c43d5"/>
-    <p:sldId xmlns:r="http://schemas.openxmlformats.org/officeDocument/2006/relationships" id="259" r:id="Ra77aa441f82443e6"/>
-    <p:sldId xmlns:r="http://schemas.openxmlformats.org/officeDocument/2006/relationships" id="260" r:id="R3c15440089524016"/>
-    <p:sldId xmlns:r="http://schemas.openxmlformats.org/officeDocument/2006/relationships" id="261" r:id="R01aa52861c214256"/>
-    <p:sldId xmlns:r="http://schemas.openxmlformats.org/officeDocument/2006/relationships" id="262" r:id="R33b3809d1cd94c4d"/>
-    <p:sldId xmlns:r="http://schemas.openxmlformats.org/officeDocument/2006/relationships" id="263" r:id="R4681cd3681ad4c28"/>
-    <p:sldId xmlns:r="http://schemas.openxmlformats.org/officeDocument/2006/relationships" id="264" r:id="Ra979d244f09c4cc7"/>
-    <p:sldId xmlns:r="http://schemas.openxmlformats.org/officeDocument/2006/relationships" id="265" r:id="R7398296739af4cd4"/>
-    <p:sldId xmlns:r="http://schemas.openxmlformats.org/officeDocument/2006/relationships" id="266" r:id="R6a3d6484a47a4422"/>
-    <p:sldId xmlns:r="http://schemas.openxmlformats.org/officeDocument/2006/relationships" id="267" r:id="R29acdb2960a34d19"/>
-    <p:sldId xmlns:r="http://schemas.openxmlformats.org/officeDocument/2006/relationships" id="268" r:id="R1b2d97ec8a394d82"/>
-    <p:sldId xmlns:r="http://schemas.openxmlformats.org/officeDocument/2006/relationships" id="269" r:id="R3e43eb5f4a504892"/>
+    <p:sldId xmlns:r="http://schemas.openxmlformats.org/officeDocument/2006/relationships" id="256" r:id="Rbb6e1201ff974553"/>
+    <p:sldId xmlns:r="http://schemas.openxmlformats.org/officeDocument/2006/relationships" id="257" r:id="Ra33f9c7640be4f26"/>
+    <p:sldId xmlns:r="http://schemas.openxmlformats.org/officeDocument/2006/relationships" id="258" r:id="Rfc5e321709814cfe"/>
+    <p:sldId xmlns:r="http://schemas.openxmlformats.org/officeDocument/2006/relationships" id="259" r:id="Rb4b3a40818404d8e"/>
+    <p:sldId xmlns:r="http://schemas.openxmlformats.org/officeDocument/2006/relationships" id="260" r:id="R72b91142bf4d43dc"/>
+    <p:sldId xmlns:r="http://schemas.openxmlformats.org/officeDocument/2006/relationships" id="261" r:id="R56d37d670b664c8f"/>
+    <p:sldId xmlns:r="http://schemas.openxmlformats.org/officeDocument/2006/relationships" id="262" r:id="R3b1f732d11a74ac2"/>
+    <p:sldId xmlns:r="http://schemas.openxmlformats.org/officeDocument/2006/relationships" id="263" r:id="R28895d348ee448fb"/>
+    <p:sldId xmlns:r="http://schemas.openxmlformats.org/officeDocument/2006/relationships" id="264" r:id="R15c9fd97b6fd4b56"/>
+    <p:sldId xmlns:r="http://schemas.openxmlformats.org/officeDocument/2006/relationships" id="265" r:id="R89c9702b2c514fd8"/>
+    <p:sldId xmlns:r="http://schemas.openxmlformats.org/officeDocument/2006/relationships" id="266" r:id="Rcb22e85687e54e2f"/>
+    <p:sldId xmlns:r="http://schemas.openxmlformats.org/officeDocument/2006/relationships" id="267" r:id="R56dbdf9a496f495f"/>
+    <p:sldId xmlns:r="http://schemas.openxmlformats.org/officeDocument/2006/relationships" id="268" r:id="Re5079148abc642ce"/>
+    <p:sldId xmlns:r="http://schemas.openxmlformats.org/officeDocument/2006/relationships" id="269" r:id="Rada112561ccc4f31"/>
   </p:sldIdLst>
   <p:sldSz cx="12192000" cy="6858000"/>
   <p:notesSz cx="6858000" cy="9144000"/>
@@ -455,7 +455,7 @@
           <a:lstStyle xmlns:a="http://schemas.openxmlformats.org/drawingml/2006/main"/>
           <a:p xmlns:a="http://schemas.openxmlformats.org/drawingml/2006/main">
             <a:r>
-              <a:t>Mẫu visual: title. Thay các phần trong ngoặc bằng nội dung đã kiểm tra. Đây là mẫu cấu trúc, không phải bài học đã duyệt.</a:t>
+              <a:t>Mẫu visual: title. Ví dụ minh họa thiết kế từ app/assets/templates/demo_lessons.json. Khi tạo bài, thay bằng nội dung và hình của tài liệu giáo viên; không sao chép kiến thức của bài minh họa sang môn khác.</a:t>
             </a:r>
           </a:p>
         </p:txBody>
@@ -525,7 +525,7 @@
           <a:lstStyle xmlns:a="http://schemas.openxmlformats.org/drawingml/2006/main"/>
           <a:p xmlns:a="http://schemas.openxmlformats.org/drawingml/2006/main">
             <a:r>
-              <a:t>Mẫu visual: example. Thay các phần trong ngoặc bằng nội dung đã kiểm tra. Đây là mẫu cấu trúc, không phải bài học đã duyệt.</a:t>
+              <a:t>Mẫu visual: example. Ví dụ minh họa thiết kế từ app/assets/templates/demo_lessons.json. Khi tạo bài, thay bằng nội dung và hình của tài liệu giáo viên; không sao chép kiến thức của bài minh họa sang môn khác.</a:t>
             </a:r>
           </a:p>
         </p:txBody>
@@ -595,7 +595,7 @@
           <a:lstStyle xmlns:a="http://schemas.openxmlformats.org/drawingml/2006/main"/>
           <a:p xmlns:a="http://schemas.openxmlformats.org/drawingml/2006/main">
             <a:r>
-              <a:t>Mẫu visual: practice. Thay các phần trong ngoặc bằng nội dung đã kiểm tra. Đây là mẫu cấu trúc, không phải bài học đã duyệt.</a:t>
+              <a:t>Mẫu visual: practice. Ví dụ minh họa thiết kế từ app/assets/templates/demo_lessons.json. Khi tạo bài, thay bằng nội dung và hình của tài liệu giáo viên; không sao chép kiến thức của bài minh họa sang môn khác.</a:t>
             </a:r>
           </a:p>
         </p:txBody>
@@ -665,7 +665,7 @@
           <a:lstStyle xmlns:a="http://schemas.openxmlformats.org/drawingml/2006/main"/>
           <a:p xmlns:a="http://schemas.openxmlformats.org/drawingml/2006/main">
             <a:r>
-              <a:t>Mẫu visual: question. Thay các phần trong ngoặc bằng nội dung đã kiểm tra. Đây là mẫu cấu trúc, không phải bài học đã duyệt.</a:t>
+              <a:t>Mẫu visual: question. Ví dụ minh họa thiết kế từ app/assets/templates/demo_lessons.json. Khi tạo bài, thay bằng nội dung và hình của tài liệu giáo viên; không sao chép kiến thức của bài minh họa sang môn khác.</a:t>
             </a:r>
           </a:p>
         </p:txBody>
@@ -735,7 +735,7 @@
           <a:lstStyle xmlns:a="http://schemas.openxmlformats.org/drawingml/2006/main"/>
           <a:p xmlns:a="http://schemas.openxmlformats.org/drawingml/2006/main">
             <a:r>
-              <a:t>Mẫu visual: check. Thay các phần trong ngoặc bằng nội dung đã kiểm tra. Đây là mẫu cấu trúc, không phải bài học đã duyệt.</a:t>
+              <a:t>Mẫu visual: check. Ví dụ minh họa thiết kế từ app/assets/templates/demo_lessons.json. Khi tạo bài, thay bằng nội dung và hình của tài liệu giáo viên; không sao chép kiến thức của bài minh họa sang môn khác.</a:t>
             </a:r>
           </a:p>
         </p:txBody>
@@ -805,7 +805,7 @@
           <a:lstStyle xmlns:a="http://schemas.openxmlformats.org/drawingml/2006/main"/>
           <a:p xmlns:a="http://schemas.openxmlformats.org/drawingml/2006/main">
             <a:r>
-              <a:t>Mẫu visual: summary. Thay các phần trong ngoặc bằng nội dung đã kiểm tra. Đây là mẫu cấu trúc, không phải bài học đã duyệt.</a:t>
+              <a:t>Mẫu visual: summary. Ví dụ minh họa thiết kế từ app/assets/templates/demo_lessons.json. Khi tạo bài, thay bằng nội dung và hình của tài liệu giáo viên; không sao chép kiến thức của bài minh họa sang môn khác.</a:t>
             </a:r>
           </a:p>
         </p:txBody>
@@ -875,7 +875,7 @@
           <a:lstStyle xmlns:a="http://schemas.openxmlformats.org/drawingml/2006/main"/>
           <a:p xmlns:a="http://schemas.openxmlformats.org/drawingml/2006/main">
             <a:r>
-              <a:t>Mẫu visual: goal. Thay các phần trong ngoặc bằng nội dung đã kiểm tra. Đây là mẫu cấu trúc, không phải bài học đã duyệt.</a:t>
+              <a:t>Mẫu visual: goal. Ví dụ minh họa thiết kế từ app/assets/templates/demo_lessons.json. Khi tạo bài, thay bằng nội dung và hình của tài liệu giáo viên; không sao chép kiến thức của bài minh họa sang môn khác.</a:t>
             </a:r>
           </a:p>
         </p:txBody>
@@ -945,7 +945,7 @@
           <a:lstStyle xmlns:a="http://schemas.openxmlformats.org/drawingml/2006/main"/>
           <a:p xmlns:a="http://schemas.openxmlformats.org/drawingml/2006/main">
             <a:r>
-              <a:t>Mẫu visual: warmup. Thay các phần trong ngoặc bằng nội dung đã kiểm tra. Đây là mẫu cấu trúc, không phải bài học đã duyệt.</a:t>
+              <a:t>Mẫu visual: warmup. Ví dụ minh họa thiết kế từ app/assets/templates/demo_lessons.json. Khi tạo bài, thay bằng nội dung và hình của tài liệu giáo viên; không sao chép kiến thức của bài minh họa sang môn khác.</a:t>
             </a:r>
           </a:p>
         </p:txBody>
@@ -1015,7 +1015,7 @@
           <a:lstStyle xmlns:a="http://schemas.openxmlformats.org/drawingml/2006/main"/>
           <a:p xmlns:a="http://schemas.openxmlformats.org/drawingml/2006/main">
             <a:r>
-              <a:t>Mẫu visual: vocabulary. Thay các phần trong ngoặc bằng nội dung đã kiểm tra. Đây là mẫu cấu trúc, không phải bài học đã duyệt.</a:t>
+              <a:t>Mẫu visual: vocabulary. Ví dụ minh họa thiết kế từ app/assets/templates/demo_lessons.json. Khi tạo bài, thay bằng nội dung và hình của tài liệu giáo viên; không sao chép kiến thức của bài minh họa sang môn khác.</a:t>
             </a:r>
           </a:p>
         </p:txBody>
@@ -1085,7 +1085,7 @@
           <a:lstStyle xmlns:a="http://schemas.openxmlformats.org/drawingml/2006/main"/>
           <a:p xmlns:a="http://schemas.openxmlformats.org/drawingml/2006/main">
             <a:r>
-              <a:t>Mẫu visual: concept. Thay các phần trong ngoặc bằng nội dung đã kiểm tra. Đây là mẫu cấu trúc, không phải bài học đã duyệt.</a:t>
+              <a:t>Mẫu visual: concept. Ví dụ minh họa thiết kế từ app/assets/templates/demo_lessons.json. Khi tạo bài, thay bằng nội dung và hình của tài liệu giáo viên; không sao chép kiến thức của bài minh họa sang môn khác.</a:t>
             </a:r>
           </a:p>
         </p:txBody>
@@ -1155,7 +1155,7 @@
           <a:lstStyle xmlns:a="http://schemas.openxmlformats.org/drawingml/2006/main"/>
           <a:p xmlns:a="http://schemas.openxmlformats.org/drawingml/2006/main">
             <a:r>
-              <a:t>Mẫu visual: explanation. Thay các phần trong ngoặc bằng nội dung đã kiểm tra. Đây là mẫu cấu trúc, không phải bài học đã duyệt.</a:t>
+              <a:t>Mẫu visual: explanation. Ví dụ minh họa thiết kế từ app/assets/templates/demo_lessons.json. Khi tạo bài, thay bằng nội dung và hình của tài liệu giáo viên; không sao chép kiến thức của bài minh họa sang môn khác.</a:t>
             </a:r>
           </a:p>
         </p:txBody>
@@ -1225,7 +1225,7 @@
           <a:lstStyle xmlns:a="http://schemas.openxmlformats.org/drawingml/2006/main"/>
           <a:p xmlns:a="http://schemas.openxmlformats.org/drawingml/2006/main">
             <a:r>
-              <a:t>Mẫu visual: visual. Thay các phần trong ngoặc bằng nội dung đã kiểm tra. Đây là mẫu cấu trúc, không phải bài học đã duyệt.</a:t>
+              <a:t>Mẫu visual: visual. Ví dụ minh họa thiết kế từ app/assets/templates/demo_lessons.json. Khi tạo bài, thay bằng nội dung và hình của tài liệu giáo viên; không sao chép kiến thức của bài minh họa sang môn khác.</a:t>
             </a:r>
           </a:p>
         </p:txBody>
@@ -1295,7 +1295,7 @@
           <a:lstStyle xmlns:a="http://schemas.openxmlformats.org/drawingml/2006/main"/>
           <a:p xmlns:a="http://schemas.openxmlformats.org/drawingml/2006/main">
             <a:r>
-              <a:t>Mẫu visual: compare. Thay các phần trong ngoặc bằng nội dung đã kiểm tra. Đây là mẫu cấu trúc, không phải bài học đã duyệt.</a:t>
+              <a:t>Mẫu visual: compare. Ví dụ minh họa thiết kế từ app/assets/templates/demo_lessons.json. Khi tạo bài, thay bằng nội dung và hình của tài liệu giáo viên; không sao chép kiến thức của bài minh họa sang môn khác.</a:t>
             </a:r>
           </a:p>
         </p:txBody>
@@ -1365,7 +1365,7 @@
           <a:lstStyle xmlns:a="http://schemas.openxmlformats.org/drawingml/2006/main"/>
           <a:p xmlns:a="http://schemas.openxmlformats.org/drawingml/2006/main">
             <a:r>
-              <a:t>Mẫu visual: formula. Thay các phần trong ngoặc bằng nội dung đã kiểm tra. Đây là mẫu cấu trúc, không phải bài học đã duyệt.</a:t>
+              <a:t>Mẫu visual: formula. Ví dụ minh họa thiết kế từ app/assets/templates/demo_lessons.json. Khi tạo bài, thay bằng nội dung và hình của tài liệu giáo viên; không sao chép kiến thức của bài minh họa sang môn khác.</a:t>
             </a:r>
           </a:p>
         </p:txBody>
@@ -1433,7 +1433,7 @@
   </p:cSld>
   <p:clrMap bg1="lt1" tx1="dk1" bg2="lt2" tx2="dk2" accent1="accent1" accent2="accent2" accent3="accent3" accent4="accent4" accent5="accent5" accent6="accent6" hlink="hlink" folHlink="folHlink"/>
   <p:sldLayoutIdLst>
-    <p:sldLayoutId xmlns:r="http://schemas.openxmlformats.org/officeDocument/2006/relationships" id="2147483649" r:id="R0e13707dfd1044f7"/>
+    <p:sldLayoutId xmlns:r="http://schemas.openxmlformats.org/officeDocument/2006/relationships" id="2147483649" r:id="R905828d32af744d7"/>
   </p:sldLayoutIdLst>
   <p:txStyles>
     <p:titleStyle>
@@ -1981,10 +1981,10 @@
       </p:grpSpPr>
       <p:sp>
         <p:nvSpPr>
-          <p:cNvPr id="7" name="title-0">
-            <a:extLst xmlns:a="http://schemas.openxmlformats.org/drawingml/2006/main">
-              <a:ext uri="{FF2B5EF4-FFF2-40B4-BE49-F238E27FC236}">
-                <a16:creationId xmlns:a16="http://schemas.microsoft.com/office/drawing/2014/main" id="{F0FF53EB-3DDE-4CB3-92F6-C7B46B5EB242}"/>
+          <p:cNvPr id="8" name="title-0">
+            <a:extLst xmlns:a="http://schemas.openxmlformats.org/drawingml/2006/main">
+              <a:ext uri="{FF2B5EF4-FFF2-40B4-BE49-F238E27FC236}">
+                <a16:creationId xmlns:a16="http://schemas.microsoft.com/office/drawing/2014/main" id="{EE2D3171-AA80-4BF7-BE8C-146966685D71}"/>
               </a:ext>
             </a:extLst>
           </p:cNvPr>
@@ -2031,7 +2031,7 @@
                 <a:ea typeface="Arial"/>
                 <a:cs typeface="Arial"/>
               </a:rPr>
-              <a:t>BiliClass   /   Môn học của thầy cô   /   10–12</a:t>
+              <a:t>BiliClass   /   Khoa học · ví dụ minh họa   /   </a:t>
             </a:r>
           </a:p>
         </p:txBody>
@@ -2041,7 +2041,7 @@
           <p:cNvPr id="2" name="title-1">
             <a:extLst xmlns:a="http://schemas.openxmlformats.org/drawingml/2006/main">
               <a:ext uri="{FF2B5EF4-FFF2-40B4-BE49-F238E27FC236}">
-                <a16:creationId xmlns:a16="http://schemas.microsoft.com/office/drawing/2014/main" id="{3CC468E2-6ED2-4A0F-A1FE-A36A0694902E}"/>
+                <a16:creationId xmlns:a16="http://schemas.microsoft.com/office/drawing/2014/main" id="{58B622DF-5C28-4F0F-B3CE-A30666FED622}"/>
               </a:ext>
             </a:extLst>
           </p:cNvPr>
@@ -2088,7 +2088,7 @@
                 <a:ea typeface="Arial"/>
                 <a:cs typeface="Arial"/>
               </a:rPr>
-              <a:t>Mẫu bài giảng song ngữ</a:t>
+              <a:t>Vòng tuần hoàn của nước</a:t>
             </a:r>
           </a:p>
         </p:txBody>
@@ -2098,7 +2098,7 @@
           <p:cNvPr id="3" name="title-2">
             <a:extLst xmlns:a="http://schemas.openxmlformats.org/drawingml/2006/main">
               <a:ext uri="{FF2B5EF4-FFF2-40B4-BE49-F238E27FC236}">
-                <a16:creationId xmlns:a16="http://schemas.microsoft.com/office/drawing/2014/main" id="{A3F3E81B-D1C5-4AF7-9BD9-D1822F45023B}"/>
+                <a16:creationId xmlns:a16="http://schemas.microsoft.com/office/drawing/2014/main" id="{A4253E64-CD56-466A-B5BF-47F6FC4C7E71}"/>
               </a:ext>
             </a:extLst>
           </p:cNvPr>
@@ -2155,7 +2155,7 @@
           <p:cNvPr id="4" name="title-3">
             <a:extLst xmlns:a="http://schemas.openxmlformats.org/drawingml/2006/main">
               <a:ext uri="{FF2B5EF4-FFF2-40B4-BE49-F238E27FC236}">
-                <a16:creationId xmlns:a16="http://schemas.microsoft.com/office/drawing/2014/main" id="{C9EA99B2-0F01-4CA1-A3EA-B3B8616110BA}"/>
+                <a16:creationId xmlns:a16="http://schemas.microsoft.com/office/drawing/2014/main" id="{A0817A2B-EFEF-4F34-9748-F9136D3E4BC6}"/>
               </a:ext>
             </a:extLst>
           </p:cNvPr>
@@ -2202,7 +2202,7 @@
                 <a:ea typeface="Arial"/>
                 <a:cs typeface="Arial"/>
               </a:rPr>
-              <a:t>Mẫu cấu trúc · Thay bằng nội dung bài học</a:t>
+              <a:t>Ví dụ để xem thiết kế · Bài của thầy cô dùng nội dung và hình từ nguồn</a:t>
             </a:r>
           </a:p>
         </p:txBody>
@@ -2212,7 +2212,7 @@
           <p:cNvPr id="5" name="title-4">
             <a:extLst xmlns:a="http://schemas.openxmlformats.org/drawingml/2006/main">
               <a:ext uri="{FF2B5EF4-FFF2-40B4-BE49-F238E27FC236}">
-                <a16:creationId xmlns:a16="http://schemas.microsoft.com/office/drawing/2014/main" id="{D98EBAE0-ED9D-4975-8B78-82D9CABA1D95}"/>
+                <a16:creationId xmlns:a16="http://schemas.microsoft.com/office/drawing/2014/main" id="{CB0B09A6-CA51-49D0-901D-A213090344ED}"/>
               </a:ext>
             </a:extLst>
           </p:cNvPr>
@@ -2224,24 +2224,24 @@
         <p:spPr>
           <a:xfrm xmlns:a="http://schemas.openxmlformats.org/drawingml/2006/main">
             <a:off x="914400" y="2171700"/>
-            <a:ext cx="10363200" cy="1752600"/>
-          </a:xfrm>
-          <a:prstGeom xmlns:a="http://schemas.openxmlformats.org/drawingml/2006/main" prst="rect">
-            <a:avLst/>
-          </a:prstGeom>
-          <a:noFill xmlns:a="http://schemas.openxmlformats.org/drawingml/2006/main"/>
-          <a:ln xmlns:a="http://schemas.openxmlformats.org/drawingml/2006/main" w="0">
-            <a:noFill/>
-          </a:ln>
-        </p:spPr>
-        <p:txBody>
-          <a:bodyPr xmlns:a="http://schemas.openxmlformats.org/drawingml/2006/main">
-            <a:noAutofit/>
-          </a:bodyPr>
-          <a:lstStyle xmlns:a="http://schemas.openxmlformats.org/drawingml/2006/main"/>
-          <a:p xmlns:a="http://schemas.openxmlformats.org/drawingml/2006/main">
-            <a:pPr algn="l">
-              <a:defRPr sz="3900" b="1" i="0">
+            <a:ext cx="5219700" cy="1752600"/>
+          </a:xfrm>
+          <a:prstGeom xmlns:a="http://schemas.openxmlformats.org/drawingml/2006/main" prst="rect">
+            <a:avLst/>
+          </a:prstGeom>
+          <a:noFill xmlns:a="http://schemas.openxmlformats.org/drawingml/2006/main"/>
+          <a:ln xmlns:a="http://schemas.openxmlformats.org/drawingml/2006/main" w="0">
+            <a:noFill/>
+          </a:ln>
+        </p:spPr>
+        <p:txBody>
+          <a:bodyPr xmlns:a="http://schemas.openxmlformats.org/drawingml/2006/main">
+            <a:noAutofit/>
+          </a:bodyPr>
+          <a:lstStyle xmlns:a="http://schemas.openxmlformats.org/drawingml/2006/main"/>
+          <a:p xmlns:a="http://schemas.openxmlformats.org/drawingml/2006/main">
+            <a:pPr algn="l">
+              <a:defRPr sz="2100" b="1" i="0">
                 <a:solidFill>
                   <a:srgbClr val="123C37"/>
                 </a:solidFill>
@@ -2251,7 +2251,7 @@
               </a:defRPr>
             </a:pPr>
             <a:r>
-              <a:rPr sz="3900" b="1" i="0">
+              <a:rPr sz="2100" b="1" i="0">
                 <a:solidFill>
                   <a:srgbClr val="123C37"/>
                 </a:solidFill>
@@ -2259,30 +2259,7 @@
                 <a:ea typeface="Arial"/>
                 <a:cs typeface="Arial"/>
               </a:rPr>
-              <a:t>[Tên bài học]</a:t>
-            </a:r>
-          </a:p>
-          <a:p xmlns:a="http://schemas.openxmlformats.org/drawingml/2006/main">
-            <a:pPr algn="l">
-              <a:defRPr sz="3900" b="1" i="0">
-                <a:solidFill>
-                  <a:srgbClr val="123C37"/>
-                </a:solidFill>
-                <a:latin typeface="Arial"/>
-                <a:ea typeface="Arial"/>
-                <a:cs typeface="Arial"/>
-              </a:defRPr>
-            </a:pPr>
-            <a:r>
-              <a:rPr sz="3900" b="1" i="0">
-                <a:solidFill>
-                  <a:srgbClr val="123C37"/>
-                </a:solidFill>
-                <a:latin typeface="Arial"/>
-                <a:ea typeface="Arial"/>
-                <a:cs typeface="Arial"/>
-              </a:rPr>
-              <a:t>[Chủ đề của tiết học]</a:t>
+              <a:t>Nước chuyển động quanh ta</a:t>
             </a:r>
           </a:p>
         </p:txBody>
@@ -2292,7 +2269,7 @@
           <p:cNvPr id="6" name="title-5">
             <a:extLst xmlns:a="http://schemas.openxmlformats.org/drawingml/2006/main">
               <a:ext uri="{FF2B5EF4-FFF2-40B4-BE49-F238E27FC236}">
-                <a16:creationId xmlns:a16="http://schemas.microsoft.com/office/drawing/2014/main" id="{6F444EF1-DAAE-4A16-800E-1C131F243EC4}"/>
+                <a16:creationId xmlns:a16="http://schemas.microsoft.com/office/drawing/2014/main" id="{7818232F-F01F-46EA-A7F2-8C1ED0ACFE70}"/>
               </a:ext>
             </a:extLst>
           </p:cNvPr>
@@ -2304,24 +2281,24 @@
         <p:spPr>
           <a:xfrm xmlns:a="http://schemas.openxmlformats.org/drawingml/2006/main">
             <a:off x="914400" y="4248150"/>
-            <a:ext cx="10363200" cy="1752600"/>
-          </a:xfrm>
-          <a:prstGeom xmlns:a="http://schemas.openxmlformats.org/drawingml/2006/main" prst="rect">
-            <a:avLst/>
-          </a:prstGeom>
-          <a:noFill xmlns:a="http://schemas.openxmlformats.org/drawingml/2006/main"/>
-          <a:ln xmlns:a="http://schemas.openxmlformats.org/drawingml/2006/main" w="0">
-            <a:noFill/>
-          </a:ln>
-        </p:spPr>
-        <p:txBody>
-          <a:bodyPr xmlns:a="http://schemas.openxmlformats.org/drawingml/2006/main">
-            <a:noAutofit/>
-          </a:bodyPr>
-          <a:lstStyle xmlns:a="http://schemas.openxmlformats.org/drawingml/2006/main"/>
-          <a:p xmlns:a="http://schemas.openxmlformats.org/drawingml/2006/main">
-            <a:pPr algn="l">
-              <a:defRPr sz="3900" b="1" i="1">
+            <a:ext cx="5219700" cy="1752600"/>
+          </a:xfrm>
+          <a:prstGeom xmlns:a="http://schemas.openxmlformats.org/drawingml/2006/main" prst="rect">
+            <a:avLst/>
+          </a:prstGeom>
+          <a:noFill xmlns:a="http://schemas.openxmlformats.org/drawingml/2006/main"/>
+          <a:ln xmlns:a="http://schemas.openxmlformats.org/drawingml/2006/main" w="0">
+            <a:noFill/>
+          </a:ln>
+        </p:spPr>
+        <p:txBody>
+          <a:bodyPr xmlns:a="http://schemas.openxmlformats.org/drawingml/2006/main">
+            <a:noAutofit/>
+          </a:bodyPr>
+          <a:lstStyle xmlns:a="http://schemas.openxmlformats.org/drawingml/2006/main"/>
+          <a:p xmlns:a="http://schemas.openxmlformats.org/drawingml/2006/main">
+            <a:pPr algn="l">
+              <a:defRPr sz="2100" b="1" i="1">
                 <a:solidFill>
                   <a:srgbClr val="087F70"/>
                 </a:solidFill>
@@ -2331,7 +2308,7 @@
               </a:defRPr>
             </a:pPr>
             <a:r>
-              <a:rPr sz="3900" b="1" i="1">
+              <a:rPr sz="2100" b="1" i="1">
                 <a:solidFill>
                   <a:srgbClr val="087F70"/>
                 </a:solidFill>
@@ -2339,38 +2316,43 @@
                 <a:ea typeface="Arial"/>
                 <a:cs typeface="Arial"/>
               </a:rPr>
-              <a:t>[Lesson title]</a:t>
-            </a:r>
-          </a:p>
-          <a:p xmlns:a="http://schemas.openxmlformats.org/drawingml/2006/main">
-            <a:pPr algn="l">
-              <a:defRPr sz="3900" b="1" i="1">
-                <a:solidFill>
-                  <a:srgbClr val="087F70"/>
-                </a:solidFill>
-                <a:latin typeface="Arial"/>
-                <a:ea typeface="Arial"/>
-                <a:cs typeface="Arial"/>
-              </a:defRPr>
-            </a:pPr>
-            <a:r>
-              <a:rPr sz="3900" b="1" i="1">
-                <a:solidFill>
-                  <a:srgbClr val="087F70"/>
-                </a:solidFill>
-                <a:latin typeface="Arial"/>
-                <a:ea typeface="Arial"/>
-                <a:cs typeface="Arial"/>
-              </a:rPr>
-              <a:t>[Topic of the lesson]</a:t>
-            </a:r>
-          </a:p>
-        </p:txBody>
-      </p:sp>
+              <a:t>Water moves around us</a:t>
+            </a:r>
+          </a:p>
+        </p:txBody>
+      </p:sp>
+      <p:pic>
+        <p:nvPicPr>
+          <p:cNvPr id="14" name=""/>
+          <p:cNvPicPr>
+            <a:picLocks xmlns:a="http://schemas.openxmlformats.org/drawingml/2006/main" noChangeAspect="1"/>
+          </p:cNvPicPr>
+          <p:nvPr/>
+        </p:nvPicPr>
+        <p:blipFill>
+          <a:blip xmlns:r="http://schemas.openxmlformats.org/officeDocument/2006/relationships" xmlns:a="http://schemas.openxmlformats.org/drawingml/2006/main" r:embed="R5675ba752289449c">
+            <a:extLst>
+              <a:ext uri="{96DAC541-7B7A-43D3-8B79-37D633B846F1}">
+                <asvg:svgBlip xmlns:asvg="http://schemas.microsoft.com/office/drawing/2016/SVG/main" r:embed="R1fcdeb1d140b48b6"/>
+              </a:ext>
+            </a:extLst>
+          </a:blip>
+          <a:stretch xmlns:a="http://schemas.openxmlformats.org/drawingml/2006/main"/>
+        </p:blipFill>
+        <p:spPr>
+          <a:xfrm xmlns:a="http://schemas.openxmlformats.org/drawingml/2006/main">
+            <a:off x="6629400" y="2038350"/>
+            <a:ext cx="4953000" cy="3905250"/>
+          </a:xfrm>
+          <a:prstGeom xmlns:a="http://schemas.openxmlformats.org/drawingml/2006/main" prst="rect">
+            <a:avLst/>
+          </a:prstGeom>
+        </p:spPr>
+      </p:pic>
     </p:spTree>
     <p:extLst>
       <p:ext uri="{BB962C8B-B14F-4D97-AF65-F5344CB8AC3E}">
-        <p14:creationId xmlns:p14="http://schemas.microsoft.com/office/powerpoint/2010/main" val="1887376821"/>
+        <p14:creationId xmlns:p14="http://schemas.microsoft.com/office/powerpoint/2010/main" val="656801740"/>
       </p:ext>
     </p:extLst>
   </p:cSld>
@@ -2398,10 +2380,10 @@
       </p:grpSpPr>
       <p:sp>
         <p:nvSpPr>
-          <p:cNvPr id="7" name="example-0">
-            <a:extLst xmlns:a="http://schemas.openxmlformats.org/drawingml/2006/main">
-              <a:ext uri="{FF2B5EF4-FFF2-40B4-BE49-F238E27FC236}">
-                <a16:creationId xmlns:a16="http://schemas.microsoft.com/office/drawing/2014/main" id="{609DED95-1C79-4253-A88F-179E8D46A0ED}"/>
+          <p:cNvPr id="8" name="example-0">
+            <a:extLst xmlns:a="http://schemas.openxmlformats.org/drawingml/2006/main">
+              <a:ext uri="{FF2B5EF4-FFF2-40B4-BE49-F238E27FC236}">
+                <a16:creationId xmlns:a16="http://schemas.microsoft.com/office/drawing/2014/main" id="{C85B1E7F-4D16-40A5-9E84-EEB84A91899C}"/>
               </a:ext>
             </a:extLst>
           </p:cNvPr>
@@ -2448,7 +2430,7 @@
                 <a:ea typeface="Arial"/>
                 <a:cs typeface="Arial"/>
               </a:rPr>
-              <a:t>BiliClass   /   Môn học của thầy cô   /   10–12</a:t>
+              <a:t>BiliClass   /   Khoa học · ví dụ minh họa   /   </a:t>
             </a:r>
           </a:p>
         </p:txBody>
@@ -2458,7 +2440,7 @@
           <p:cNvPr id="2" name="example-1">
             <a:extLst xmlns:a="http://schemas.openxmlformats.org/drawingml/2006/main">
               <a:ext uri="{FF2B5EF4-FFF2-40B4-BE49-F238E27FC236}">
-                <a16:creationId xmlns:a16="http://schemas.microsoft.com/office/drawing/2014/main" id="{AF3454F6-0388-419B-84FC-D700869A8339}"/>
+                <a16:creationId xmlns:a16="http://schemas.microsoft.com/office/drawing/2014/main" id="{60086E0F-EB78-40F5-891B-D591832991BD}"/>
               </a:ext>
             </a:extLst>
           </p:cNvPr>
@@ -2505,7 +2487,7 @@
                 <a:ea typeface="Arial"/>
                 <a:cs typeface="Arial"/>
               </a:rPr>
-              <a:t>Mẫu bài giảng song ngữ</a:t>
+              <a:t>Vòng tuần hoàn của nước</a:t>
             </a:r>
           </a:p>
         </p:txBody>
@@ -2515,7 +2497,7 @@
           <p:cNvPr id="3" name="example-2">
             <a:extLst xmlns:a="http://schemas.openxmlformats.org/drawingml/2006/main">
               <a:ext uri="{FF2B5EF4-FFF2-40B4-BE49-F238E27FC236}">
-                <a16:creationId xmlns:a16="http://schemas.microsoft.com/office/drawing/2014/main" id="{B5912EF3-812C-4166-A6A2-04149052DEE4}"/>
+                <a16:creationId xmlns:a16="http://schemas.microsoft.com/office/drawing/2014/main" id="{A2A00200-00E2-403E-8986-17EEA9B60ECD}"/>
               </a:ext>
             </a:extLst>
           </p:cNvPr>
@@ -2572,7 +2554,7 @@
           <p:cNvPr id="4" name="example-3">
             <a:extLst xmlns:a="http://schemas.openxmlformats.org/drawingml/2006/main">
               <a:ext uri="{FF2B5EF4-FFF2-40B4-BE49-F238E27FC236}">
-                <a16:creationId xmlns:a16="http://schemas.microsoft.com/office/drawing/2014/main" id="{F2B565D2-2D31-41CB-ABAB-0347A5CE07D6}"/>
+                <a16:creationId xmlns:a16="http://schemas.microsoft.com/office/drawing/2014/main" id="{72038956-472D-49B1-8D07-EFD74491FF34}"/>
               </a:ext>
             </a:extLst>
           </p:cNvPr>
@@ -2619,7 +2601,7 @@
                 <a:ea typeface="Arial"/>
                 <a:cs typeface="Arial"/>
               </a:rPr>
-              <a:t>Mẫu cấu trúc · Thay bằng nội dung bài học</a:t>
+              <a:t>Ví dụ để xem thiết kế · Bài của thầy cô dùng nội dung và hình từ nguồn</a:t>
             </a:r>
           </a:p>
         </p:txBody>
@@ -2629,7 +2611,7 @@
           <p:cNvPr id="5" name="example-4">
             <a:extLst xmlns:a="http://schemas.openxmlformats.org/drawingml/2006/main">
               <a:ext uri="{FF2B5EF4-FFF2-40B4-BE49-F238E27FC236}">
-                <a16:creationId xmlns:a16="http://schemas.microsoft.com/office/drawing/2014/main" id="{D96D7E23-65A2-419A-A80B-8DF921D9A004}"/>
+                <a16:creationId xmlns:a16="http://schemas.microsoft.com/office/drawing/2014/main" id="{C8D4088F-1BF4-4BF6-A18C-59ADAC827B88}"/>
               </a:ext>
             </a:extLst>
           </p:cNvPr>
@@ -2641,24 +2623,24 @@
         <p:spPr>
           <a:xfrm xmlns:a="http://schemas.openxmlformats.org/drawingml/2006/main">
             <a:off x="609600" y="2038350"/>
-            <a:ext cx="10972800" cy="1790700"/>
-          </a:xfrm>
-          <a:prstGeom xmlns:a="http://schemas.openxmlformats.org/drawingml/2006/main" prst="rect">
-            <a:avLst/>
-          </a:prstGeom>
-          <a:noFill xmlns:a="http://schemas.openxmlformats.org/drawingml/2006/main"/>
-          <a:ln xmlns:a="http://schemas.openxmlformats.org/drawingml/2006/main" w="0">
-            <a:noFill/>
-          </a:ln>
-        </p:spPr>
-        <p:txBody>
-          <a:bodyPr xmlns:a="http://schemas.openxmlformats.org/drawingml/2006/main">
-            <a:noAutofit/>
-          </a:bodyPr>
-          <a:lstStyle xmlns:a="http://schemas.openxmlformats.org/drawingml/2006/main"/>
-          <a:p xmlns:a="http://schemas.openxmlformats.org/drawingml/2006/main">
-            <a:pPr algn="l">
-              <a:defRPr sz="2400" b="0" i="0">
+            <a:ext cx="5219700" cy="1790700"/>
+          </a:xfrm>
+          <a:prstGeom xmlns:a="http://schemas.openxmlformats.org/drawingml/2006/main" prst="rect">
+            <a:avLst/>
+          </a:prstGeom>
+          <a:noFill xmlns:a="http://schemas.openxmlformats.org/drawingml/2006/main"/>
+          <a:ln xmlns:a="http://schemas.openxmlformats.org/drawingml/2006/main" w="0">
+            <a:noFill/>
+          </a:ln>
+        </p:spPr>
+        <p:txBody>
+          <a:bodyPr xmlns:a="http://schemas.openxmlformats.org/drawingml/2006/main">
+            <a:noAutofit/>
+          </a:bodyPr>
+          <a:lstStyle xmlns:a="http://schemas.openxmlformats.org/drawingml/2006/main"/>
+          <a:p xmlns:a="http://schemas.openxmlformats.org/drawingml/2006/main">
+            <a:pPr algn="l">
+              <a:defRPr sz="2100" b="0" i="0">
                 <a:solidFill>
                   <a:srgbClr val="123C37"/>
                 </a:solidFill>
@@ -2668,7 +2650,7 @@
               </a:defRPr>
             </a:pPr>
             <a:r>
-              <a:rPr sz="2400" b="0" i="0">
+              <a:rPr sz="2100" b="0" i="0">
                 <a:solidFill>
                   <a:srgbClr val="123C37"/>
                 </a:solidFill>
@@ -2676,53 +2658,7 @@
                 <a:ea typeface="Arial"/>
                 <a:cs typeface="Arial"/>
               </a:rPr>
-              <a:t>[Dữ kiện của ví dụ]</a:t>
-            </a:r>
-          </a:p>
-          <a:p xmlns:a="http://schemas.openxmlformats.org/drawingml/2006/main">
-            <a:pPr algn="l">
-              <a:defRPr sz="2400" b="0" i="0">
-                <a:solidFill>
-                  <a:srgbClr val="123C37"/>
-                </a:solidFill>
-                <a:latin typeface="Arial"/>
-                <a:ea typeface="Arial"/>
-                <a:cs typeface="Arial"/>
-              </a:defRPr>
-            </a:pPr>
-            <a:r>
-              <a:rPr sz="2400" b="0" i="0">
-                <a:solidFill>
-                  <a:srgbClr val="123C37"/>
-                </a:solidFill>
-                <a:latin typeface="Arial"/>
-                <a:ea typeface="Arial"/>
-                <a:cs typeface="Arial"/>
-              </a:rPr>
-              <a:t>[Bước giải đã kiểm tra]</a:t>
-            </a:r>
-          </a:p>
-          <a:p xmlns:a="http://schemas.openxmlformats.org/drawingml/2006/main">
-            <a:pPr algn="l">
-              <a:defRPr sz="2400" b="0" i="0">
-                <a:solidFill>
-                  <a:srgbClr val="123C37"/>
-                </a:solidFill>
-                <a:latin typeface="Arial"/>
-                <a:ea typeface="Arial"/>
-                <a:cs typeface="Arial"/>
-              </a:defRPr>
-            </a:pPr>
-            <a:r>
-              <a:rPr sz="2400" b="0" i="0">
-                <a:solidFill>
-                  <a:srgbClr val="123C37"/>
-                </a:solidFill>
-                <a:latin typeface="Arial"/>
-                <a:ea typeface="Arial"/>
-                <a:cs typeface="Arial"/>
-              </a:rPr>
-              <a:t>[Kết quả và đơn vị]</a:t>
+              <a:t>Vũng nước nhỏ dần khi nước bay hơi.</a:t>
             </a:r>
           </a:p>
         </p:txBody>
@@ -2732,7 +2668,7 @@
           <p:cNvPr id="6" name="example-5">
             <a:extLst xmlns:a="http://schemas.openxmlformats.org/drawingml/2006/main">
               <a:ext uri="{FF2B5EF4-FFF2-40B4-BE49-F238E27FC236}">
-                <a16:creationId xmlns:a16="http://schemas.microsoft.com/office/drawing/2014/main" id="{9E686279-6AB3-441C-B157-917090CA6886}"/>
+                <a16:creationId xmlns:a16="http://schemas.microsoft.com/office/drawing/2014/main" id="{8D50C4F0-660A-4E16-8E68-78B70991A92F}"/>
               </a:ext>
             </a:extLst>
           </p:cNvPr>
@@ -2744,24 +2680,24 @@
         <p:spPr>
           <a:xfrm xmlns:a="http://schemas.openxmlformats.org/drawingml/2006/main">
             <a:off x="609600" y="4152900"/>
-            <a:ext cx="10972800" cy="1790700"/>
-          </a:xfrm>
-          <a:prstGeom xmlns:a="http://schemas.openxmlformats.org/drawingml/2006/main" prst="rect">
-            <a:avLst/>
-          </a:prstGeom>
-          <a:noFill xmlns:a="http://schemas.openxmlformats.org/drawingml/2006/main"/>
-          <a:ln xmlns:a="http://schemas.openxmlformats.org/drawingml/2006/main" w="0">
-            <a:noFill/>
-          </a:ln>
-        </p:spPr>
-        <p:txBody>
-          <a:bodyPr xmlns:a="http://schemas.openxmlformats.org/drawingml/2006/main">
-            <a:noAutofit/>
-          </a:bodyPr>
-          <a:lstStyle xmlns:a="http://schemas.openxmlformats.org/drawingml/2006/main"/>
-          <a:p xmlns:a="http://schemas.openxmlformats.org/drawingml/2006/main">
-            <a:pPr algn="l">
-              <a:defRPr sz="2400" b="0" i="1">
+            <a:ext cx="5219700" cy="1790700"/>
+          </a:xfrm>
+          <a:prstGeom xmlns:a="http://schemas.openxmlformats.org/drawingml/2006/main" prst="rect">
+            <a:avLst/>
+          </a:prstGeom>
+          <a:noFill xmlns:a="http://schemas.openxmlformats.org/drawingml/2006/main"/>
+          <a:ln xmlns:a="http://schemas.openxmlformats.org/drawingml/2006/main" w="0">
+            <a:noFill/>
+          </a:ln>
+        </p:spPr>
+        <p:txBody>
+          <a:bodyPr xmlns:a="http://schemas.openxmlformats.org/drawingml/2006/main">
+            <a:noAutofit/>
+          </a:bodyPr>
+          <a:lstStyle xmlns:a="http://schemas.openxmlformats.org/drawingml/2006/main"/>
+          <a:p xmlns:a="http://schemas.openxmlformats.org/drawingml/2006/main">
+            <a:pPr algn="l">
+              <a:defRPr sz="2100" b="0" i="1">
                 <a:solidFill>
                   <a:srgbClr val="087F70"/>
                 </a:solidFill>
@@ -2771,7 +2707,7 @@
               </a:defRPr>
             </a:pPr>
             <a:r>
-              <a:rPr sz="2400" b="0" i="1">
+              <a:rPr sz="2100" b="0" i="1">
                 <a:solidFill>
                   <a:srgbClr val="087F70"/>
                 </a:solidFill>
@@ -2779,61 +2715,43 @@
                 <a:ea typeface="Arial"/>
                 <a:cs typeface="Arial"/>
               </a:rPr>
-              <a:t>[Example information]</a:t>
-            </a:r>
-          </a:p>
-          <a:p xmlns:a="http://schemas.openxmlformats.org/drawingml/2006/main">
-            <a:pPr algn="l">
-              <a:defRPr sz="2400" b="0" i="1">
-                <a:solidFill>
-                  <a:srgbClr val="087F70"/>
-                </a:solidFill>
-                <a:latin typeface="Arial"/>
-                <a:ea typeface="Arial"/>
-                <a:cs typeface="Arial"/>
-              </a:defRPr>
-            </a:pPr>
-            <a:r>
-              <a:rPr sz="2400" b="0" i="1">
-                <a:solidFill>
-                  <a:srgbClr val="087F70"/>
-                </a:solidFill>
-                <a:latin typeface="Arial"/>
-                <a:ea typeface="Arial"/>
-                <a:cs typeface="Arial"/>
-              </a:rPr>
-              <a:t>[Checked solution step]</a:t>
-            </a:r>
-          </a:p>
-          <a:p xmlns:a="http://schemas.openxmlformats.org/drawingml/2006/main">
-            <a:pPr algn="l">
-              <a:defRPr sz="2400" b="0" i="1">
-                <a:solidFill>
-                  <a:srgbClr val="087F70"/>
-                </a:solidFill>
-                <a:latin typeface="Arial"/>
-                <a:ea typeface="Arial"/>
-                <a:cs typeface="Arial"/>
-              </a:defRPr>
-            </a:pPr>
-            <a:r>
-              <a:rPr sz="2400" b="0" i="1">
-                <a:solidFill>
-                  <a:srgbClr val="087F70"/>
-                </a:solidFill>
-                <a:latin typeface="Arial"/>
-                <a:ea typeface="Arial"/>
-                <a:cs typeface="Arial"/>
-              </a:rPr>
-              <a:t>[Result and unit]</a:t>
-            </a:r>
-          </a:p>
-        </p:txBody>
-      </p:sp>
+              <a:t>A puddle shrinks as water evaporates.</a:t>
+            </a:r>
+          </a:p>
+        </p:txBody>
+      </p:sp>
+      <p:pic>
+        <p:nvPicPr>
+          <p:cNvPr id="14" name=""/>
+          <p:cNvPicPr>
+            <a:picLocks xmlns:a="http://schemas.openxmlformats.org/drawingml/2006/main" noChangeAspect="1"/>
+          </p:cNvPicPr>
+          <p:nvPr/>
+        </p:nvPicPr>
+        <p:blipFill>
+          <a:blip xmlns:r="http://schemas.openxmlformats.org/officeDocument/2006/relationships" xmlns:a="http://schemas.openxmlformats.org/drawingml/2006/main" r:embed="Rb1b6da3f08d34ac5">
+            <a:extLst>
+              <a:ext uri="{96DAC541-7B7A-43D3-8B79-37D633B846F1}">
+                <asvg:svgBlip xmlns:asvg="http://schemas.microsoft.com/office/drawing/2016/SVG/main" r:embed="R3cd185a0fa3842cb"/>
+              </a:ext>
+            </a:extLst>
+          </a:blip>
+          <a:stretch xmlns:a="http://schemas.openxmlformats.org/drawingml/2006/main"/>
+        </p:blipFill>
+        <p:spPr>
+          <a:xfrm xmlns:a="http://schemas.openxmlformats.org/drawingml/2006/main">
+            <a:off x="6629400" y="2038350"/>
+            <a:ext cx="4953000" cy="3905250"/>
+          </a:xfrm>
+          <a:prstGeom xmlns:a="http://schemas.openxmlformats.org/drawingml/2006/main" prst="rect">
+            <a:avLst/>
+          </a:prstGeom>
+        </p:spPr>
+      </p:pic>
     </p:spTree>
     <p:extLst>
       <p:ext uri="{BB962C8B-B14F-4D97-AF65-F5344CB8AC3E}">
-        <p14:creationId xmlns:p14="http://schemas.microsoft.com/office/powerpoint/2010/main" val="1254463927"/>
+        <p14:creationId xmlns:p14="http://schemas.microsoft.com/office/powerpoint/2010/main" val="1113214194"/>
       </p:ext>
     </p:extLst>
   </p:cSld>
@@ -2861,10 +2779,10 @@
       </p:grpSpPr>
       <p:sp>
         <p:nvSpPr>
-          <p:cNvPr id="7" name="practice-0">
-            <a:extLst xmlns:a="http://schemas.openxmlformats.org/drawingml/2006/main">
-              <a:ext uri="{FF2B5EF4-FFF2-40B4-BE49-F238E27FC236}">
-                <a16:creationId xmlns:a16="http://schemas.microsoft.com/office/drawing/2014/main" id="{F4FEAF34-F50D-47DD-9614-8A6636EA99C8}"/>
+          <p:cNvPr id="8" name="practice-0">
+            <a:extLst xmlns:a="http://schemas.openxmlformats.org/drawingml/2006/main">
+              <a:ext uri="{FF2B5EF4-FFF2-40B4-BE49-F238E27FC236}">
+                <a16:creationId xmlns:a16="http://schemas.microsoft.com/office/drawing/2014/main" id="{A425EF4A-1162-498A-80AE-FB9C9E4F1114}"/>
               </a:ext>
             </a:extLst>
           </p:cNvPr>
@@ -2911,7 +2829,7 @@
                 <a:ea typeface="Arial"/>
                 <a:cs typeface="Arial"/>
               </a:rPr>
-              <a:t>BiliClass   /   Môn học của thầy cô   /   10–12</a:t>
+              <a:t>BiliClass   /   Khoa học · ví dụ minh họa   /   </a:t>
             </a:r>
           </a:p>
         </p:txBody>
@@ -2921,7 +2839,7 @@
           <p:cNvPr id="2" name="practice-1">
             <a:extLst xmlns:a="http://schemas.openxmlformats.org/drawingml/2006/main">
               <a:ext uri="{FF2B5EF4-FFF2-40B4-BE49-F238E27FC236}">
-                <a16:creationId xmlns:a16="http://schemas.microsoft.com/office/drawing/2014/main" id="{ADB0D5B9-DFF1-46D4-89B9-0D49952A1213}"/>
+                <a16:creationId xmlns:a16="http://schemas.microsoft.com/office/drawing/2014/main" id="{803CDA72-3404-4CDB-BDC3-FE6505CD6D67}"/>
               </a:ext>
             </a:extLst>
           </p:cNvPr>
@@ -2968,7 +2886,7 @@
                 <a:ea typeface="Arial"/>
                 <a:cs typeface="Arial"/>
               </a:rPr>
-              <a:t>Mẫu bài giảng song ngữ</a:t>
+              <a:t>Vòng tuần hoàn của nước</a:t>
             </a:r>
           </a:p>
         </p:txBody>
@@ -2978,7 +2896,7 @@
           <p:cNvPr id="3" name="practice-2">
             <a:extLst xmlns:a="http://schemas.openxmlformats.org/drawingml/2006/main">
               <a:ext uri="{FF2B5EF4-FFF2-40B4-BE49-F238E27FC236}">
-                <a16:creationId xmlns:a16="http://schemas.microsoft.com/office/drawing/2014/main" id="{F8F4D3DA-91BC-4ADE-9213-8C3C607FAA1F}"/>
+                <a16:creationId xmlns:a16="http://schemas.microsoft.com/office/drawing/2014/main" id="{B2BFCF60-4926-44F3-9D7B-0BFC5A0D3BF8}"/>
               </a:ext>
             </a:extLst>
           </p:cNvPr>
@@ -3035,7 +2953,7 @@
           <p:cNvPr id="4" name="practice-3">
             <a:extLst xmlns:a="http://schemas.openxmlformats.org/drawingml/2006/main">
               <a:ext uri="{FF2B5EF4-FFF2-40B4-BE49-F238E27FC236}">
-                <a16:creationId xmlns:a16="http://schemas.microsoft.com/office/drawing/2014/main" id="{A8F941D0-7B8E-47F3-BBAC-F7F1B10417EA}"/>
+                <a16:creationId xmlns:a16="http://schemas.microsoft.com/office/drawing/2014/main" id="{15EAC025-9419-47ED-A484-950491C4F66D}"/>
               </a:ext>
             </a:extLst>
           </p:cNvPr>
@@ -3082,7 +3000,7 @@
                 <a:ea typeface="Arial"/>
                 <a:cs typeface="Arial"/>
               </a:rPr>
-              <a:t>Mẫu cấu trúc · Thay bằng nội dung bài học</a:t>
+              <a:t>Ví dụ để xem thiết kế · Bài của thầy cô dùng nội dung và hình từ nguồn</a:t>
             </a:r>
           </a:p>
         </p:txBody>
@@ -3092,7 +3010,7 @@
           <p:cNvPr id="5" name="practice-4">
             <a:extLst xmlns:a="http://schemas.openxmlformats.org/drawingml/2006/main">
               <a:ext uri="{FF2B5EF4-FFF2-40B4-BE49-F238E27FC236}">
-                <a16:creationId xmlns:a16="http://schemas.microsoft.com/office/drawing/2014/main" id="{ED22E6AD-2E10-44E3-9142-58A4E4D999E2}"/>
+                <a16:creationId xmlns:a16="http://schemas.microsoft.com/office/drawing/2014/main" id="{BE1FC4E5-35E1-4DAE-8A76-655154E2911D}"/>
               </a:ext>
             </a:extLst>
           </p:cNvPr>
@@ -3104,24 +3022,24 @@
         <p:spPr>
           <a:xfrm xmlns:a="http://schemas.openxmlformats.org/drawingml/2006/main">
             <a:off x="609600" y="2038350"/>
-            <a:ext cx="10972800" cy="1790700"/>
-          </a:xfrm>
-          <a:prstGeom xmlns:a="http://schemas.openxmlformats.org/drawingml/2006/main" prst="rect">
-            <a:avLst/>
-          </a:prstGeom>
-          <a:noFill xmlns:a="http://schemas.openxmlformats.org/drawingml/2006/main"/>
-          <a:ln xmlns:a="http://schemas.openxmlformats.org/drawingml/2006/main" w="0">
-            <a:noFill/>
-          </a:ln>
-        </p:spPr>
-        <p:txBody>
-          <a:bodyPr xmlns:a="http://schemas.openxmlformats.org/drawingml/2006/main">
-            <a:noAutofit/>
-          </a:bodyPr>
-          <a:lstStyle xmlns:a="http://schemas.openxmlformats.org/drawingml/2006/main"/>
-          <a:p xmlns:a="http://schemas.openxmlformats.org/drawingml/2006/main">
-            <a:pPr algn="l">
-              <a:defRPr sz="2550" b="0" i="0">
+            <a:ext cx="5219700" cy="1790700"/>
+          </a:xfrm>
+          <a:prstGeom xmlns:a="http://schemas.openxmlformats.org/drawingml/2006/main" prst="rect">
+            <a:avLst/>
+          </a:prstGeom>
+          <a:noFill xmlns:a="http://schemas.openxmlformats.org/drawingml/2006/main"/>
+          <a:ln xmlns:a="http://schemas.openxmlformats.org/drawingml/2006/main" w="0">
+            <a:noFill/>
+          </a:ln>
+        </p:spPr>
+        <p:txBody>
+          <a:bodyPr xmlns:a="http://schemas.openxmlformats.org/drawingml/2006/main">
+            <a:noAutofit/>
+          </a:bodyPr>
+          <a:lstStyle xmlns:a="http://schemas.openxmlformats.org/drawingml/2006/main"/>
+          <a:p xmlns:a="http://schemas.openxmlformats.org/drawingml/2006/main">
+            <a:pPr algn="l">
+              <a:defRPr sz="2100" b="0" i="0">
                 <a:solidFill>
                   <a:srgbClr val="123C37"/>
                 </a:solidFill>
@@ -3131,7 +3049,7 @@
               </a:defRPr>
             </a:pPr>
             <a:r>
-              <a:rPr sz="2550" b="0" i="0">
+              <a:rPr sz="2100" b="0" i="0">
                 <a:solidFill>
                   <a:srgbClr val="123C37"/>
                 </a:solidFill>
@@ -3139,53 +3057,7 @@
                 <a:ea typeface="Arial"/>
                 <a:cs typeface="Arial"/>
               </a:rPr>
-              <a:t>[Yêu cầu của bài tập]</a:t>
-            </a:r>
-          </a:p>
-          <a:p xmlns:a="http://schemas.openxmlformats.org/drawingml/2006/main">
-            <a:pPr algn="l">
-              <a:defRPr sz="2550" b="0" i="0">
-                <a:solidFill>
-                  <a:srgbClr val="123C37"/>
-                </a:solidFill>
-                <a:latin typeface="Arial"/>
-                <a:ea typeface="Arial"/>
-                <a:cs typeface="Arial"/>
-              </a:defRPr>
-            </a:pPr>
-            <a:r>
-              <a:rPr sz="2550" b="0" i="0">
-                <a:solidFill>
-                  <a:srgbClr val="123C37"/>
-                </a:solidFill>
-                <a:latin typeface="Arial"/>
-                <a:ea typeface="Arial"/>
-                <a:cs typeface="Arial"/>
-              </a:rPr>
-              <a:t>[Dữ kiện được cung cấp]</a:t>
-            </a:r>
-          </a:p>
-          <a:p xmlns:a="http://schemas.openxmlformats.org/drawingml/2006/main">
-            <a:pPr algn="l">
-              <a:defRPr sz="2550" b="0" i="0">
-                <a:solidFill>
-                  <a:srgbClr val="123C37"/>
-                </a:solidFill>
-                <a:latin typeface="Arial"/>
-                <a:ea typeface="Arial"/>
-                <a:cs typeface="Arial"/>
-              </a:defRPr>
-            </a:pPr>
-            <a:r>
-              <a:rPr sz="2550" b="0" i="0">
-                <a:solidFill>
-                  <a:srgbClr val="123C37"/>
-                </a:solidFill>
-                <a:latin typeface="Arial"/>
-                <a:ea typeface="Arial"/>
-                <a:cs typeface="Arial"/>
-              </a:rPr>
-              <a:t>[Cách học sinh trình bày kết quả]</a:t>
+              <a:t>Gọi tên từng bước trong hình.</a:t>
             </a:r>
           </a:p>
         </p:txBody>
@@ -3195,7 +3067,7 @@
           <p:cNvPr id="6" name="practice-5">
             <a:extLst xmlns:a="http://schemas.openxmlformats.org/drawingml/2006/main">
               <a:ext uri="{FF2B5EF4-FFF2-40B4-BE49-F238E27FC236}">
-                <a16:creationId xmlns:a16="http://schemas.microsoft.com/office/drawing/2014/main" id="{10A9E352-4B97-4ECF-A743-8477D7984CA5}"/>
+                <a16:creationId xmlns:a16="http://schemas.microsoft.com/office/drawing/2014/main" id="{4B993859-3303-429E-B5ED-C4FC2DF3FF17}"/>
               </a:ext>
             </a:extLst>
           </p:cNvPr>
@@ -3207,24 +3079,24 @@
         <p:spPr>
           <a:xfrm xmlns:a="http://schemas.openxmlformats.org/drawingml/2006/main">
             <a:off x="609600" y="4152900"/>
-            <a:ext cx="10972800" cy="1790700"/>
-          </a:xfrm>
-          <a:prstGeom xmlns:a="http://schemas.openxmlformats.org/drawingml/2006/main" prst="rect">
-            <a:avLst/>
-          </a:prstGeom>
-          <a:noFill xmlns:a="http://schemas.openxmlformats.org/drawingml/2006/main"/>
-          <a:ln xmlns:a="http://schemas.openxmlformats.org/drawingml/2006/main" w="0">
-            <a:noFill/>
-          </a:ln>
-        </p:spPr>
-        <p:txBody>
-          <a:bodyPr xmlns:a="http://schemas.openxmlformats.org/drawingml/2006/main">
-            <a:noAutofit/>
-          </a:bodyPr>
-          <a:lstStyle xmlns:a="http://schemas.openxmlformats.org/drawingml/2006/main"/>
-          <a:p xmlns:a="http://schemas.openxmlformats.org/drawingml/2006/main">
-            <a:pPr algn="l">
-              <a:defRPr sz="2550" b="0" i="1">
+            <a:ext cx="5219700" cy="1790700"/>
+          </a:xfrm>
+          <a:prstGeom xmlns:a="http://schemas.openxmlformats.org/drawingml/2006/main" prst="rect">
+            <a:avLst/>
+          </a:prstGeom>
+          <a:noFill xmlns:a="http://schemas.openxmlformats.org/drawingml/2006/main"/>
+          <a:ln xmlns:a="http://schemas.openxmlformats.org/drawingml/2006/main" w="0">
+            <a:noFill/>
+          </a:ln>
+        </p:spPr>
+        <p:txBody>
+          <a:bodyPr xmlns:a="http://schemas.openxmlformats.org/drawingml/2006/main">
+            <a:noAutofit/>
+          </a:bodyPr>
+          <a:lstStyle xmlns:a="http://schemas.openxmlformats.org/drawingml/2006/main"/>
+          <a:p xmlns:a="http://schemas.openxmlformats.org/drawingml/2006/main">
+            <a:pPr algn="l">
+              <a:defRPr sz="2100" b="0" i="1">
                 <a:solidFill>
                   <a:srgbClr val="087F70"/>
                 </a:solidFill>
@@ -3234,7 +3106,7 @@
               </a:defRPr>
             </a:pPr>
             <a:r>
-              <a:rPr sz="2550" b="0" i="1">
+              <a:rPr sz="2100" b="0" i="1">
                 <a:solidFill>
                   <a:srgbClr val="087F70"/>
                 </a:solidFill>
@@ -3242,61 +3114,43 @@
                 <a:ea typeface="Arial"/>
                 <a:cs typeface="Arial"/>
               </a:rPr>
-              <a:t>[Task instructions]</a:t>
-            </a:r>
-          </a:p>
-          <a:p xmlns:a="http://schemas.openxmlformats.org/drawingml/2006/main">
-            <a:pPr algn="l">
-              <a:defRPr sz="2550" b="0" i="1">
-                <a:solidFill>
-                  <a:srgbClr val="087F70"/>
-                </a:solidFill>
-                <a:latin typeface="Arial"/>
-                <a:ea typeface="Arial"/>
-                <a:cs typeface="Arial"/>
-              </a:defRPr>
-            </a:pPr>
-            <a:r>
-              <a:rPr sz="2550" b="0" i="1">
-                <a:solidFill>
-                  <a:srgbClr val="087F70"/>
-                </a:solidFill>
-                <a:latin typeface="Arial"/>
-                <a:ea typeface="Arial"/>
-                <a:cs typeface="Arial"/>
-              </a:rPr>
-              <a:t>[Given information]</a:t>
-            </a:r>
-          </a:p>
-          <a:p xmlns:a="http://schemas.openxmlformats.org/drawingml/2006/main">
-            <a:pPr algn="l">
-              <a:defRPr sz="2550" b="0" i="1">
-                <a:solidFill>
-                  <a:srgbClr val="087F70"/>
-                </a:solidFill>
-                <a:latin typeface="Arial"/>
-                <a:ea typeface="Arial"/>
-                <a:cs typeface="Arial"/>
-              </a:defRPr>
-            </a:pPr>
-            <a:r>
-              <a:rPr sz="2550" b="0" i="1">
-                <a:solidFill>
-                  <a:srgbClr val="087F70"/>
-                </a:solidFill>
-                <a:latin typeface="Arial"/>
-                <a:ea typeface="Arial"/>
-                <a:cs typeface="Arial"/>
-              </a:rPr>
-              <a:t>[How students present their results]</a:t>
-            </a:r>
-          </a:p>
-        </p:txBody>
-      </p:sp>
+              <a:t>Name each stage in the diagram.</a:t>
+            </a:r>
+          </a:p>
+        </p:txBody>
+      </p:sp>
+      <p:pic>
+        <p:nvPicPr>
+          <p:cNvPr id="14" name=""/>
+          <p:cNvPicPr>
+            <a:picLocks xmlns:a="http://schemas.openxmlformats.org/drawingml/2006/main" noChangeAspect="1"/>
+          </p:cNvPicPr>
+          <p:nvPr/>
+        </p:nvPicPr>
+        <p:blipFill>
+          <a:blip xmlns:r="http://schemas.openxmlformats.org/officeDocument/2006/relationships" xmlns:a="http://schemas.openxmlformats.org/drawingml/2006/main" r:embed="Rc8c66812b03947a2">
+            <a:extLst>
+              <a:ext uri="{96DAC541-7B7A-43D3-8B79-37D633B846F1}">
+                <asvg:svgBlip xmlns:asvg="http://schemas.microsoft.com/office/drawing/2016/SVG/main" r:embed="R7fc95962de764cca"/>
+              </a:ext>
+            </a:extLst>
+          </a:blip>
+          <a:stretch xmlns:a="http://schemas.openxmlformats.org/drawingml/2006/main"/>
+        </p:blipFill>
+        <p:spPr>
+          <a:xfrm xmlns:a="http://schemas.openxmlformats.org/drawingml/2006/main">
+            <a:off x="6629400" y="2038350"/>
+            <a:ext cx="4953000" cy="3905250"/>
+          </a:xfrm>
+          <a:prstGeom xmlns:a="http://schemas.openxmlformats.org/drawingml/2006/main" prst="rect">
+            <a:avLst/>
+          </a:prstGeom>
+        </p:spPr>
+      </p:pic>
     </p:spTree>
     <p:extLst>
       <p:ext uri="{BB962C8B-B14F-4D97-AF65-F5344CB8AC3E}">
-        <p14:creationId xmlns:p14="http://schemas.microsoft.com/office/powerpoint/2010/main" val="1911776658"/>
+        <p14:creationId xmlns:p14="http://schemas.microsoft.com/office/powerpoint/2010/main" val="351761239"/>
       </p:ext>
     </p:extLst>
   </p:cSld>
@@ -3324,10 +3178,10 @@
       </p:grpSpPr>
       <p:sp>
         <p:nvSpPr>
-          <p:cNvPr id="7" name="question-0">
-            <a:extLst xmlns:a="http://schemas.openxmlformats.org/drawingml/2006/main">
-              <a:ext uri="{FF2B5EF4-FFF2-40B4-BE49-F238E27FC236}">
-                <a16:creationId xmlns:a16="http://schemas.microsoft.com/office/drawing/2014/main" id="{5583DAA6-E856-4C81-B985-800095EDF508}"/>
+          <p:cNvPr id="8" name="question-0">
+            <a:extLst xmlns:a="http://schemas.openxmlformats.org/drawingml/2006/main">
+              <a:ext uri="{FF2B5EF4-FFF2-40B4-BE49-F238E27FC236}">
+                <a16:creationId xmlns:a16="http://schemas.microsoft.com/office/drawing/2014/main" id="{1019E871-AB67-4AC2-AA61-57305E478CF0}"/>
               </a:ext>
             </a:extLst>
           </p:cNvPr>
@@ -3374,7 +3228,7 @@
                 <a:ea typeface="Arial"/>
                 <a:cs typeface="Arial"/>
               </a:rPr>
-              <a:t>BiliClass   /   Môn học của thầy cô   /   10–12</a:t>
+              <a:t>BiliClass   /   Khoa học · ví dụ minh họa   /   </a:t>
             </a:r>
           </a:p>
         </p:txBody>
@@ -3384,7 +3238,7 @@
           <p:cNvPr id="2" name="question-1">
             <a:extLst xmlns:a="http://schemas.openxmlformats.org/drawingml/2006/main">
               <a:ext uri="{FF2B5EF4-FFF2-40B4-BE49-F238E27FC236}">
-                <a16:creationId xmlns:a16="http://schemas.microsoft.com/office/drawing/2014/main" id="{BB2C0804-3A67-4279-9885-93CF06C37E55}"/>
+                <a16:creationId xmlns:a16="http://schemas.microsoft.com/office/drawing/2014/main" id="{86EDA65B-43DB-4B12-8542-F252F09CAEED}"/>
               </a:ext>
             </a:extLst>
           </p:cNvPr>
@@ -3431,7 +3285,7 @@
                 <a:ea typeface="Arial"/>
                 <a:cs typeface="Arial"/>
               </a:rPr>
-              <a:t>Mẫu bài giảng song ngữ</a:t>
+              <a:t>Vòng tuần hoàn của nước</a:t>
             </a:r>
           </a:p>
         </p:txBody>
@@ -3441,7 +3295,7 @@
           <p:cNvPr id="3" name="question-2">
             <a:extLst xmlns:a="http://schemas.openxmlformats.org/drawingml/2006/main">
               <a:ext uri="{FF2B5EF4-FFF2-40B4-BE49-F238E27FC236}">
-                <a16:creationId xmlns:a16="http://schemas.microsoft.com/office/drawing/2014/main" id="{EB4D5FCD-45B6-43ED-AAE8-BB979E4A3495}"/>
+                <a16:creationId xmlns:a16="http://schemas.microsoft.com/office/drawing/2014/main" id="{0B72E61F-42CA-4F6D-A5D5-143D2E099DA5}"/>
               </a:ext>
             </a:extLst>
           </p:cNvPr>
@@ -3498,7 +3352,7 @@
           <p:cNvPr id="4" name="question-3">
             <a:extLst xmlns:a="http://schemas.openxmlformats.org/drawingml/2006/main">
               <a:ext uri="{FF2B5EF4-FFF2-40B4-BE49-F238E27FC236}">
-                <a16:creationId xmlns:a16="http://schemas.microsoft.com/office/drawing/2014/main" id="{4BD4C510-3B05-43CB-A653-5CF1D8BF333B}"/>
+                <a16:creationId xmlns:a16="http://schemas.microsoft.com/office/drawing/2014/main" id="{6E41CAED-E62A-4EDD-8456-0F5DD5E36629}"/>
               </a:ext>
             </a:extLst>
           </p:cNvPr>
@@ -3545,7 +3399,7 @@
                 <a:ea typeface="Arial"/>
                 <a:cs typeface="Arial"/>
               </a:rPr>
-              <a:t>Mẫu cấu trúc · Thay bằng nội dung bài học</a:t>
+              <a:t>Ví dụ để xem thiết kế · Bài của thầy cô dùng nội dung và hình từ nguồn</a:t>
             </a:r>
           </a:p>
         </p:txBody>
@@ -3555,7 +3409,7 @@
           <p:cNvPr id="5" name="question-4">
             <a:extLst xmlns:a="http://schemas.openxmlformats.org/drawingml/2006/main">
               <a:ext uri="{FF2B5EF4-FFF2-40B4-BE49-F238E27FC236}">
-                <a16:creationId xmlns:a16="http://schemas.microsoft.com/office/drawing/2014/main" id="{4E3FB405-46C7-4485-9CD9-0418BD8561EF}"/>
+                <a16:creationId xmlns:a16="http://schemas.microsoft.com/office/drawing/2014/main" id="{75424DE4-0CD4-4A27-A33B-D39F2306EAC5}"/>
               </a:ext>
             </a:extLst>
           </p:cNvPr>
@@ -3567,24 +3421,24 @@
         <p:spPr>
           <a:xfrm xmlns:a="http://schemas.openxmlformats.org/drawingml/2006/main">
             <a:off x="609600" y="2038350"/>
-            <a:ext cx="10972800" cy="1790700"/>
-          </a:xfrm>
-          <a:prstGeom xmlns:a="http://schemas.openxmlformats.org/drawingml/2006/main" prst="rect">
-            <a:avLst/>
-          </a:prstGeom>
-          <a:noFill xmlns:a="http://schemas.openxmlformats.org/drawingml/2006/main"/>
-          <a:ln xmlns:a="http://schemas.openxmlformats.org/drawingml/2006/main" w="0">
-            <a:noFill/>
-          </a:ln>
-        </p:spPr>
-        <p:txBody>
-          <a:bodyPr xmlns:a="http://schemas.openxmlformats.org/drawingml/2006/main">
-            <a:noAutofit/>
-          </a:bodyPr>
-          <a:lstStyle xmlns:a="http://schemas.openxmlformats.org/drawingml/2006/main"/>
-          <a:p xmlns:a="http://schemas.openxmlformats.org/drawingml/2006/main">
-            <a:pPr algn="l">
-              <a:defRPr sz="3000" b="1" i="0">
+            <a:ext cx="5219700" cy="1790700"/>
+          </a:xfrm>
+          <a:prstGeom xmlns:a="http://schemas.openxmlformats.org/drawingml/2006/main" prst="rect">
+            <a:avLst/>
+          </a:prstGeom>
+          <a:noFill xmlns:a="http://schemas.openxmlformats.org/drawingml/2006/main"/>
+          <a:ln xmlns:a="http://schemas.openxmlformats.org/drawingml/2006/main" w="0">
+            <a:noFill/>
+          </a:ln>
+        </p:spPr>
+        <p:txBody>
+          <a:bodyPr xmlns:a="http://schemas.openxmlformats.org/drawingml/2006/main">
+            <a:noAutofit/>
+          </a:bodyPr>
+          <a:lstStyle xmlns:a="http://schemas.openxmlformats.org/drawingml/2006/main"/>
+          <a:p xmlns:a="http://schemas.openxmlformats.org/drawingml/2006/main">
+            <a:pPr algn="l">
+              <a:defRPr sz="2100" b="1" i="0">
                 <a:solidFill>
                   <a:srgbClr val="123C37"/>
                 </a:solidFill>
@@ -3594,7 +3448,7 @@
               </a:defRPr>
             </a:pPr>
             <a:r>
-              <a:rPr sz="3000" b="1" i="0">
+              <a:rPr sz="2100" b="1" i="0">
                 <a:solidFill>
                   <a:srgbClr val="123C37"/>
                 </a:solidFill>
@@ -3602,30 +3456,7 @@
                 <a:ea typeface="Arial"/>
                 <a:cs typeface="Arial"/>
               </a:rPr>
-              <a:t>[Câu hỏi cho cả lớp]</a:t>
-            </a:r>
-          </a:p>
-          <a:p xmlns:a="http://schemas.openxmlformats.org/drawingml/2006/main">
-            <a:pPr algn="l">
-              <a:defRPr sz="3000" b="1" i="0">
-                <a:solidFill>
-                  <a:srgbClr val="123C37"/>
-                </a:solidFill>
-                <a:latin typeface="Arial"/>
-                <a:ea typeface="Arial"/>
-                <a:cs typeface="Arial"/>
-              </a:defRPr>
-            </a:pPr>
-            <a:r>
-              <a:rPr sz="3000" b="1" i="0">
-                <a:solidFill>
-                  <a:srgbClr val="123C37"/>
-                </a:solidFill>
-                <a:latin typeface="Arial"/>
-                <a:ea typeface="Arial"/>
-                <a:cs typeface="Arial"/>
-              </a:rPr>
-              <a:t>[Điều học sinh cần giải thích]</a:t>
+              <a:t>Mặt trời góp phần như thế nào?</a:t>
             </a:r>
           </a:p>
         </p:txBody>
@@ -3635,7 +3466,7 @@
           <p:cNvPr id="6" name="question-5">
             <a:extLst xmlns:a="http://schemas.openxmlformats.org/drawingml/2006/main">
               <a:ext uri="{FF2B5EF4-FFF2-40B4-BE49-F238E27FC236}">
-                <a16:creationId xmlns:a16="http://schemas.microsoft.com/office/drawing/2014/main" id="{A4B15488-CF3D-49E4-8128-4B437E74E51A}"/>
+                <a16:creationId xmlns:a16="http://schemas.microsoft.com/office/drawing/2014/main" id="{4C2021BA-D468-4994-B5F6-2E4F2CAD9E87}"/>
               </a:ext>
             </a:extLst>
           </p:cNvPr>
@@ -3647,24 +3478,24 @@
         <p:spPr>
           <a:xfrm xmlns:a="http://schemas.openxmlformats.org/drawingml/2006/main">
             <a:off x="609600" y="4152900"/>
-            <a:ext cx="10972800" cy="1790700"/>
-          </a:xfrm>
-          <a:prstGeom xmlns:a="http://schemas.openxmlformats.org/drawingml/2006/main" prst="rect">
-            <a:avLst/>
-          </a:prstGeom>
-          <a:noFill xmlns:a="http://schemas.openxmlformats.org/drawingml/2006/main"/>
-          <a:ln xmlns:a="http://schemas.openxmlformats.org/drawingml/2006/main" w="0">
-            <a:noFill/>
-          </a:ln>
-        </p:spPr>
-        <p:txBody>
-          <a:bodyPr xmlns:a="http://schemas.openxmlformats.org/drawingml/2006/main">
-            <a:noAutofit/>
-          </a:bodyPr>
-          <a:lstStyle xmlns:a="http://schemas.openxmlformats.org/drawingml/2006/main"/>
-          <a:p xmlns:a="http://schemas.openxmlformats.org/drawingml/2006/main">
-            <a:pPr algn="l">
-              <a:defRPr sz="3000" b="1" i="1">
+            <a:ext cx="5219700" cy="1790700"/>
+          </a:xfrm>
+          <a:prstGeom xmlns:a="http://schemas.openxmlformats.org/drawingml/2006/main" prst="rect">
+            <a:avLst/>
+          </a:prstGeom>
+          <a:noFill xmlns:a="http://schemas.openxmlformats.org/drawingml/2006/main"/>
+          <a:ln xmlns:a="http://schemas.openxmlformats.org/drawingml/2006/main" w="0">
+            <a:noFill/>
+          </a:ln>
+        </p:spPr>
+        <p:txBody>
+          <a:bodyPr xmlns:a="http://schemas.openxmlformats.org/drawingml/2006/main">
+            <a:noAutofit/>
+          </a:bodyPr>
+          <a:lstStyle xmlns:a="http://schemas.openxmlformats.org/drawingml/2006/main"/>
+          <a:p xmlns:a="http://schemas.openxmlformats.org/drawingml/2006/main">
+            <a:pPr algn="l">
+              <a:defRPr sz="2100" b="1" i="1">
                 <a:solidFill>
                   <a:srgbClr val="087F70"/>
                 </a:solidFill>
@@ -3674,7 +3505,7 @@
               </a:defRPr>
             </a:pPr>
             <a:r>
-              <a:rPr sz="3000" b="1" i="1">
+              <a:rPr sz="2100" b="1" i="1">
                 <a:solidFill>
                   <a:srgbClr val="087F70"/>
                 </a:solidFill>
@@ -3682,38 +3513,43 @@
                 <a:ea typeface="Arial"/>
                 <a:cs typeface="Arial"/>
               </a:rPr>
-              <a:t>[Question for the class]</a:t>
-            </a:r>
-          </a:p>
-          <a:p xmlns:a="http://schemas.openxmlformats.org/drawingml/2006/main">
-            <a:pPr algn="l">
-              <a:defRPr sz="3000" b="1" i="1">
-                <a:solidFill>
-                  <a:srgbClr val="087F70"/>
-                </a:solidFill>
-                <a:latin typeface="Arial"/>
-                <a:ea typeface="Arial"/>
-                <a:cs typeface="Arial"/>
-              </a:defRPr>
-            </a:pPr>
-            <a:r>
-              <a:rPr sz="3000" b="1" i="1">
-                <a:solidFill>
-                  <a:srgbClr val="087F70"/>
-                </a:solidFill>
-                <a:latin typeface="Arial"/>
-                <a:ea typeface="Arial"/>
-                <a:cs typeface="Arial"/>
-              </a:rPr>
-              <a:t>[What students should explain]</a:t>
-            </a:r>
-          </a:p>
-        </p:txBody>
-      </p:sp>
+              <a:t>How does the Sun help?</a:t>
+            </a:r>
+          </a:p>
+        </p:txBody>
+      </p:sp>
+      <p:pic>
+        <p:nvPicPr>
+          <p:cNvPr id="14" name=""/>
+          <p:cNvPicPr>
+            <a:picLocks xmlns:a="http://schemas.openxmlformats.org/drawingml/2006/main" noChangeAspect="1"/>
+          </p:cNvPicPr>
+          <p:nvPr/>
+        </p:nvPicPr>
+        <p:blipFill>
+          <a:blip xmlns:r="http://schemas.openxmlformats.org/officeDocument/2006/relationships" xmlns:a="http://schemas.openxmlformats.org/drawingml/2006/main" r:embed="R311d8e96f32543bd">
+            <a:extLst>
+              <a:ext uri="{96DAC541-7B7A-43D3-8B79-37D633B846F1}">
+                <asvg:svgBlip xmlns:asvg="http://schemas.microsoft.com/office/drawing/2016/SVG/main" r:embed="R4ae011d9b7d84cb5"/>
+              </a:ext>
+            </a:extLst>
+          </a:blip>
+          <a:stretch xmlns:a="http://schemas.openxmlformats.org/drawingml/2006/main"/>
+        </p:blipFill>
+        <p:spPr>
+          <a:xfrm xmlns:a="http://schemas.openxmlformats.org/drawingml/2006/main">
+            <a:off x="6629400" y="2038350"/>
+            <a:ext cx="4953000" cy="3905250"/>
+          </a:xfrm>
+          <a:prstGeom xmlns:a="http://schemas.openxmlformats.org/drawingml/2006/main" prst="rect">
+            <a:avLst/>
+          </a:prstGeom>
+        </p:spPr>
+      </p:pic>
     </p:spTree>
     <p:extLst>
       <p:ext uri="{BB962C8B-B14F-4D97-AF65-F5344CB8AC3E}">
-        <p14:creationId xmlns:p14="http://schemas.microsoft.com/office/powerpoint/2010/main" val="1092297203"/>
+        <p14:creationId xmlns:p14="http://schemas.microsoft.com/office/powerpoint/2010/main" val="854556360"/>
       </p:ext>
     </p:extLst>
   </p:cSld>
@@ -3741,10 +3577,10 @@
       </p:grpSpPr>
       <p:sp>
         <p:nvSpPr>
-          <p:cNvPr id="7" name="check-0">
-            <a:extLst xmlns:a="http://schemas.openxmlformats.org/drawingml/2006/main">
-              <a:ext uri="{FF2B5EF4-FFF2-40B4-BE49-F238E27FC236}">
-                <a16:creationId xmlns:a16="http://schemas.microsoft.com/office/drawing/2014/main" id="{B9F1F435-46FC-467B-87D6-423754F4834C}"/>
+          <p:cNvPr id="8" name="check-0">
+            <a:extLst xmlns:a="http://schemas.openxmlformats.org/drawingml/2006/main">
+              <a:ext uri="{FF2B5EF4-FFF2-40B4-BE49-F238E27FC236}">
+                <a16:creationId xmlns:a16="http://schemas.microsoft.com/office/drawing/2014/main" id="{DB1B293D-8C02-4FC4-B5FA-2080BB985DAC}"/>
               </a:ext>
             </a:extLst>
           </p:cNvPr>
@@ -3791,7 +3627,7 @@
                 <a:ea typeface="Arial"/>
                 <a:cs typeface="Arial"/>
               </a:rPr>
-              <a:t>BiliClass   /   Môn học của thầy cô   /   10–12</a:t>
+              <a:t>BiliClass   /   Khoa học · ví dụ minh họa   /   </a:t>
             </a:r>
           </a:p>
         </p:txBody>
@@ -3801,7 +3637,7 @@
           <p:cNvPr id="2" name="check-1">
             <a:extLst xmlns:a="http://schemas.openxmlformats.org/drawingml/2006/main">
               <a:ext uri="{FF2B5EF4-FFF2-40B4-BE49-F238E27FC236}">
-                <a16:creationId xmlns:a16="http://schemas.microsoft.com/office/drawing/2014/main" id="{00E6E927-B9F6-473D-AF71-0F218D77A21C}"/>
+                <a16:creationId xmlns:a16="http://schemas.microsoft.com/office/drawing/2014/main" id="{FC9F8783-4BBE-4B05-A16D-73F3F5F25EA7}"/>
               </a:ext>
             </a:extLst>
           </p:cNvPr>
@@ -3848,7 +3684,7 @@
                 <a:ea typeface="Arial"/>
                 <a:cs typeface="Arial"/>
               </a:rPr>
-              <a:t>Mẫu bài giảng song ngữ</a:t>
+              <a:t>Vòng tuần hoàn của nước</a:t>
             </a:r>
           </a:p>
         </p:txBody>
@@ -3858,7 +3694,7 @@
           <p:cNvPr id="3" name="check-2">
             <a:extLst xmlns:a="http://schemas.openxmlformats.org/drawingml/2006/main">
               <a:ext uri="{FF2B5EF4-FFF2-40B4-BE49-F238E27FC236}">
-                <a16:creationId xmlns:a16="http://schemas.microsoft.com/office/drawing/2014/main" id="{C98B0F4A-9F97-442E-9F04-C3BFED42DA09}"/>
+                <a16:creationId xmlns:a16="http://schemas.microsoft.com/office/drawing/2014/main" id="{2FECCF44-118C-4552-A8CC-7A16C1241E66}"/>
               </a:ext>
             </a:extLst>
           </p:cNvPr>
@@ -3915,7 +3751,7 @@
           <p:cNvPr id="4" name="check-3">
             <a:extLst xmlns:a="http://schemas.openxmlformats.org/drawingml/2006/main">
               <a:ext uri="{FF2B5EF4-FFF2-40B4-BE49-F238E27FC236}">
-                <a16:creationId xmlns:a16="http://schemas.microsoft.com/office/drawing/2014/main" id="{296E2C94-AB2B-4CBA-B8D4-3599037D7C28}"/>
+                <a16:creationId xmlns:a16="http://schemas.microsoft.com/office/drawing/2014/main" id="{A39572FE-5A53-4AC3-A4EC-971F1BFC95B0}"/>
               </a:ext>
             </a:extLst>
           </p:cNvPr>
@@ -3962,7 +3798,7 @@
                 <a:ea typeface="Arial"/>
                 <a:cs typeface="Arial"/>
               </a:rPr>
-              <a:t>Mẫu cấu trúc · Thay bằng nội dung bài học</a:t>
+              <a:t>Ví dụ để xem thiết kế · Bài của thầy cô dùng nội dung và hình từ nguồn</a:t>
             </a:r>
           </a:p>
         </p:txBody>
@@ -3972,7 +3808,7 @@
           <p:cNvPr id="5" name="check-4">
             <a:extLst xmlns:a="http://schemas.openxmlformats.org/drawingml/2006/main">
               <a:ext uri="{FF2B5EF4-FFF2-40B4-BE49-F238E27FC236}">
-                <a16:creationId xmlns:a16="http://schemas.microsoft.com/office/drawing/2014/main" id="{4C4C3FEB-8246-4446-BDD7-0F96BB3A5257}"/>
+                <a16:creationId xmlns:a16="http://schemas.microsoft.com/office/drawing/2014/main" id="{1DCA3BAE-F5C7-45E0-B960-088E125DEA0B}"/>
               </a:ext>
             </a:extLst>
           </p:cNvPr>
@@ -3984,24 +3820,24 @@
         <p:spPr>
           <a:xfrm xmlns:a="http://schemas.openxmlformats.org/drawingml/2006/main">
             <a:off x="609600" y="2038350"/>
-            <a:ext cx="10972800" cy="1790700"/>
-          </a:xfrm>
-          <a:prstGeom xmlns:a="http://schemas.openxmlformats.org/drawingml/2006/main" prst="rect">
-            <a:avLst/>
-          </a:prstGeom>
-          <a:noFill xmlns:a="http://schemas.openxmlformats.org/drawingml/2006/main"/>
-          <a:ln xmlns:a="http://schemas.openxmlformats.org/drawingml/2006/main" w="0">
-            <a:noFill/>
-          </a:ln>
-        </p:spPr>
-        <p:txBody>
-          <a:bodyPr xmlns:a="http://schemas.openxmlformats.org/drawingml/2006/main">
-            <a:noAutofit/>
-          </a:bodyPr>
-          <a:lstStyle xmlns:a="http://schemas.openxmlformats.org/drawingml/2006/main"/>
-          <a:p xmlns:a="http://schemas.openxmlformats.org/drawingml/2006/main">
-            <a:pPr algn="l">
-              <a:defRPr sz="2550" b="0" i="0">
+            <a:ext cx="5219700" cy="1790700"/>
+          </a:xfrm>
+          <a:prstGeom xmlns:a="http://schemas.openxmlformats.org/drawingml/2006/main" prst="rect">
+            <a:avLst/>
+          </a:prstGeom>
+          <a:noFill xmlns:a="http://schemas.openxmlformats.org/drawingml/2006/main"/>
+          <a:ln xmlns:a="http://schemas.openxmlformats.org/drawingml/2006/main" w="0">
+            <a:noFill/>
+          </a:ln>
+        </p:spPr>
+        <p:txBody>
+          <a:bodyPr xmlns:a="http://schemas.openxmlformats.org/drawingml/2006/main">
+            <a:noAutofit/>
+          </a:bodyPr>
+          <a:lstStyle xmlns:a="http://schemas.openxmlformats.org/drawingml/2006/main"/>
+          <a:p xmlns:a="http://schemas.openxmlformats.org/drawingml/2006/main">
+            <a:pPr algn="l">
+              <a:defRPr sz="2100" b="0" i="0">
                 <a:solidFill>
                   <a:srgbClr val="123C37"/>
                 </a:solidFill>
@@ -4011,7 +3847,7 @@
               </a:defRPr>
             </a:pPr>
             <a:r>
-              <a:rPr sz="2550" b="0" i="0">
+              <a:rPr sz="2100" b="0" i="0">
                 <a:solidFill>
                   <a:srgbClr val="123C37"/>
                 </a:solidFill>
@@ -4019,30 +3855,7 @@
                 <a:ea typeface="Arial"/>
                 <a:cs typeface="Arial"/>
               </a:rPr>
-              <a:t>[Câu hỏi kiểm tra]</a:t>
-            </a:r>
-          </a:p>
-          <a:p xmlns:a="http://schemas.openxmlformats.org/drawingml/2006/main">
-            <a:pPr algn="l">
-              <a:defRPr sz="2550" b="0" i="0">
-                <a:solidFill>
-                  <a:srgbClr val="123C37"/>
-                </a:solidFill>
-                <a:latin typeface="Arial"/>
-                <a:ea typeface="Arial"/>
-                <a:cs typeface="Arial"/>
-              </a:defRPr>
-            </a:pPr>
-            <a:r>
-              <a:rPr sz="2550" b="0" i="0">
-                <a:solidFill>
-                  <a:srgbClr val="123C37"/>
-                </a:solidFill>
-                <a:latin typeface="Arial"/>
-                <a:ea typeface="Arial"/>
-                <a:cs typeface="Arial"/>
-              </a:rPr>
-              <a:t>[Nội dung học sinh cần trả lời]</a:t>
+              <a:t>Hơi nước thành giọt: bước nào?</a:t>
             </a:r>
           </a:p>
         </p:txBody>
@@ -4052,7 +3865,7 @@
           <p:cNvPr id="6" name="check-5">
             <a:extLst xmlns:a="http://schemas.openxmlformats.org/drawingml/2006/main">
               <a:ext uri="{FF2B5EF4-FFF2-40B4-BE49-F238E27FC236}">
-                <a16:creationId xmlns:a16="http://schemas.microsoft.com/office/drawing/2014/main" id="{EDF8CB91-D23E-4D0E-BDBD-6604556F4DF8}"/>
+                <a16:creationId xmlns:a16="http://schemas.microsoft.com/office/drawing/2014/main" id="{8911846B-5385-4D2A-90BB-D5DA6F67E5CB}"/>
               </a:ext>
             </a:extLst>
           </p:cNvPr>
@@ -4064,24 +3877,24 @@
         <p:spPr>
           <a:xfrm xmlns:a="http://schemas.openxmlformats.org/drawingml/2006/main">
             <a:off x="609600" y="4152900"/>
-            <a:ext cx="10972800" cy="1790700"/>
-          </a:xfrm>
-          <a:prstGeom xmlns:a="http://schemas.openxmlformats.org/drawingml/2006/main" prst="rect">
-            <a:avLst/>
-          </a:prstGeom>
-          <a:noFill xmlns:a="http://schemas.openxmlformats.org/drawingml/2006/main"/>
-          <a:ln xmlns:a="http://schemas.openxmlformats.org/drawingml/2006/main" w="0">
-            <a:noFill/>
-          </a:ln>
-        </p:spPr>
-        <p:txBody>
-          <a:bodyPr xmlns:a="http://schemas.openxmlformats.org/drawingml/2006/main">
-            <a:noAutofit/>
-          </a:bodyPr>
-          <a:lstStyle xmlns:a="http://schemas.openxmlformats.org/drawingml/2006/main"/>
-          <a:p xmlns:a="http://schemas.openxmlformats.org/drawingml/2006/main">
-            <a:pPr algn="l">
-              <a:defRPr sz="2550" b="0" i="1">
+            <a:ext cx="5219700" cy="1790700"/>
+          </a:xfrm>
+          <a:prstGeom xmlns:a="http://schemas.openxmlformats.org/drawingml/2006/main" prst="rect">
+            <a:avLst/>
+          </a:prstGeom>
+          <a:noFill xmlns:a="http://schemas.openxmlformats.org/drawingml/2006/main"/>
+          <a:ln xmlns:a="http://schemas.openxmlformats.org/drawingml/2006/main" w="0">
+            <a:noFill/>
+          </a:ln>
+        </p:spPr>
+        <p:txBody>
+          <a:bodyPr xmlns:a="http://schemas.openxmlformats.org/drawingml/2006/main">
+            <a:noAutofit/>
+          </a:bodyPr>
+          <a:lstStyle xmlns:a="http://schemas.openxmlformats.org/drawingml/2006/main"/>
+          <a:p xmlns:a="http://schemas.openxmlformats.org/drawingml/2006/main">
+            <a:pPr algn="l">
+              <a:defRPr sz="2100" b="0" i="1">
                 <a:solidFill>
                   <a:srgbClr val="087F70"/>
                 </a:solidFill>
@@ -4091,7 +3904,7 @@
               </a:defRPr>
             </a:pPr>
             <a:r>
-              <a:rPr sz="2550" b="0" i="1">
+              <a:rPr sz="2100" b="0" i="1">
                 <a:solidFill>
                   <a:srgbClr val="087F70"/>
                 </a:solidFill>
@@ -4099,38 +3912,43 @@
                 <a:ea typeface="Arial"/>
                 <a:cs typeface="Arial"/>
               </a:rPr>
-              <a:t>[Check question]</a:t>
-            </a:r>
-          </a:p>
-          <a:p xmlns:a="http://schemas.openxmlformats.org/drawingml/2006/main">
-            <a:pPr algn="l">
-              <a:defRPr sz="2550" b="0" i="1">
-                <a:solidFill>
-                  <a:srgbClr val="087F70"/>
-                </a:solidFill>
-                <a:latin typeface="Arial"/>
-                <a:ea typeface="Arial"/>
-                <a:cs typeface="Arial"/>
-              </a:defRPr>
-            </a:pPr>
-            <a:r>
-              <a:rPr sz="2550" b="0" i="1">
-                <a:solidFill>
-                  <a:srgbClr val="087F70"/>
-                </a:solidFill>
-                <a:latin typeface="Arial"/>
-                <a:ea typeface="Arial"/>
-                <a:cs typeface="Arial"/>
-              </a:rPr>
-              <a:t>[What students should answer]</a:t>
-            </a:r>
-          </a:p>
-        </p:txBody>
-      </p:sp>
+              <a:t>Which stage turns vapour into droplets?</a:t>
+            </a:r>
+          </a:p>
+        </p:txBody>
+      </p:sp>
+      <p:pic>
+        <p:nvPicPr>
+          <p:cNvPr id="14" name=""/>
+          <p:cNvPicPr>
+            <a:picLocks xmlns:a="http://schemas.openxmlformats.org/drawingml/2006/main" noChangeAspect="1"/>
+          </p:cNvPicPr>
+          <p:nvPr/>
+        </p:nvPicPr>
+        <p:blipFill>
+          <a:blip xmlns:r="http://schemas.openxmlformats.org/officeDocument/2006/relationships" xmlns:a="http://schemas.openxmlformats.org/drawingml/2006/main" r:embed="Rf32bb2ffdb734b03">
+            <a:extLst>
+              <a:ext uri="{96DAC541-7B7A-43D3-8B79-37D633B846F1}">
+                <asvg:svgBlip xmlns:asvg="http://schemas.microsoft.com/office/drawing/2016/SVG/main" r:embed="Rd3efd1023f014e55"/>
+              </a:ext>
+            </a:extLst>
+          </a:blip>
+          <a:stretch xmlns:a="http://schemas.openxmlformats.org/drawingml/2006/main"/>
+        </p:blipFill>
+        <p:spPr>
+          <a:xfrm xmlns:a="http://schemas.openxmlformats.org/drawingml/2006/main">
+            <a:off x="6629400" y="2038350"/>
+            <a:ext cx="4953000" cy="3905250"/>
+          </a:xfrm>
+          <a:prstGeom xmlns:a="http://schemas.openxmlformats.org/drawingml/2006/main" prst="rect">
+            <a:avLst/>
+          </a:prstGeom>
+        </p:spPr>
+      </p:pic>
     </p:spTree>
     <p:extLst>
       <p:ext uri="{BB962C8B-B14F-4D97-AF65-F5344CB8AC3E}">
-        <p14:creationId xmlns:p14="http://schemas.microsoft.com/office/powerpoint/2010/main" val="1764505266"/>
+        <p14:creationId xmlns:p14="http://schemas.microsoft.com/office/powerpoint/2010/main" val="1987560607"/>
       </p:ext>
     </p:extLst>
   </p:cSld>
@@ -4158,10 +3976,10 @@
       </p:grpSpPr>
       <p:sp>
         <p:nvSpPr>
-          <p:cNvPr id="7" name="summary-0">
-            <a:extLst xmlns:a="http://schemas.openxmlformats.org/drawingml/2006/main">
-              <a:ext uri="{FF2B5EF4-FFF2-40B4-BE49-F238E27FC236}">
-                <a16:creationId xmlns:a16="http://schemas.microsoft.com/office/drawing/2014/main" id="{8781112C-0E7F-4D74-8A0A-4887364E61F6}"/>
+          <p:cNvPr id="8" name="summary-0">
+            <a:extLst xmlns:a="http://schemas.openxmlformats.org/drawingml/2006/main">
+              <a:ext uri="{FF2B5EF4-FFF2-40B4-BE49-F238E27FC236}">
+                <a16:creationId xmlns:a16="http://schemas.microsoft.com/office/drawing/2014/main" id="{75F0EA04-0424-4DBB-AAAC-8E7943A61398}"/>
               </a:ext>
             </a:extLst>
           </p:cNvPr>
@@ -4208,7 +4026,7 @@
                 <a:ea typeface="Arial"/>
                 <a:cs typeface="Arial"/>
               </a:rPr>
-              <a:t>BiliClass   /   Môn học của thầy cô   /   10–12</a:t>
+              <a:t>BiliClass   /   Khoa học · ví dụ minh họa   /   </a:t>
             </a:r>
           </a:p>
         </p:txBody>
@@ -4218,7 +4036,7 @@
           <p:cNvPr id="2" name="summary-1">
             <a:extLst xmlns:a="http://schemas.openxmlformats.org/drawingml/2006/main">
               <a:ext uri="{FF2B5EF4-FFF2-40B4-BE49-F238E27FC236}">
-                <a16:creationId xmlns:a16="http://schemas.microsoft.com/office/drawing/2014/main" id="{737AF99A-CEC4-4045-A7DE-173EE1F53CA1}"/>
+                <a16:creationId xmlns:a16="http://schemas.microsoft.com/office/drawing/2014/main" id="{665FB577-14B7-4199-A016-A3905D04DDF2}"/>
               </a:ext>
             </a:extLst>
           </p:cNvPr>
@@ -4265,7 +4083,7 @@
                 <a:ea typeface="Arial"/>
                 <a:cs typeface="Arial"/>
               </a:rPr>
-              <a:t>Mẫu bài giảng song ngữ</a:t>
+              <a:t>Vòng tuần hoàn của nước</a:t>
             </a:r>
           </a:p>
         </p:txBody>
@@ -4275,7 +4093,7 @@
           <p:cNvPr id="3" name="summary-2">
             <a:extLst xmlns:a="http://schemas.openxmlformats.org/drawingml/2006/main">
               <a:ext uri="{FF2B5EF4-FFF2-40B4-BE49-F238E27FC236}">
-                <a16:creationId xmlns:a16="http://schemas.microsoft.com/office/drawing/2014/main" id="{C3BBBD27-A778-451F-92C5-1B58B69AD141}"/>
+                <a16:creationId xmlns:a16="http://schemas.microsoft.com/office/drawing/2014/main" id="{A7FF97C9-69B0-41DA-A1A8-760A1397A1A0}"/>
               </a:ext>
             </a:extLst>
           </p:cNvPr>
@@ -4332,7 +4150,7 @@
           <p:cNvPr id="4" name="summary-3">
             <a:extLst xmlns:a="http://schemas.openxmlformats.org/drawingml/2006/main">
               <a:ext uri="{FF2B5EF4-FFF2-40B4-BE49-F238E27FC236}">
-                <a16:creationId xmlns:a16="http://schemas.microsoft.com/office/drawing/2014/main" id="{8D4995F9-9045-4FFD-9299-C74073ABC19C}"/>
+                <a16:creationId xmlns:a16="http://schemas.microsoft.com/office/drawing/2014/main" id="{2CCC5EFF-5030-40CD-91BA-A932D6C49EA5}"/>
               </a:ext>
             </a:extLst>
           </p:cNvPr>
@@ -4379,7 +4197,7 @@
                 <a:ea typeface="Arial"/>
                 <a:cs typeface="Arial"/>
               </a:rPr>
-              <a:t>Mẫu cấu trúc · Thay bằng nội dung bài học</a:t>
+              <a:t>Ví dụ để xem thiết kế · Bài của thầy cô dùng nội dung và hình từ nguồn</a:t>
             </a:r>
           </a:p>
         </p:txBody>
@@ -4389,7 +4207,7 @@
           <p:cNvPr id="5" name="summary-4">
             <a:extLst xmlns:a="http://schemas.openxmlformats.org/drawingml/2006/main">
               <a:ext uri="{FF2B5EF4-FFF2-40B4-BE49-F238E27FC236}">
-                <a16:creationId xmlns:a16="http://schemas.microsoft.com/office/drawing/2014/main" id="{99F30A33-408C-4843-858F-C3C7C00025A2}"/>
+                <a16:creationId xmlns:a16="http://schemas.microsoft.com/office/drawing/2014/main" id="{B1568DF5-A753-4C0D-83CD-2B0E55D7004E}"/>
               </a:ext>
             </a:extLst>
           </p:cNvPr>
@@ -4401,24 +4219,24 @@
         <p:spPr>
           <a:xfrm xmlns:a="http://schemas.openxmlformats.org/drawingml/2006/main">
             <a:off x="609600" y="2038350"/>
-            <a:ext cx="10972800" cy="1790700"/>
-          </a:xfrm>
-          <a:prstGeom xmlns:a="http://schemas.openxmlformats.org/drawingml/2006/main" prst="rect">
-            <a:avLst/>
-          </a:prstGeom>
-          <a:noFill xmlns:a="http://schemas.openxmlformats.org/drawingml/2006/main"/>
-          <a:ln xmlns:a="http://schemas.openxmlformats.org/drawingml/2006/main" w="0">
-            <a:noFill/>
-          </a:ln>
-        </p:spPr>
-        <p:txBody>
-          <a:bodyPr xmlns:a="http://schemas.openxmlformats.org/drawingml/2006/main">
-            <a:noAutofit/>
-          </a:bodyPr>
-          <a:lstStyle xmlns:a="http://schemas.openxmlformats.org/drawingml/2006/main"/>
-          <a:p xmlns:a="http://schemas.openxmlformats.org/drawingml/2006/main">
-            <a:pPr algn="l">
-              <a:defRPr sz="2550" b="0" i="0">
+            <a:ext cx="5219700" cy="1790700"/>
+          </a:xfrm>
+          <a:prstGeom xmlns:a="http://schemas.openxmlformats.org/drawingml/2006/main" prst="rect">
+            <a:avLst/>
+          </a:prstGeom>
+          <a:noFill xmlns:a="http://schemas.openxmlformats.org/drawingml/2006/main"/>
+          <a:ln xmlns:a="http://schemas.openxmlformats.org/drawingml/2006/main" w="0">
+            <a:noFill/>
+          </a:ln>
+        </p:spPr>
+        <p:txBody>
+          <a:bodyPr xmlns:a="http://schemas.openxmlformats.org/drawingml/2006/main">
+            <a:noAutofit/>
+          </a:bodyPr>
+          <a:lstStyle xmlns:a="http://schemas.openxmlformats.org/drawingml/2006/main"/>
+          <a:p xmlns:a="http://schemas.openxmlformats.org/drawingml/2006/main">
+            <a:pPr algn="l">
+              <a:defRPr sz="2100" b="0" i="0">
                 <a:solidFill>
                   <a:srgbClr val="123C37"/>
                 </a:solidFill>
@@ -4428,7 +4246,7 @@
               </a:defRPr>
             </a:pPr>
             <a:r>
-              <a:rPr sz="2550" b="0" i="0">
+              <a:rPr sz="2100" b="0" i="0">
                 <a:solidFill>
                   <a:srgbClr val="123C37"/>
                 </a:solidFill>
@@ -4436,30 +4254,7 @@
                 <a:ea typeface="Arial"/>
                 <a:cs typeface="Arial"/>
               </a:rPr>
-              <a:t>[Ý chính cần ghi nhớ]</a:t>
-            </a:r>
-          </a:p>
-          <a:p xmlns:a="http://schemas.openxmlformats.org/drawingml/2006/main">
-            <a:pPr algn="l">
-              <a:defRPr sz="2550" b="0" i="0">
-                <a:solidFill>
-                  <a:srgbClr val="123C37"/>
-                </a:solidFill>
-                <a:latin typeface="Arial"/>
-                <a:ea typeface="Arial"/>
-                <a:cs typeface="Arial"/>
-              </a:defRPr>
-            </a:pPr>
-            <a:r>
-              <a:rPr sz="2550" b="0" i="0">
-                <a:solidFill>
-                  <a:srgbClr val="123C37"/>
-                </a:solidFill>
-                <a:latin typeface="Arial"/>
-                <a:ea typeface="Arial"/>
-                <a:cs typeface="Arial"/>
-              </a:rPr>
-              <a:t>[Điều học sinh cần giải thích cuối tiết]</a:t>
+              <a:t>Bay hơi → ngưng tụ → mưa.</a:t>
             </a:r>
           </a:p>
         </p:txBody>
@@ -4469,7 +4264,7 @@
           <p:cNvPr id="6" name="summary-5">
             <a:extLst xmlns:a="http://schemas.openxmlformats.org/drawingml/2006/main">
               <a:ext uri="{FF2B5EF4-FFF2-40B4-BE49-F238E27FC236}">
-                <a16:creationId xmlns:a16="http://schemas.microsoft.com/office/drawing/2014/main" id="{D91BF274-9A48-493D-A9E5-D226C74EE279}"/>
+                <a16:creationId xmlns:a16="http://schemas.microsoft.com/office/drawing/2014/main" id="{B1D81C3D-F489-405E-86F6-7A31B4775E2C}"/>
               </a:ext>
             </a:extLst>
           </p:cNvPr>
@@ -4481,24 +4276,24 @@
         <p:spPr>
           <a:xfrm xmlns:a="http://schemas.openxmlformats.org/drawingml/2006/main">
             <a:off x="609600" y="4152900"/>
-            <a:ext cx="10972800" cy="1790700"/>
-          </a:xfrm>
-          <a:prstGeom xmlns:a="http://schemas.openxmlformats.org/drawingml/2006/main" prst="rect">
-            <a:avLst/>
-          </a:prstGeom>
-          <a:noFill xmlns:a="http://schemas.openxmlformats.org/drawingml/2006/main"/>
-          <a:ln xmlns:a="http://schemas.openxmlformats.org/drawingml/2006/main" w="0">
-            <a:noFill/>
-          </a:ln>
-        </p:spPr>
-        <p:txBody>
-          <a:bodyPr xmlns:a="http://schemas.openxmlformats.org/drawingml/2006/main">
-            <a:noAutofit/>
-          </a:bodyPr>
-          <a:lstStyle xmlns:a="http://schemas.openxmlformats.org/drawingml/2006/main"/>
-          <a:p xmlns:a="http://schemas.openxmlformats.org/drawingml/2006/main">
-            <a:pPr algn="l">
-              <a:defRPr sz="2550" b="0" i="1">
+            <a:ext cx="5219700" cy="1790700"/>
+          </a:xfrm>
+          <a:prstGeom xmlns:a="http://schemas.openxmlformats.org/drawingml/2006/main" prst="rect">
+            <a:avLst/>
+          </a:prstGeom>
+          <a:noFill xmlns:a="http://schemas.openxmlformats.org/drawingml/2006/main"/>
+          <a:ln xmlns:a="http://schemas.openxmlformats.org/drawingml/2006/main" w="0">
+            <a:noFill/>
+          </a:ln>
+        </p:spPr>
+        <p:txBody>
+          <a:bodyPr xmlns:a="http://schemas.openxmlformats.org/drawingml/2006/main">
+            <a:noAutofit/>
+          </a:bodyPr>
+          <a:lstStyle xmlns:a="http://schemas.openxmlformats.org/drawingml/2006/main"/>
+          <a:p xmlns:a="http://schemas.openxmlformats.org/drawingml/2006/main">
+            <a:pPr algn="l">
+              <a:defRPr sz="2100" b="0" i="1">
                 <a:solidFill>
                   <a:srgbClr val="087F70"/>
                 </a:solidFill>
@@ -4508,7 +4303,7 @@
               </a:defRPr>
             </a:pPr>
             <a:r>
-              <a:rPr sz="2550" b="0" i="1">
+              <a:rPr sz="2100" b="0" i="1">
                 <a:solidFill>
                   <a:srgbClr val="087F70"/>
                 </a:solidFill>
@@ -4516,38 +4311,43 @@
                 <a:ea typeface="Arial"/>
                 <a:cs typeface="Arial"/>
               </a:rPr>
-              <a:t>[Key idea to remember]</a:t>
-            </a:r>
-          </a:p>
-          <a:p xmlns:a="http://schemas.openxmlformats.org/drawingml/2006/main">
-            <a:pPr algn="l">
-              <a:defRPr sz="2550" b="0" i="1">
-                <a:solidFill>
-                  <a:srgbClr val="087F70"/>
-                </a:solidFill>
-                <a:latin typeface="Arial"/>
-                <a:ea typeface="Arial"/>
-                <a:cs typeface="Arial"/>
-              </a:defRPr>
-            </a:pPr>
-            <a:r>
-              <a:rPr sz="2550" b="0" i="1">
-                <a:solidFill>
-                  <a:srgbClr val="087F70"/>
-                </a:solidFill>
-                <a:latin typeface="Arial"/>
-                <a:ea typeface="Arial"/>
-                <a:cs typeface="Arial"/>
-              </a:rPr>
-              <a:t>[What students should explain at the end]</a:t>
-            </a:r>
-          </a:p>
-        </p:txBody>
-      </p:sp>
+              <a:t>Evaporation → condensation → rain.</a:t>
+            </a:r>
+          </a:p>
+        </p:txBody>
+      </p:sp>
+      <p:pic>
+        <p:nvPicPr>
+          <p:cNvPr id="14" name=""/>
+          <p:cNvPicPr>
+            <a:picLocks xmlns:a="http://schemas.openxmlformats.org/drawingml/2006/main" noChangeAspect="1"/>
+          </p:cNvPicPr>
+          <p:nvPr/>
+        </p:nvPicPr>
+        <p:blipFill>
+          <a:blip xmlns:r="http://schemas.openxmlformats.org/officeDocument/2006/relationships" xmlns:a="http://schemas.openxmlformats.org/drawingml/2006/main" r:embed="Rb598655273b34899">
+            <a:extLst>
+              <a:ext uri="{96DAC541-7B7A-43D3-8B79-37D633B846F1}">
+                <asvg:svgBlip xmlns:asvg="http://schemas.microsoft.com/office/drawing/2016/SVG/main" r:embed="Rb929f44d391f438b"/>
+              </a:ext>
+            </a:extLst>
+          </a:blip>
+          <a:stretch xmlns:a="http://schemas.openxmlformats.org/drawingml/2006/main"/>
+        </p:blipFill>
+        <p:spPr>
+          <a:xfrm xmlns:a="http://schemas.openxmlformats.org/drawingml/2006/main">
+            <a:off x="6629400" y="2038350"/>
+            <a:ext cx="4953000" cy="3905250"/>
+          </a:xfrm>
+          <a:prstGeom xmlns:a="http://schemas.openxmlformats.org/drawingml/2006/main" prst="rect">
+            <a:avLst/>
+          </a:prstGeom>
+        </p:spPr>
+      </p:pic>
     </p:spTree>
     <p:extLst>
       <p:ext uri="{BB962C8B-B14F-4D97-AF65-F5344CB8AC3E}">
-        <p14:creationId xmlns:p14="http://schemas.microsoft.com/office/powerpoint/2010/main" val="1353490160"/>
+        <p14:creationId xmlns:p14="http://schemas.microsoft.com/office/powerpoint/2010/main" val="592477903"/>
       </p:ext>
     </p:extLst>
   </p:cSld>
@@ -4575,10 +4375,10 @@
       </p:grpSpPr>
       <p:sp>
         <p:nvSpPr>
-          <p:cNvPr id="7" name="goal-0">
-            <a:extLst xmlns:a="http://schemas.openxmlformats.org/drawingml/2006/main">
-              <a:ext uri="{FF2B5EF4-FFF2-40B4-BE49-F238E27FC236}">
-                <a16:creationId xmlns:a16="http://schemas.microsoft.com/office/drawing/2014/main" id="{2A31744D-5CD1-4CA4-AE8A-2F5863E6F0D5}"/>
+          <p:cNvPr id="8" name="goal-0">
+            <a:extLst xmlns:a="http://schemas.openxmlformats.org/drawingml/2006/main">
+              <a:ext uri="{FF2B5EF4-FFF2-40B4-BE49-F238E27FC236}">
+                <a16:creationId xmlns:a16="http://schemas.microsoft.com/office/drawing/2014/main" id="{45E223E9-17C8-488F-9109-A6F79579A370}"/>
               </a:ext>
             </a:extLst>
           </p:cNvPr>
@@ -4625,7 +4425,7 @@
                 <a:ea typeface="Arial"/>
                 <a:cs typeface="Arial"/>
               </a:rPr>
-              <a:t>BiliClass   /   Môn học của thầy cô   /   10–12</a:t>
+              <a:t>BiliClass   /   Khoa học · ví dụ minh họa   /   </a:t>
             </a:r>
           </a:p>
         </p:txBody>
@@ -4635,7 +4435,7 @@
           <p:cNvPr id="2" name="goal-1">
             <a:extLst xmlns:a="http://schemas.openxmlformats.org/drawingml/2006/main">
               <a:ext uri="{FF2B5EF4-FFF2-40B4-BE49-F238E27FC236}">
-                <a16:creationId xmlns:a16="http://schemas.microsoft.com/office/drawing/2014/main" id="{AD356954-54DE-4781-86B8-65B225E40507}"/>
+                <a16:creationId xmlns:a16="http://schemas.microsoft.com/office/drawing/2014/main" id="{CFCDBDCB-8A8E-4613-A272-729368CEDEF7}"/>
               </a:ext>
             </a:extLst>
           </p:cNvPr>
@@ -4682,7 +4482,7 @@
                 <a:ea typeface="Arial"/>
                 <a:cs typeface="Arial"/>
               </a:rPr>
-              <a:t>Mẫu bài giảng song ngữ</a:t>
+              <a:t>Vòng tuần hoàn của nước</a:t>
             </a:r>
           </a:p>
         </p:txBody>
@@ -4692,7 +4492,7 @@
           <p:cNvPr id="3" name="goal-2">
             <a:extLst xmlns:a="http://schemas.openxmlformats.org/drawingml/2006/main">
               <a:ext uri="{FF2B5EF4-FFF2-40B4-BE49-F238E27FC236}">
-                <a16:creationId xmlns:a16="http://schemas.microsoft.com/office/drawing/2014/main" id="{D3513CC6-575D-4914-89EC-DFF1D2724803}"/>
+                <a16:creationId xmlns:a16="http://schemas.microsoft.com/office/drawing/2014/main" id="{FC1B31F0-315A-44F2-AA3F-A0C23C25EC2E}"/>
               </a:ext>
             </a:extLst>
           </p:cNvPr>
@@ -4749,7 +4549,7 @@
           <p:cNvPr id="4" name="goal-3">
             <a:extLst xmlns:a="http://schemas.openxmlformats.org/drawingml/2006/main">
               <a:ext uri="{FF2B5EF4-FFF2-40B4-BE49-F238E27FC236}">
-                <a16:creationId xmlns:a16="http://schemas.microsoft.com/office/drawing/2014/main" id="{3F674B2D-3346-443B-B849-7D2E99D1F814}"/>
+                <a16:creationId xmlns:a16="http://schemas.microsoft.com/office/drawing/2014/main" id="{64B3F3DE-A6C2-450C-900B-ECE0619036F1}"/>
               </a:ext>
             </a:extLst>
           </p:cNvPr>
@@ -4796,7 +4596,7 @@
                 <a:ea typeface="Arial"/>
                 <a:cs typeface="Arial"/>
               </a:rPr>
-              <a:t>Mẫu cấu trúc · Thay bằng nội dung bài học</a:t>
+              <a:t>Ví dụ để xem thiết kế · Bài của thầy cô dùng nội dung và hình từ nguồn</a:t>
             </a:r>
           </a:p>
         </p:txBody>
@@ -4806,7 +4606,7 @@
           <p:cNvPr id="5" name="goal-4">
             <a:extLst xmlns:a="http://schemas.openxmlformats.org/drawingml/2006/main">
               <a:ext uri="{FF2B5EF4-FFF2-40B4-BE49-F238E27FC236}">
-                <a16:creationId xmlns:a16="http://schemas.microsoft.com/office/drawing/2014/main" id="{AA74A5B7-64FE-41E4-936B-6CA532A729E4}"/>
+                <a16:creationId xmlns:a16="http://schemas.microsoft.com/office/drawing/2014/main" id="{15BB075A-F769-43E3-8313-2DC6C0485156}"/>
               </a:ext>
             </a:extLst>
           </p:cNvPr>
@@ -4818,24 +4618,24 @@
         <p:spPr>
           <a:xfrm xmlns:a="http://schemas.openxmlformats.org/drawingml/2006/main">
             <a:off x="609600" y="2038350"/>
-            <a:ext cx="10972800" cy="1790700"/>
-          </a:xfrm>
-          <a:prstGeom xmlns:a="http://schemas.openxmlformats.org/drawingml/2006/main" prst="rect">
-            <a:avLst/>
-          </a:prstGeom>
-          <a:noFill xmlns:a="http://schemas.openxmlformats.org/drawingml/2006/main"/>
-          <a:ln xmlns:a="http://schemas.openxmlformats.org/drawingml/2006/main" w="0">
-            <a:noFill/>
-          </a:ln>
-        </p:spPr>
-        <p:txBody>
-          <a:bodyPr xmlns:a="http://schemas.openxmlformats.org/drawingml/2006/main">
-            <a:noAutofit/>
-          </a:bodyPr>
-          <a:lstStyle xmlns:a="http://schemas.openxmlformats.org/drawingml/2006/main"/>
-          <a:p xmlns:a="http://schemas.openxmlformats.org/drawingml/2006/main">
-            <a:pPr algn="l">
-              <a:defRPr sz="2550" b="0" i="0">
+            <a:ext cx="5219700" cy="1790700"/>
+          </a:xfrm>
+          <a:prstGeom xmlns:a="http://schemas.openxmlformats.org/drawingml/2006/main" prst="rect">
+            <a:avLst/>
+          </a:prstGeom>
+          <a:noFill xmlns:a="http://schemas.openxmlformats.org/drawingml/2006/main"/>
+          <a:ln xmlns:a="http://schemas.openxmlformats.org/drawingml/2006/main" w="0">
+            <a:noFill/>
+          </a:ln>
+        </p:spPr>
+        <p:txBody>
+          <a:bodyPr xmlns:a="http://schemas.openxmlformats.org/drawingml/2006/main">
+            <a:noAutofit/>
+          </a:bodyPr>
+          <a:lstStyle xmlns:a="http://schemas.openxmlformats.org/drawingml/2006/main"/>
+          <a:p xmlns:a="http://schemas.openxmlformats.org/drawingml/2006/main">
+            <a:pPr algn="l">
+              <a:defRPr sz="2100" b="0" i="0">
                 <a:solidFill>
                   <a:srgbClr val="123C37"/>
                 </a:solidFill>
@@ -4845,7 +4645,7 @@
               </a:defRPr>
             </a:pPr>
             <a:r>
-              <a:rPr sz="2550" b="0" i="0">
+              <a:rPr sz="2100" b="0" i="0">
                 <a:solidFill>
                   <a:srgbClr val="123C37"/>
                 </a:solidFill>
@@ -4853,30 +4653,7 @@
                 <a:ea typeface="Arial"/>
                 <a:cs typeface="Arial"/>
               </a:rPr>
-              <a:t>[Điều học sinh cần hiểu]</a:t>
-            </a:r>
-          </a:p>
-          <a:p xmlns:a="http://schemas.openxmlformats.org/drawingml/2006/main">
-            <a:pPr algn="l">
-              <a:defRPr sz="2550" b="0" i="0">
-                <a:solidFill>
-                  <a:srgbClr val="123C37"/>
-                </a:solidFill>
-                <a:latin typeface="Arial"/>
-                <a:ea typeface="Arial"/>
-                <a:cs typeface="Arial"/>
-              </a:defRPr>
-            </a:pPr>
-            <a:r>
-              <a:rPr sz="2550" b="0" i="0">
-                <a:solidFill>
-                  <a:srgbClr val="123C37"/>
-                </a:solidFill>
-                <a:latin typeface="Arial"/>
-                <a:ea typeface="Arial"/>
-                <a:cs typeface="Arial"/>
-              </a:rPr>
-              <a:t>[Điều học sinh cần làm được]</a:t>
+              <a:t>Nhận biết các bước trong sơ đồ.</a:t>
             </a:r>
           </a:p>
         </p:txBody>
@@ -4886,7 +4663,7 @@
           <p:cNvPr id="6" name="goal-5">
             <a:extLst xmlns:a="http://schemas.openxmlformats.org/drawingml/2006/main">
               <a:ext uri="{FF2B5EF4-FFF2-40B4-BE49-F238E27FC236}">
-                <a16:creationId xmlns:a16="http://schemas.microsoft.com/office/drawing/2014/main" id="{59FD5353-7FE2-4CEE-B432-3E1D10693407}"/>
+                <a16:creationId xmlns:a16="http://schemas.microsoft.com/office/drawing/2014/main" id="{869CC990-32E1-4425-A461-9031877F54FA}"/>
               </a:ext>
             </a:extLst>
           </p:cNvPr>
@@ -4898,24 +4675,24 @@
         <p:spPr>
           <a:xfrm xmlns:a="http://schemas.openxmlformats.org/drawingml/2006/main">
             <a:off x="609600" y="4152900"/>
-            <a:ext cx="10972800" cy="1790700"/>
-          </a:xfrm>
-          <a:prstGeom xmlns:a="http://schemas.openxmlformats.org/drawingml/2006/main" prst="rect">
-            <a:avLst/>
-          </a:prstGeom>
-          <a:noFill xmlns:a="http://schemas.openxmlformats.org/drawingml/2006/main"/>
-          <a:ln xmlns:a="http://schemas.openxmlformats.org/drawingml/2006/main" w="0">
-            <a:noFill/>
-          </a:ln>
-        </p:spPr>
-        <p:txBody>
-          <a:bodyPr xmlns:a="http://schemas.openxmlformats.org/drawingml/2006/main">
-            <a:noAutofit/>
-          </a:bodyPr>
-          <a:lstStyle xmlns:a="http://schemas.openxmlformats.org/drawingml/2006/main"/>
-          <a:p xmlns:a="http://schemas.openxmlformats.org/drawingml/2006/main">
-            <a:pPr algn="l">
-              <a:defRPr sz="2550" b="0" i="1">
+            <a:ext cx="5219700" cy="1790700"/>
+          </a:xfrm>
+          <a:prstGeom xmlns:a="http://schemas.openxmlformats.org/drawingml/2006/main" prst="rect">
+            <a:avLst/>
+          </a:prstGeom>
+          <a:noFill xmlns:a="http://schemas.openxmlformats.org/drawingml/2006/main"/>
+          <a:ln xmlns:a="http://schemas.openxmlformats.org/drawingml/2006/main" w="0">
+            <a:noFill/>
+          </a:ln>
+        </p:spPr>
+        <p:txBody>
+          <a:bodyPr xmlns:a="http://schemas.openxmlformats.org/drawingml/2006/main">
+            <a:noAutofit/>
+          </a:bodyPr>
+          <a:lstStyle xmlns:a="http://schemas.openxmlformats.org/drawingml/2006/main"/>
+          <a:p xmlns:a="http://schemas.openxmlformats.org/drawingml/2006/main">
+            <a:pPr algn="l">
+              <a:defRPr sz="2100" b="0" i="1">
                 <a:solidFill>
                   <a:srgbClr val="087F70"/>
                 </a:solidFill>
@@ -4925,7 +4702,7 @@
               </a:defRPr>
             </a:pPr>
             <a:r>
-              <a:rPr sz="2550" b="0" i="1">
+              <a:rPr sz="2100" b="0" i="1">
                 <a:solidFill>
                   <a:srgbClr val="087F70"/>
                 </a:solidFill>
@@ -4933,38 +4710,43 @@
                 <a:ea typeface="Arial"/>
                 <a:cs typeface="Arial"/>
               </a:rPr>
-              <a:t>[What students should understand]</a:t>
-            </a:r>
-          </a:p>
-          <a:p xmlns:a="http://schemas.openxmlformats.org/drawingml/2006/main">
-            <a:pPr algn="l">
-              <a:defRPr sz="2550" b="0" i="1">
-                <a:solidFill>
-                  <a:srgbClr val="087F70"/>
-                </a:solidFill>
-                <a:latin typeface="Arial"/>
-                <a:ea typeface="Arial"/>
-                <a:cs typeface="Arial"/>
-              </a:defRPr>
-            </a:pPr>
-            <a:r>
-              <a:rPr sz="2550" b="0" i="1">
-                <a:solidFill>
-                  <a:srgbClr val="087F70"/>
-                </a:solidFill>
-                <a:latin typeface="Arial"/>
-                <a:ea typeface="Arial"/>
-                <a:cs typeface="Arial"/>
-              </a:rPr>
-              <a:t>[What students should be able to do]</a:t>
-            </a:r>
-          </a:p>
-        </p:txBody>
-      </p:sp>
+              <a:t>Identify the stages in the diagram.</a:t>
+            </a:r>
+          </a:p>
+        </p:txBody>
+      </p:sp>
+      <p:pic>
+        <p:nvPicPr>
+          <p:cNvPr id="14" name=""/>
+          <p:cNvPicPr>
+            <a:picLocks xmlns:a="http://schemas.openxmlformats.org/drawingml/2006/main" noChangeAspect="1"/>
+          </p:cNvPicPr>
+          <p:nvPr/>
+        </p:nvPicPr>
+        <p:blipFill>
+          <a:blip xmlns:r="http://schemas.openxmlformats.org/officeDocument/2006/relationships" xmlns:a="http://schemas.openxmlformats.org/drawingml/2006/main" r:embed="R18df9e9fe0c54e8b">
+            <a:extLst>
+              <a:ext uri="{96DAC541-7B7A-43D3-8B79-37D633B846F1}">
+                <asvg:svgBlip xmlns:asvg="http://schemas.microsoft.com/office/drawing/2016/SVG/main" r:embed="R41fbd8dec52344f1"/>
+              </a:ext>
+            </a:extLst>
+          </a:blip>
+          <a:stretch xmlns:a="http://schemas.openxmlformats.org/drawingml/2006/main"/>
+        </p:blipFill>
+        <p:spPr>
+          <a:xfrm xmlns:a="http://schemas.openxmlformats.org/drawingml/2006/main">
+            <a:off x="6629400" y="2038350"/>
+            <a:ext cx="4953000" cy="3905250"/>
+          </a:xfrm>
+          <a:prstGeom xmlns:a="http://schemas.openxmlformats.org/drawingml/2006/main" prst="rect">
+            <a:avLst/>
+          </a:prstGeom>
+        </p:spPr>
+      </p:pic>
     </p:spTree>
     <p:extLst>
       <p:ext uri="{BB962C8B-B14F-4D97-AF65-F5344CB8AC3E}">
-        <p14:creationId xmlns:p14="http://schemas.microsoft.com/office/powerpoint/2010/main" val="1145204766"/>
+        <p14:creationId xmlns:p14="http://schemas.microsoft.com/office/powerpoint/2010/main" val="1390941776"/>
       </p:ext>
     </p:extLst>
   </p:cSld>
@@ -4992,10 +4774,10 @@
       </p:grpSpPr>
       <p:sp>
         <p:nvSpPr>
-          <p:cNvPr id="7" name="warmup-0">
-            <a:extLst xmlns:a="http://schemas.openxmlformats.org/drawingml/2006/main">
-              <a:ext uri="{FF2B5EF4-FFF2-40B4-BE49-F238E27FC236}">
-                <a16:creationId xmlns:a16="http://schemas.microsoft.com/office/drawing/2014/main" id="{DBD879A1-BC28-42A4-B2DC-B7F96B05295A}"/>
+          <p:cNvPr id="8" name="warmup-0">
+            <a:extLst xmlns:a="http://schemas.openxmlformats.org/drawingml/2006/main">
+              <a:ext uri="{FF2B5EF4-FFF2-40B4-BE49-F238E27FC236}">
+                <a16:creationId xmlns:a16="http://schemas.microsoft.com/office/drawing/2014/main" id="{D6B13C06-0F33-4CCF-A565-A0AA9ABE7BA6}"/>
               </a:ext>
             </a:extLst>
           </p:cNvPr>
@@ -5042,7 +4824,7 @@
                 <a:ea typeface="Arial"/>
                 <a:cs typeface="Arial"/>
               </a:rPr>
-              <a:t>BiliClass   /   Môn học của thầy cô   /   10–12</a:t>
+              <a:t>BiliClass   /   Khoa học · ví dụ minh họa   /   </a:t>
             </a:r>
           </a:p>
         </p:txBody>
@@ -5052,7 +4834,7 @@
           <p:cNvPr id="2" name="warmup-1">
             <a:extLst xmlns:a="http://schemas.openxmlformats.org/drawingml/2006/main">
               <a:ext uri="{FF2B5EF4-FFF2-40B4-BE49-F238E27FC236}">
-                <a16:creationId xmlns:a16="http://schemas.microsoft.com/office/drawing/2014/main" id="{71A9B288-0DC5-4913-AEA3-11AE6F3F7298}"/>
+                <a16:creationId xmlns:a16="http://schemas.microsoft.com/office/drawing/2014/main" id="{2C868593-81A8-4589-803F-941F5C5A7CC4}"/>
               </a:ext>
             </a:extLst>
           </p:cNvPr>
@@ -5099,7 +4881,7 @@
                 <a:ea typeface="Arial"/>
                 <a:cs typeface="Arial"/>
               </a:rPr>
-              <a:t>Mẫu bài giảng song ngữ</a:t>
+              <a:t>Vòng tuần hoàn của nước</a:t>
             </a:r>
           </a:p>
         </p:txBody>
@@ -5109,7 +4891,7 @@
           <p:cNvPr id="3" name="warmup-2">
             <a:extLst xmlns:a="http://schemas.openxmlformats.org/drawingml/2006/main">
               <a:ext uri="{FF2B5EF4-FFF2-40B4-BE49-F238E27FC236}">
-                <a16:creationId xmlns:a16="http://schemas.microsoft.com/office/drawing/2014/main" id="{F8D3FCEF-04C9-4C60-B5E5-E652019F2526}"/>
+                <a16:creationId xmlns:a16="http://schemas.microsoft.com/office/drawing/2014/main" id="{AB574F82-47C1-4122-B667-3F9AD5BCA35D}"/>
               </a:ext>
             </a:extLst>
           </p:cNvPr>
@@ -5166,7 +4948,7 @@
           <p:cNvPr id="4" name="warmup-3">
             <a:extLst xmlns:a="http://schemas.openxmlformats.org/drawingml/2006/main">
               <a:ext uri="{FF2B5EF4-FFF2-40B4-BE49-F238E27FC236}">
-                <a16:creationId xmlns:a16="http://schemas.microsoft.com/office/drawing/2014/main" id="{732D6343-929E-4A06-BFF4-1DDCE3D6B14A}"/>
+                <a16:creationId xmlns:a16="http://schemas.microsoft.com/office/drawing/2014/main" id="{CEF791C6-A715-4D25-8AB2-014563214EDF}"/>
               </a:ext>
             </a:extLst>
           </p:cNvPr>
@@ -5213,7 +4995,7 @@
                 <a:ea typeface="Arial"/>
                 <a:cs typeface="Arial"/>
               </a:rPr>
-              <a:t>Mẫu cấu trúc · Thay bằng nội dung bài học</a:t>
+              <a:t>Ví dụ để xem thiết kế · Bài của thầy cô dùng nội dung và hình từ nguồn</a:t>
             </a:r>
           </a:p>
         </p:txBody>
@@ -5223,7 +5005,7 @@
           <p:cNvPr id="5" name="warmup-4">
             <a:extLst xmlns:a="http://schemas.openxmlformats.org/drawingml/2006/main">
               <a:ext uri="{FF2B5EF4-FFF2-40B4-BE49-F238E27FC236}">
-                <a16:creationId xmlns:a16="http://schemas.microsoft.com/office/drawing/2014/main" id="{F8DA5D98-0705-4CFB-8FF4-328CACE0097B}"/>
+                <a16:creationId xmlns:a16="http://schemas.microsoft.com/office/drawing/2014/main" id="{1BB81922-26C2-4E22-A890-75D6C1139A71}"/>
               </a:ext>
             </a:extLst>
           </p:cNvPr>
@@ -5235,24 +5017,24 @@
         <p:spPr>
           <a:xfrm xmlns:a="http://schemas.openxmlformats.org/drawingml/2006/main">
             <a:off x="609600" y="2038350"/>
-            <a:ext cx="10972800" cy="1790700"/>
-          </a:xfrm>
-          <a:prstGeom xmlns:a="http://schemas.openxmlformats.org/drawingml/2006/main" prst="rect">
-            <a:avLst/>
-          </a:prstGeom>
-          <a:noFill xmlns:a="http://schemas.openxmlformats.org/drawingml/2006/main"/>
-          <a:ln xmlns:a="http://schemas.openxmlformats.org/drawingml/2006/main" w="0">
-            <a:noFill/>
-          </a:ln>
-        </p:spPr>
-        <p:txBody>
-          <a:bodyPr xmlns:a="http://schemas.openxmlformats.org/drawingml/2006/main">
-            <a:noAutofit/>
-          </a:bodyPr>
-          <a:lstStyle xmlns:a="http://schemas.openxmlformats.org/drawingml/2006/main"/>
-          <a:p xmlns:a="http://schemas.openxmlformats.org/drawingml/2006/main">
-            <a:pPr algn="l">
-              <a:defRPr sz="3000" b="1" i="0">
+            <a:ext cx="5219700" cy="1790700"/>
+          </a:xfrm>
+          <a:prstGeom xmlns:a="http://schemas.openxmlformats.org/drawingml/2006/main" prst="rect">
+            <a:avLst/>
+          </a:prstGeom>
+          <a:noFill xmlns:a="http://schemas.openxmlformats.org/drawingml/2006/main"/>
+          <a:ln xmlns:a="http://schemas.openxmlformats.org/drawingml/2006/main" w="0">
+            <a:noFill/>
+          </a:ln>
+        </p:spPr>
+        <p:txBody>
+          <a:bodyPr xmlns:a="http://schemas.openxmlformats.org/drawingml/2006/main">
+            <a:noAutofit/>
+          </a:bodyPr>
+          <a:lstStyle xmlns:a="http://schemas.openxmlformats.org/drawingml/2006/main"/>
+          <a:p xmlns:a="http://schemas.openxmlformats.org/drawingml/2006/main">
+            <a:pPr algn="l">
+              <a:defRPr sz="2100" b="1" i="0">
                 <a:solidFill>
                   <a:srgbClr val="123C37"/>
                 </a:solidFill>
@@ -5262,7 +5044,7 @@
               </a:defRPr>
             </a:pPr>
             <a:r>
-              <a:rPr sz="3000" b="1" i="0">
+              <a:rPr sz="2100" b="1" i="0">
                 <a:solidFill>
                   <a:srgbClr val="123C37"/>
                 </a:solidFill>
@@ -5270,30 +5052,7 @@
                 <a:ea typeface="Arial"/>
                 <a:cs typeface="Arial"/>
               </a:rPr>
-              <a:t>[Câu hỏi mở đầu từ bài học]</a:t>
-            </a:r>
-          </a:p>
-          <a:p xmlns:a="http://schemas.openxmlformats.org/drawingml/2006/main">
-            <a:pPr algn="l">
-              <a:defRPr sz="3000" b="1" i="0">
-                <a:solidFill>
-                  <a:srgbClr val="123C37"/>
-                </a:solidFill>
-                <a:latin typeface="Arial"/>
-                <a:ea typeface="Arial"/>
-                <a:cs typeface="Arial"/>
-              </a:defRPr>
-            </a:pPr>
-            <a:r>
-              <a:rPr sz="3000" b="1" i="0">
-                <a:solidFill>
-                  <a:srgbClr val="123C37"/>
-                </a:solidFill>
-                <a:latin typeface="Arial"/>
-                <a:ea typeface="Arial"/>
-                <a:cs typeface="Arial"/>
-              </a:rPr>
-              <a:t>[Thông tin để học sinh quan sát]</a:t>
+              <a:t>Sau cơn mưa, nước đi đâu?</a:t>
             </a:r>
           </a:p>
         </p:txBody>
@@ -5303,7 +5062,7 @@
           <p:cNvPr id="6" name="warmup-5">
             <a:extLst xmlns:a="http://schemas.openxmlformats.org/drawingml/2006/main">
               <a:ext uri="{FF2B5EF4-FFF2-40B4-BE49-F238E27FC236}">
-                <a16:creationId xmlns:a16="http://schemas.microsoft.com/office/drawing/2014/main" id="{0ED84E23-F6CC-457F-90B3-94486F61FE96}"/>
+                <a16:creationId xmlns:a16="http://schemas.microsoft.com/office/drawing/2014/main" id="{44194CF1-AE04-48C6-AD9F-75D29BACA1A4}"/>
               </a:ext>
             </a:extLst>
           </p:cNvPr>
@@ -5315,24 +5074,24 @@
         <p:spPr>
           <a:xfrm xmlns:a="http://schemas.openxmlformats.org/drawingml/2006/main">
             <a:off x="609600" y="4152900"/>
-            <a:ext cx="10972800" cy="1790700"/>
-          </a:xfrm>
-          <a:prstGeom xmlns:a="http://schemas.openxmlformats.org/drawingml/2006/main" prst="rect">
-            <a:avLst/>
-          </a:prstGeom>
-          <a:noFill xmlns:a="http://schemas.openxmlformats.org/drawingml/2006/main"/>
-          <a:ln xmlns:a="http://schemas.openxmlformats.org/drawingml/2006/main" w="0">
-            <a:noFill/>
-          </a:ln>
-        </p:spPr>
-        <p:txBody>
-          <a:bodyPr xmlns:a="http://schemas.openxmlformats.org/drawingml/2006/main">
-            <a:noAutofit/>
-          </a:bodyPr>
-          <a:lstStyle xmlns:a="http://schemas.openxmlformats.org/drawingml/2006/main"/>
-          <a:p xmlns:a="http://schemas.openxmlformats.org/drawingml/2006/main">
-            <a:pPr algn="l">
-              <a:defRPr sz="3000" b="1" i="1">
+            <a:ext cx="5219700" cy="1790700"/>
+          </a:xfrm>
+          <a:prstGeom xmlns:a="http://schemas.openxmlformats.org/drawingml/2006/main" prst="rect">
+            <a:avLst/>
+          </a:prstGeom>
+          <a:noFill xmlns:a="http://schemas.openxmlformats.org/drawingml/2006/main"/>
+          <a:ln xmlns:a="http://schemas.openxmlformats.org/drawingml/2006/main" w="0">
+            <a:noFill/>
+          </a:ln>
+        </p:spPr>
+        <p:txBody>
+          <a:bodyPr xmlns:a="http://schemas.openxmlformats.org/drawingml/2006/main">
+            <a:noAutofit/>
+          </a:bodyPr>
+          <a:lstStyle xmlns:a="http://schemas.openxmlformats.org/drawingml/2006/main"/>
+          <a:p xmlns:a="http://schemas.openxmlformats.org/drawingml/2006/main">
+            <a:pPr algn="l">
+              <a:defRPr sz="2100" b="1" i="1">
                 <a:solidFill>
                   <a:srgbClr val="087F70"/>
                 </a:solidFill>
@@ -5342,7 +5101,7 @@
               </a:defRPr>
             </a:pPr>
             <a:r>
-              <a:rPr sz="3000" b="1" i="1">
+              <a:rPr sz="2100" b="1" i="1">
                 <a:solidFill>
                   <a:srgbClr val="087F70"/>
                 </a:solidFill>
@@ -5350,38 +5109,43 @@
                 <a:ea typeface="Arial"/>
                 <a:cs typeface="Arial"/>
               </a:rPr>
-              <a:t>[Opening question from the lesson]</a:t>
-            </a:r>
-          </a:p>
-          <a:p xmlns:a="http://schemas.openxmlformats.org/drawingml/2006/main">
-            <a:pPr algn="l">
-              <a:defRPr sz="3000" b="1" i="1">
-                <a:solidFill>
-                  <a:srgbClr val="087F70"/>
-                </a:solidFill>
-                <a:latin typeface="Arial"/>
-                <a:ea typeface="Arial"/>
-                <a:cs typeface="Arial"/>
-              </a:defRPr>
-            </a:pPr>
-            <a:r>
-              <a:rPr sz="3000" b="1" i="1">
-                <a:solidFill>
-                  <a:srgbClr val="087F70"/>
-                </a:solidFill>
-                <a:latin typeface="Arial"/>
-                <a:ea typeface="Arial"/>
-                <a:cs typeface="Arial"/>
-              </a:rPr>
-              <a:t>[Information for students to observe]</a:t>
-            </a:r>
-          </a:p>
-        </p:txBody>
-      </p:sp>
+              <a:t>Where does water go after rain?</a:t>
+            </a:r>
+          </a:p>
+        </p:txBody>
+      </p:sp>
+      <p:pic>
+        <p:nvPicPr>
+          <p:cNvPr id="14" name=""/>
+          <p:cNvPicPr>
+            <a:picLocks xmlns:a="http://schemas.openxmlformats.org/drawingml/2006/main" noChangeAspect="1"/>
+          </p:cNvPicPr>
+          <p:nvPr/>
+        </p:nvPicPr>
+        <p:blipFill>
+          <a:blip xmlns:r="http://schemas.openxmlformats.org/officeDocument/2006/relationships" xmlns:a="http://schemas.openxmlformats.org/drawingml/2006/main" r:embed="Rc5ef48808ec4455d">
+            <a:extLst>
+              <a:ext uri="{96DAC541-7B7A-43D3-8B79-37D633B846F1}">
+                <asvg:svgBlip xmlns:asvg="http://schemas.microsoft.com/office/drawing/2016/SVG/main" r:embed="R8fb7cdd1cedd4e40"/>
+              </a:ext>
+            </a:extLst>
+          </a:blip>
+          <a:stretch xmlns:a="http://schemas.openxmlformats.org/drawingml/2006/main"/>
+        </p:blipFill>
+        <p:spPr>
+          <a:xfrm xmlns:a="http://schemas.openxmlformats.org/drawingml/2006/main">
+            <a:off x="6629400" y="2038350"/>
+            <a:ext cx="4953000" cy="3905250"/>
+          </a:xfrm>
+          <a:prstGeom xmlns:a="http://schemas.openxmlformats.org/drawingml/2006/main" prst="rect">
+            <a:avLst/>
+          </a:prstGeom>
+        </p:spPr>
+      </p:pic>
     </p:spTree>
     <p:extLst>
       <p:ext uri="{BB962C8B-B14F-4D97-AF65-F5344CB8AC3E}">
-        <p14:creationId xmlns:p14="http://schemas.microsoft.com/office/powerpoint/2010/main" val="1656915948"/>
+        <p14:creationId xmlns:p14="http://schemas.microsoft.com/office/powerpoint/2010/main" val="1779312699"/>
       </p:ext>
     </p:extLst>
   </p:cSld>
@@ -5409,10 +5173,10 @@
       </p:grpSpPr>
       <p:sp>
         <p:nvSpPr>
-          <p:cNvPr id="7" name="vocabulary-0">
-            <a:extLst xmlns:a="http://schemas.openxmlformats.org/drawingml/2006/main">
-              <a:ext uri="{FF2B5EF4-FFF2-40B4-BE49-F238E27FC236}">
-                <a16:creationId xmlns:a16="http://schemas.microsoft.com/office/drawing/2014/main" id="{27948B98-EA83-4562-8B4E-E674827D72DB}"/>
+          <p:cNvPr id="8" name="vocabulary-0">
+            <a:extLst xmlns:a="http://schemas.openxmlformats.org/drawingml/2006/main">
+              <a:ext uri="{FF2B5EF4-FFF2-40B4-BE49-F238E27FC236}">
+                <a16:creationId xmlns:a16="http://schemas.microsoft.com/office/drawing/2014/main" id="{9A0AC4E4-0023-465A-88B2-D8AA8243DC6F}"/>
               </a:ext>
             </a:extLst>
           </p:cNvPr>
@@ -5459,7 +5223,7 @@
                 <a:ea typeface="Arial"/>
                 <a:cs typeface="Arial"/>
               </a:rPr>
-              <a:t>BiliClass   /   Môn học của thầy cô   /   10–12</a:t>
+              <a:t>BiliClass   /   Khoa học · ví dụ minh họa   /   </a:t>
             </a:r>
           </a:p>
         </p:txBody>
@@ -5469,7 +5233,7 @@
           <p:cNvPr id="2" name="vocabulary-1">
             <a:extLst xmlns:a="http://schemas.openxmlformats.org/drawingml/2006/main">
               <a:ext uri="{FF2B5EF4-FFF2-40B4-BE49-F238E27FC236}">
-                <a16:creationId xmlns:a16="http://schemas.microsoft.com/office/drawing/2014/main" id="{6ACD3CE0-3554-407C-8F37-DC83AD9678BE}"/>
+                <a16:creationId xmlns:a16="http://schemas.microsoft.com/office/drawing/2014/main" id="{59170D88-82A3-4DE0-8A15-A8C9453F85B2}"/>
               </a:ext>
             </a:extLst>
           </p:cNvPr>
@@ -5516,7 +5280,7 @@
                 <a:ea typeface="Arial"/>
                 <a:cs typeface="Arial"/>
               </a:rPr>
-              <a:t>Mẫu bài giảng song ngữ</a:t>
+              <a:t>Vòng tuần hoàn của nước</a:t>
             </a:r>
           </a:p>
         </p:txBody>
@@ -5526,7 +5290,7 @@
           <p:cNvPr id="3" name="vocabulary-2">
             <a:extLst xmlns:a="http://schemas.openxmlformats.org/drawingml/2006/main">
               <a:ext uri="{FF2B5EF4-FFF2-40B4-BE49-F238E27FC236}">
-                <a16:creationId xmlns:a16="http://schemas.microsoft.com/office/drawing/2014/main" id="{AFC4D7E6-A979-4A57-A5DD-6AD8BEE30E4E}"/>
+                <a16:creationId xmlns:a16="http://schemas.microsoft.com/office/drawing/2014/main" id="{3A0101C7-FB1B-4413-93F0-361ABD496D37}"/>
               </a:ext>
             </a:extLst>
           </p:cNvPr>
@@ -5583,7 +5347,7 @@
           <p:cNvPr id="4" name="vocabulary-3">
             <a:extLst xmlns:a="http://schemas.openxmlformats.org/drawingml/2006/main">
               <a:ext uri="{FF2B5EF4-FFF2-40B4-BE49-F238E27FC236}">
-                <a16:creationId xmlns:a16="http://schemas.microsoft.com/office/drawing/2014/main" id="{05C55FA7-1C6E-4ADB-B227-402D1F3DA0B6}"/>
+                <a16:creationId xmlns:a16="http://schemas.microsoft.com/office/drawing/2014/main" id="{47248E56-9803-4A2C-AD3F-460875BCCE9E}"/>
               </a:ext>
             </a:extLst>
           </p:cNvPr>
@@ -5630,7 +5394,7 @@
                 <a:ea typeface="Arial"/>
                 <a:cs typeface="Arial"/>
               </a:rPr>
-              <a:t>Mẫu cấu trúc · Thay bằng nội dung bài học</a:t>
+              <a:t>Ví dụ để xem thiết kế · Bài của thầy cô dùng nội dung và hình từ nguồn</a:t>
             </a:r>
           </a:p>
         </p:txBody>
@@ -5640,7 +5404,7 @@
           <p:cNvPr id="5" name="vocabulary-4">
             <a:extLst xmlns:a="http://schemas.openxmlformats.org/drawingml/2006/main">
               <a:ext uri="{FF2B5EF4-FFF2-40B4-BE49-F238E27FC236}">
-                <a16:creationId xmlns:a16="http://schemas.microsoft.com/office/drawing/2014/main" id="{29C96D00-B402-40BC-81DB-FBF33565D684}"/>
+                <a16:creationId xmlns:a16="http://schemas.microsoft.com/office/drawing/2014/main" id="{532DC9BC-5633-4E5F-A280-BEF228288B84}"/>
               </a:ext>
             </a:extLst>
           </p:cNvPr>
@@ -5652,24 +5416,24 @@
         <p:spPr>
           <a:xfrm xmlns:a="http://schemas.openxmlformats.org/drawingml/2006/main">
             <a:off x="609600" y="2038350"/>
-            <a:ext cx="10972800" cy="1790700"/>
-          </a:xfrm>
-          <a:prstGeom xmlns:a="http://schemas.openxmlformats.org/drawingml/2006/main" prst="rect">
-            <a:avLst/>
-          </a:prstGeom>
-          <a:noFill xmlns:a="http://schemas.openxmlformats.org/drawingml/2006/main"/>
-          <a:ln xmlns:a="http://schemas.openxmlformats.org/drawingml/2006/main" w="0">
-            <a:noFill/>
-          </a:ln>
-        </p:spPr>
-        <p:txBody>
-          <a:bodyPr xmlns:a="http://schemas.openxmlformats.org/drawingml/2006/main">
-            <a:noAutofit/>
-          </a:bodyPr>
-          <a:lstStyle xmlns:a="http://schemas.openxmlformats.org/drawingml/2006/main"/>
-          <a:p xmlns:a="http://schemas.openxmlformats.org/drawingml/2006/main">
-            <a:pPr algn="l">
-              <a:defRPr sz="2550" b="0" i="0">
+            <a:ext cx="5219700" cy="1790700"/>
+          </a:xfrm>
+          <a:prstGeom xmlns:a="http://schemas.openxmlformats.org/drawingml/2006/main" prst="rect">
+            <a:avLst/>
+          </a:prstGeom>
+          <a:noFill xmlns:a="http://schemas.openxmlformats.org/drawingml/2006/main"/>
+          <a:ln xmlns:a="http://schemas.openxmlformats.org/drawingml/2006/main" w="0">
+            <a:noFill/>
+          </a:ln>
+        </p:spPr>
+        <p:txBody>
+          <a:bodyPr xmlns:a="http://schemas.openxmlformats.org/drawingml/2006/main">
+            <a:noAutofit/>
+          </a:bodyPr>
+          <a:lstStyle xmlns:a="http://schemas.openxmlformats.org/drawingml/2006/main"/>
+          <a:p xmlns:a="http://schemas.openxmlformats.org/drawingml/2006/main">
+            <a:pPr algn="l">
+              <a:defRPr sz="2100" b="0" i="0">
                 <a:solidFill>
                   <a:srgbClr val="123C37"/>
                 </a:solidFill>
@@ -5679,7 +5443,7 @@
               </a:defRPr>
             </a:pPr>
             <a:r>
-              <a:rPr sz="2550" b="0" i="0">
+              <a:rPr sz="2100" b="0" i="0">
                 <a:solidFill>
                   <a:srgbClr val="123C37"/>
                 </a:solidFill>
@@ -5687,12 +5451,12 @@
                 <a:ea typeface="Arial"/>
                 <a:cs typeface="Arial"/>
               </a:rPr>
-              <a:t>[Thuật ngữ thứ nhất]</a:t>
-            </a:r>
-          </a:p>
-          <a:p xmlns:a="http://schemas.openxmlformats.org/drawingml/2006/main">
-            <a:pPr algn="l">
-              <a:defRPr sz="2550" b="0" i="0">
+              <a:t>Bay hơi · Ngưng tụ</a:t>
+            </a:r>
+          </a:p>
+          <a:p xmlns:a="http://schemas.openxmlformats.org/drawingml/2006/main">
+            <a:pPr algn="l">
+              <a:defRPr sz="2100" b="0" i="0">
                 <a:solidFill>
                   <a:srgbClr val="123C37"/>
                 </a:solidFill>
@@ -5702,7 +5466,7 @@
               </a:defRPr>
             </a:pPr>
             <a:r>
-              <a:rPr sz="2550" b="0" i="0">
+              <a:rPr sz="2100" b="0" i="0">
                 <a:solidFill>
                   <a:srgbClr val="123C37"/>
                 </a:solidFill>
@@ -5710,30 +5474,7 @@
                 <a:ea typeface="Arial"/>
                 <a:cs typeface="Arial"/>
               </a:rPr>
-              <a:t>[Thuật ngữ thứ hai]</a:t>
-            </a:r>
-          </a:p>
-          <a:p xmlns:a="http://schemas.openxmlformats.org/drawingml/2006/main">
-            <a:pPr algn="l">
-              <a:defRPr sz="2550" b="0" i="0">
-                <a:solidFill>
-                  <a:srgbClr val="123C37"/>
-                </a:solidFill>
-                <a:latin typeface="Arial"/>
-                <a:ea typeface="Arial"/>
-                <a:cs typeface="Arial"/>
-              </a:defRPr>
-            </a:pPr>
-            <a:r>
-              <a:rPr sz="2550" b="0" i="0">
-                <a:solidFill>
-                  <a:srgbClr val="123C37"/>
-                </a:solidFill>
-                <a:latin typeface="Arial"/>
-                <a:ea typeface="Arial"/>
-                <a:cs typeface="Arial"/>
-              </a:rPr>
-              <a:t>[Thuật ngữ thứ ba]</a:t>
+              <a:t>Mưa</a:t>
             </a:r>
           </a:p>
         </p:txBody>
@@ -5743,7 +5484,7 @@
           <p:cNvPr id="6" name="vocabulary-5">
             <a:extLst xmlns:a="http://schemas.openxmlformats.org/drawingml/2006/main">
               <a:ext uri="{FF2B5EF4-FFF2-40B4-BE49-F238E27FC236}">
-                <a16:creationId xmlns:a16="http://schemas.microsoft.com/office/drawing/2014/main" id="{EDC08D4F-AF95-4F3E-AF5E-4CDE62EDC09F}"/>
+                <a16:creationId xmlns:a16="http://schemas.microsoft.com/office/drawing/2014/main" id="{30382F35-DCAD-4B2F-994F-D9C5DAEC356F}"/>
               </a:ext>
             </a:extLst>
           </p:cNvPr>
@@ -5755,24 +5496,24 @@
         <p:spPr>
           <a:xfrm xmlns:a="http://schemas.openxmlformats.org/drawingml/2006/main">
             <a:off x="609600" y="4152900"/>
-            <a:ext cx="10972800" cy="1790700"/>
-          </a:xfrm>
-          <a:prstGeom xmlns:a="http://schemas.openxmlformats.org/drawingml/2006/main" prst="rect">
-            <a:avLst/>
-          </a:prstGeom>
-          <a:noFill xmlns:a="http://schemas.openxmlformats.org/drawingml/2006/main"/>
-          <a:ln xmlns:a="http://schemas.openxmlformats.org/drawingml/2006/main" w="0">
-            <a:noFill/>
-          </a:ln>
-        </p:spPr>
-        <p:txBody>
-          <a:bodyPr xmlns:a="http://schemas.openxmlformats.org/drawingml/2006/main">
-            <a:noAutofit/>
-          </a:bodyPr>
-          <a:lstStyle xmlns:a="http://schemas.openxmlformats.org/drawingml/2006/main"/>
-          <a:p xmlns:a="http://schemas.openxmlformats.org/drawingml/2006/main">
-            <a:pPr algn="l">
-              <a:defRPr sz="2550" b="0" i="1">
+            <a:ext cx="5219700" cy="1790700"/>
+          </a:xfrm>
+          <a:prstGeom xmlns:a="http://schemas.openxmlformats.org/drawingml/2006/main" prst="rect">
+            <a:avLst/>
+          </a:prstGeom>
+          <a:noFill xmlns:a="http://schemas.openxmlformats.org/drawingml/2006/main"/>
+          <a:ln xmlns:a="http://schemas.openxmlformats.org/drawingml/2006/main" w="0">
+            <a:noFill/>
+          </a:ln>
+        </p:spPr>
+        <p:txBody>
+          <a:bodyPr xmlns:a="http://schemas.openxmlformats.org/drawingml/2006/main">
+            <a:noAutofit/>
+          </a:bodyPr>
+          <a:lstStyle xmlns:a="http://schemas.openxmlformats.org/drawingml/2006/main"/>
+          <a:p xmlns:a="http://schemas.openxmlformats.org/drawingml/2006/main">
+            <a:pPr algn="l">
+              <a:defRPr sz="2100" b="0" i="1">
                 <a:solidFill>
                   <a:srgbClr val="087F70"/>
                 </a:solidFill>
@@ -5782,7 +5523,7 @@
               </a:defRPr>
             </a:pPr>
             <a:r>
-              <a:rPr sz="2550" b="0" i="1">
+              <a:rPr sz="2100" b="0" i="1">
                 <a:solidFill>
                   <a:srgbClr val="087F70"/>
                 </a:solidFill>
@@ -5790,12 +5531,12 @@
                 <a:ea typeface="Arial"/>
                 <a:cs typeface="Arial"/>
               </a:rPr>
-              <a:t>[First term]</a:t>
-            </a:r>
-          </a:p>
-          <a:p xmlns:a="http://schemas.openxmlformats.org/drawingml/2006/main">
-            <a:pPr algn="l">
-              <a:defRPr sz="2550" b="0" i="1">
+              <a:t>Evaporation · Condensation</a:t>
+            </a:r>
+          </a:p>
+          <a:p xmlns:a="http://schemas.openxmlformats.org/drawingml/2006/main">
+            <a:pPr algn="l">
+              <a:defRPr sz="2100" b="0" i="1">
                 <a:solidFill>
                   <a:srgbClr val="087F70"/>
                 </a:solidFill>
@@ -5805,7 +5546,7 @@
               </a:defRPr>
             </a:pPr>
             <a:r>
-              <a:rPr sz="2550" b="0" i="1">
+              <a:rPr sz="2100" b="0" i="1">
                 <a:solidFill>
                   <a:srgbClr val="087F70"/>
                 </a:solidFill>
@@ -5813,38 +5554,43 @@
                 <a:ea typeface="Arial"/>
                 <a:cs typeface="Arial"/>
               </a:rPr>
-              <a:t>[Second term]</a:t>
-            </a:r>
-          </a:p>
-          <a:p xmlns:a="http://schemas.openxmlformats.org/drawingml/2006/main">
-            <a:pPr algn="l">
-              <a:defRPr sz="2550" b="0" i="1">
-                <a:solidFill>
-                  <a:srgbClr val="087F70"/>
-                </a:solidFill>
-                <a:latin typeface="Arial"/>
-                <a:ea typeface="Arial"/>
-                <a:cs typeface="Arial"/>
-              </a:defRPr>
-            </a:pPr>
-            <a:r>
-              <a:rPr sz="2550" b="0" i="1">
-                <a:solidFill>
-                  <a:srgbClr val="087F70"/>
-                </a:solidFill>
-                <a:latin typeface="Arial"/>
-                <a:ea typeface="Arial"/>
-                <a:cs typeface="Arial"/>
-              </a:rPr>
-              <a:t>[Third term]</a:t>
-            </a:r>
-          </a:p>
-        </p:txBody>
-      </p:sp>
+              <a:t>Rain</a:t>
+            </a:r>
+          </a:p>
+        </p:txBody>
+      </p:sp>
+      <p:pic>
+        <p:nvPicPr>
+          <p:cNvPr id="14" name=""/>
+          <p:cNvPicPr>
+            <a:picLocks xmlns:a="http://schemas.openxmlformats.org/drawingml/2006/main" noChangeAspect="1"/>
+          </p:cNvPicPr>
+          <p:nvPr/>
+        </p:nvPicPr>
+        <p:blipFill>
+          <a:blip xmlns:r="http://schemas.openxmlformats.org/officeDocument/2006/relationships" xmlns:a="http://schemas.openxmlformats.org/drawingml/2006/main" r:embed="Ra7f34ea5db95425a">
+            <a:extLst>
+              <a:ext uri="{96DAC541-7B7A-43D3-8B79-37D633B846F1}">
+                <asvg:svgBlip xmlns:asvg="http://schemas.microsoft.com/office/drawing/2016/SVG/main" r:embed="R0c96009d83a644a3"/>
+              </a:ext>
+            </a:extLst>
+          </a:blip>
+          <a:stretch xmlns:a="http://schemas.openxmlformats.org/drawingml/2006/main"/>
+        </p:blipFill>
+        <p:spPr>
+          <a:xfrm xmlns:a="http://schemas.openxmlformats.org/drawingml/2006/main">
+            <a:off x="6629400" y="2038350"/>
+            <a:ext cx="4953000" cy="3905250"/>
+          </a:xfrm>
+          <a:prstGeom xmlns:a="http://schemas.openxmlformats.org/drawingml/2006/main" prst="rect">
+            <a:avLst/>
+          </a:prstGeom>
+        </p:spPr>
+      </p:pic>
     </p:spTree>
     <p:extLst>
       <p:ext uri="{BB962C8B-B14F-4D97-AF65-F5344CB8AC3E}">
-        <p14:creationId xmlns:p14="http://schemas.microsoft.com/office/powerpoint/2010/main" val="174634585"/>
+        <p14:creationId xmlns:p14="http://schemas.microsoft.com/office/powerpoint/2010/main" val="243152493"/>
       </p:ext>
     </p:extLst>
   </p:cSld>
@@ -5872,10 +5618,10 @@
       </p:grpSpPr>
       <p:sp>
         <p:nvSpPr>
-          <p:cNvPr id="7" name="concept-0">
-            <a:extLst xmlns:a="http://schemas.openxmlformats.org/drawingml/2006/main">
-              <a:ext uri="{FF2B5EF4-FFF2-40B4-BE49-F238E27FC236}">
-                <a16:creationId xmlns:a16="http://schemas.microsoft.com/office/drawing/2014/main" id="{E26870D9-79E0-4856-A2C6-180E9C038781}"/>
+          <p:cNvPr id="8" name="concept-0">
+            <a:extLst xmlns:a="http://schemas.openxmlformats.org/drawingml/2006/main">
+              <a:ext uri="{FF2B5EF4-FFF2-40B4-BE49-F238E27FC236}">
+                <a16:creationId xmlns:a16="http://schemas.microsoft.com/office/drawing/2014/main" id="{BC83F685-26B9-4689-957B-38631F07BEB3}"/>
               </a:ext>
             </a:extLst>
           </p:cNvPr>
@@ -5922,7 +5668,7 @@
                 <a:ea typeface="Arial"/>
                 <a:cs typeface="Arial"/>
               </a:rPr>
-              <a:t>BiliClass   /   Môn học của thầy cô   /   10–12</a:t>
+              <a:t>BiliClass   /   Khoa học · ví dụ minh họa   /   </a:t>
             </a:r>
           </a:p>
         </p:txBody>
@@ -5932,7 +5678,7 @@
           <p:cNvPr id="2" name="concept-1">
             <a:extLst xmlns:a="http://schemas.openxmlformats.org/drawingml/2006/main">
               <a:ext uri="{FF2B5EF4-FFF2-40B4-BE49-F238E27FC236}">
-                <a16:creationId xmlns:a16="http://schemas.microsoft.com/office/drawing/2014/main" id="{A4D725E2-D415-4791-92E5-5C0A94EDAE59}"/>
+                <a16:creationId xmlns:a16="http://schemas.microsoft.com/office/drawing/2014/main" id="{4468AC52-8CF4-4D71-A77B-3E1B4F406750}"/>
               </a:ext>
             </a:extLst>
           </p:cNvPr>
@@ -5979,7 +5725,7 @@
                 <a:ea typeface="Arial"/>
                 <a:cs typeface="Arial"/>
               </a:rPr>
-              <a:t>Mẫu bài giảng song ngữ</a:t>
+              <a:t>Vòng tuần hoàn của nước</a:t>
             </a:r>
           </a:p>
         </p:txBody>
@@ -5989,7 +5735,7 @@
           <p:cNvPr id="3" name="concept-2">
             <a:extLst xmlns:a="http://schemas.openxmlformats.org/drawingml/2006/main">
               <a:ext uri="{FF2B5EF4-FFF2-40B4-BE49-F238E27FC236}">
-                <a16:creationId xmlns:a16="http://schemas.microsoft.com/office/drawing/2014/main" id="{7D73587F-0CC0-426E-9B6B-E19C4C89F1AF}"/>
+                <a16:creationId xmlns:a16="http://schemas.microsoft.com/office/drawing/2014/main" id="{6622BF06-777A-4859-949B-B65D87014D2E}"/>
               </a:ext>
             </a:extLst>
           </p:cNvPr>
@@ -6046,7 +5792,7 @@
           <p:cNvPr id="4" name="concept-3">
             <a:extLst xmlns:a="http://schemas.openxmlformats.org/drawingml/2006/main">
               <a:ext uri="{FF2B5EF4-FFF2-40B4-BE49-F238E27FC236}">
-                <a16:creationId xmlns:a16="http://schemas.microsoft.com/office/drawing/2014/main" id="{93E0D504-A363-481B-A309-396C9FBC8BC9}"/>
+                <a16:creationId xmlns:a16="http://schemas.microsoft.com/office/drawing/2014/main" id="{50DE972C-5D17-4787-A482-77194353ED1F}"/>
               </a:ext>
             </a:extLst>
           </p:cNvPr>
@@ -6093,7 +5839,7 @@
                 <a:ea typeface="Arial"/>
                 <a:cs typeface="Arial"/>
               </a:rPr>
-              <a:t>Mẫu cấu trúc · Thay bằng nội dung bài học</a:t>
+              <a:t>Ví dụ để xem thiết kế · Bài của thầy cô dùng nội dung và hình từ nguồn</a:t>
             </a:r>
           </a:p>
         </p:txBody>
@@ -6103,7 +5849,7 @@
           <p:cNvPr id="5" name="concept-4">
             <a:extLst xmlns:a="http://schemas.openxmlformats.org/drawingml/2006/main">
               <a:ext uri="{FF2B5EF4-FFF2-40B4-BE49-F238E27FC236}">
-                <a16:creationId xmlns:a16="http://schemas.microsoft.com/office/drawing/2014/main" id="{556BEE5C-2887-4716-8CCD-44433DECBB36}"/>
+                <a16:creationId xmlns:a16="http://schemas.microsoft.com/office/drawing/2014/main" id="{4150A956-CC8B-4315-8EFD-86011C1DFA69}"/>
               </a:ext>
             </a:extLst>
           </p:cNvPr>
@@ -6115,24 +5861,24 @@
         <p:spPr>
           <a:xfrm xmlns:a="http://schemas.openxmlformats.org/drawingml/2006/main">
             <a:off x="609600" y="2038350"/>
-            <a:ext cx="10972800" cy="1790700"/>
-          </a:xfrm>
-          <a:prstGeom xmlns:a="http://schemas.openxmlformats.org/drawingml/2006/main" prst="rect">
-            <a:avLst/>
-          </a:prstGeom>
-          <a:noFill xmlns:a="http://schemas.openxmlformats.org/drawingml/2006/main"/>
-          <a:ln xmlns:a="http://schemas.openxmlformats.org/drawingml/2006/main" w="0">
-            <a:noFill/>
-          </a:ln>
-        </p:spPr>
-        <p:txBody>
-          <a:bodyPr xmlns:a="http://schemas.openxmlformats.org/drawingml/2006/main">
-            <a:noAutofit/>
-          </a:bodyPr>
-          <a:lstStyle xmlns:a="http://schemas.openxmlformats.org/drawingml/2006/main"/>
-          <a:p xmlns:a="http://schemas.openxmlformats.org/drawingml/2006/main">
-            <a:pPr algn="l">
-              <a:defRPr sz="2550" b="0" i="0">
+            <a:ext cx="5219700" cy="1790700"/>
+          </a:xfrm>
+          <a:prstGeom xmlns:a="http://schemas.openxmlformats.org/drawingml/2006/main" prst="rect">
+            <a:avLst/>
+          </a:prstGeom>
+          <a:noFill xmlns:a="http://schemas.openxmlformats.org/drawingml/2006/main"/>
+          <a:ln xmlns:a="http://schemas.openxmlformats.org/drawingml/2006/main" w="0">
+            <a:noFill/>
+          </a:ln>
+        </p:spPr>
+        <p:txBody>
+          <a:bodyPr xmlns:a="http://schemas.openxmlformats.org/drawingml/2006/main">
+            <a:noAutofit/>
+          </a:bodyPr>
+          <a:lstStyle xmlns:a="http://schemas.openxmlformats.org/drawingml/2006/main"/>
+          <a:p xmlns:a="http://schemas.openxmlformats.org/drawingml/2006/main">
+            <a:pPr algn="l">
+              <a:defRPr sz="2100" b="0" i="0">
                 <a:solidFill>
                   <a:srgbClr val="123C37"/>
                 </a:solidFill>
@@ -6142,7 +5888,7 @@
               </a:defRPr>
             </a:pPr>
             <a:r>
-              <a:rPr sz="2550" b="0" i="0">
+              <a:rPr sz="2100" b="0" i="0">
                 <a:solidFill>
                   <a:srgbClr val="123C37"/>
                 </a:solidFill>
@@ -6150,30 +5896,7 @@
                 <a:ea typeface="Arial"/>
                 <a:cs typeface="Arial"/>
               </a:rPr>
-              <a:t>[Tên khái niệm]</a:t>
-            </a:r>
-          </a:p>
-          <a:p xmlns:a="http://schemas.openxmlformats.org/drawingml/2006/main">
-            <a:pPr algn="l">
-              <a:defRPr sz="2550" b="0" i="0">
-                <a:solidFill>
-                  <a:srgbClr val="123C37"/>
-                </a:solidFill>
-                <a:latin typeface="Arial"/>
-                <a:ea typeface="Arial"/>
-                <a:cs typeface="Arial"/>
-              </a:defRPr>
-            </a:pPr>
-            <a:r>
-              <a:rPr sz="2550" b="0" i="0">
-                <a:solidFill>
-                  <a:srgbClr val="123C37"/>
-                </a:solidFill>
-                <a:latin typeface="Arial"/>
-                <a:ea typeface="Arial"/>
-                <a:cs typeface="Arial"/>
-              </a:rPr>
-              <a:t>[Định nghĩa lấy từ tài liệu đã kiểm tra]</a:t>
+              <a:t>Nước tuần hoàn trong tự nhiên.</a:t>
             </a:r>
           </a:p>
         </p:txBody>
@@ -6183,7 +5906,7 @@
           <p:cNvPr id="6" name="concept-5">
             <a:extLst xmlns:a="http://schemas.openxmlformats.org/drawingml/2006/main">
               <a:ext uri="{FF2B5EF4-FFF2-40B4-BE49-F238E27FC236}">
-                <a16:creationId xmlns:a16="http://schemas.microsoft.com/office/drawing/2014/main" id="{05B5B2EC-FCC9-4182-BC5A-680B85CE0BB5}"/>
+                <a16:creationId xmlns:a16="http://schemas.microsoft.com/office/drawing/2014/main" id="{1D6E0973-A147-4C53-934A-6D65C0648DD2}"/>
               </a:ext>
             </a:extLst>
           </p:cNvPr>
@@ -6195,24 +5918,24 @@
         <p:spPr>
           <a:xfrm xmlns:a="http://schemas.openxmlformats.org/drawingml/2006/main">
             <a:off x="609600" y="4152900"/>
-            <a:ext cx="10972800" cy="1790700"/>
-          </a:xfrm>
-          <a:prstGeom xmlns:a="http://schemas.openxmlformats.org/drawingml/2006/main" prst="rect">
-            <a:avLst/>
-          </a:prstGeom>
-          <a:noFill xmlns:a="http://schemas.openxmlformats.org/drawingml/2006/main"/>
-          <a:ln xmlns:a="http://schemas.openxmlformats.org/drawingml/2006/main" w="0">
-            <a:noFill/>
-          </a:ln>
-        </p:spPr>
-        <p:txBody>
-          <a:bodyPr xmlns:a="http://schemas.openxmlformats.org/drawingml/2006/main">
-            <a:noAutofit/>
-          </a:bodyPr>
-          <a:lstStyle xmlns:a="http://schemas.openxmlformats.org/drawingml/2006/main"/>
-          <a:p xmlns:a="http://schemas.openxmlformats.org/drawingml/2006/main">
-            <a:pPr algn="l">
-              <a:defRPr sz="2550" b="0" i="1">
+            <a:ext cx="5219700" cy="1790700"/>
+          </a:xfrm>
+          <a:prstGeom xmlns:a="http://schemas.openxmlformats.org/drawingml/2006/main" prst="rect">
+            <a:avLst/>
+          </a:prstGeom>
+          <a:noFill xmlns:a="http://schemas.openxmlformats.org/drawingml/2006/main"/>
+          <a:ln xmlns:a="http://schemas.openxmlformats.org/drawingml/2006/main" w="0">
+            <a:noFill/>
+          </a:ln>
+        </p:spPr>
+        <p:txBody>
+          <a:bodyPr xmlns:a="http://schemas.openxmlformats.org/drawingml/2006/main">
+            <a:noAutofit/>
+          </a:bodyPr>
+          <a:lstStyle xmlns:a="http://schemas.openxmlformats.org/drawingml/2006/main"/>
+          <a:p xmlns:a="http://schemas.openxmlformats.org/drawingml/2006/main">
+            <a:pPr algn="l">
+              <a:defRPr sz="2100" b="0" i="1">
                 <a:solidFill>
                   <a:srgbClr val="087F70"/>
                 </a:solidFill>
@@ -6222,7 +5945,7 @@
               </a:defRPr>
             </a:pPr>
             <a:r>
-              <a:rPr sz="2550" b="0" i="1">
+              <a:rPr sz="2100" b="0" i="1">
                 <a:solidFill>
                   <a:srgbClr val="087F70"/>
                 </a:solidFill>
@@ -6230,38 +5953,43 @@
                 <a:ea typeface="Arial"/>
                 <a:cs typeface="Arial"/>
               </a:rPr>
-              <a:t>[Concept name]</a:t>
-            </a:r>
-          </a:p>
-          <a:p xmlns:a="http://schemas.openxmlformats.org/drawingml/2006/main">
-            <a:pPr algn="l">
-              <a:defRPr sz="2550" b="0" i="1">
-                <a:solidFill>
-                  <a:srgbClr val="087F70"/>
-                </a:solidFill>
-                <a:latin typeface="Arial"/>
-                <a:ea typeface="Arial"/>
-                <a:cs typeface="Arial"/>
-              </a:defRPr>
-            </a:pPr>
-            <a:r>
-              <a:rPr sz="2550" b="0" i="1">
-                <a:solidFill>
-                  <a:srgbClr val="087F70"/>
-                </a:solidFill>
-                <a:latin typeface="Arial"/>
-                <a:ea typeface="Arial"/>
-                <a:cs typeface="Arial"/>
-              </a:rPr>
-              <a:t>[Definition from the checked source]</a:t>
-            </a:r>
-          </a:p>
-        </p:txBody>
-      </p:sp>
+              <a:t>Water cycles through nature.</a:t>
+            </a:r>
+          </a:p>
+        </p:txBody>
+      </p:sp>
+      <p:pic>
+        <p:nvPicPr>
+          <p:cNvPr id="14" name=""/>
+          <p:cNvPicPr>
+            <a:picLocks xmlns:a="http://schemas.openxmlformats.org/drawingml/2006/main" noChangeAspect="1"/>
+          </p:cNvPicPr>
+          <p:nvPr/>
+        </p:nvPicPr>
+        <p:blipFill>
+          <a:blip xmlns:r="http://schemas.openxmlformats.org/officeDocument/2006/relationships" xmlns:a="http://schemas.openxmlformats.org/drawingml/2006/main" r:embed="R5148b77b850f4bcb">
+            <a:extLst>
+              <a:ext uri="{96DAC541-7B7A-43D3-8B79-37D633B846F1}">
+                <asvg:svgBlip xmlns:asvg="http://schemas.microsoft.com/office/drawing/2016/SVG/main" r:embed="Rbba702cba6184d26"/>
+              </a:ext>
+            </a:extLst>
+          </a:blip>
+          <a:stretch xmlns:a="http://schemas.openxmlformats.org/drawingml/2006/main"/>
+        </p:blipFill>
+        <p:spPr>
+          <a:xfrm xmlns:a="http://schemas.openxmlformats.org/drawingml/2006/main">
+            <a:off x="6629400" y="2038350"/>
+            <a:ext cx="4953000" cy="3905250"/>
+          </a:xfrm>
+          <a:prstGeom xmlns:a="http://schemas.openxmlformats.org/drawingml/2006/main" prst="rect">
+            <a:avLst/>
+          </a:prstGeom>
+        </p:spPr>
+      </p:pic>
     </p:spTree>
     <p:extLst>
       <p:ext uri="{BB962C8B-B14F-4D97-AF65-F5344CB8AC3E}">
-        <p14:creationId xmlns:p14="http://schemas.microsoft.com/office/powerpoint/2010/main" val="1807451141"/>
+        <p14:creationId xmlns:p14="http://schemas.microsoft.com/office/powerpoint/2010/main" val="829963945"/>
       </p:ext>
     </p:extLst>
   </p:cSld>
@@ -6289,10 +6017,10 @@
       </p:grpSpPr>
       <p:sp>
         <p:nvSpPr>
-          <p:cNvPr id="7" name="explanation-0">
-            <a:extLst xmlns:a="http://schemas.openxmlformats.org/drawingml/2006/main">
-              <a:ext uri="{FF2B5EF4-FFF2-40B4-BE49-F238E27FC236}">
-                <a16:creationId xmlns:a16="http://schemas.microsoft.com/office/drawing/2014/main" id="{484445F3-4414-49AF-8D2C-E2E3DB8006F2}"/>
+          <p:cNvPr id="8" name="explanation-0">
+            <a:extLst xmlns:a="http://schemas.openxmlformats.org/drawingml/2006/main">
+              <a:ext uri="{FF2B5EF4-FFF2-40B4-BE49-F238E27FC236}">
+                <a16:creationId xmlns:a16="http://schemas.microsoft.com/office/drawing/2014/main" id="{2D18820E-F22D-4745-B4E3-F21736748C1E}"/>
               </a:ext>
             </a:extLst>
           </p:cNvPr>
@@ -6339,7 +6067,7 @@
                 <a:ea typeface="Arial"/>
                 <a:cs typeface="Arial"/>
               </a:rPr>
-              <a:t>BiliClass   /   Môn học của thầy cô   /   10–12</a:t>
+              <a:t>BiliClass   /   Khoa học · ví dụ minh họa   /   </a:t>
             </a:r>
           </a:p>
         </p:txBody>
@@ -6349,7 +6077,7 @@
           <p:cNvPr id="2" name="explanation-1">
             <a:extLst xmlns:a="http://schemas.openxmlformats.org/drawingml/2006/main">
               <a:ext uri="{FF2B5EF4-FFF2-40B4-BE49-F238E27FC236}">
-                <a16:creationId xmlns:a16="http://schemas.microsoft.com/office/drawing/2014/main" id="{8DB73A9D-C397-4510-B86C-299C4D3C9FCA}"/>
+                <a16:creationId xmlns:a16="http://schemas.microsoft.com/office/drawing/2014/main" id="{39D7217A-CB32-4AAD-B1B6-329817A18931}"/>
               </a:ext>
             </a:extLst>
           </p:cNvPr>
@@ -6396,7 +6124,7 @@
                 <a:ea typeface="Arial"/>
                 <a:cs typeface="Arial"/>
               </a:rPr>
-              <a:t>Mẫu bài giảng song ngữ</a:t>
+              <a:t>Vòng tuần hoàn của nước</a:t>
             </a:r>
           </a:p>
         </p:txBody>
@@ -6406,7 +6134,7 @@
           <p:cNvPr id="3" name="explanation-2">
             <a:extLst xmlns:a="http://schemas.openxmlformats.org/drawingml/2006/main">
               <a:ext uri="{FF2B5EF4-FFF2-40B4-BE49-F238E27FC236}">
-                <a16:creationId xmlns:a16="http://schemas.microsoft.com/office/drawing/2014/main" id="{A4E87113-25E1-417E-9B7A-75B1F7709C24}"/>
+                <a16:creationId xmlns:a16="http://schemas.microsoft.com/office/drawing/2014/main" id="{04417DA3-D322-4D51-B6A8-FFF5835E9C16}"/>
               </a:ext>
             </a:extLst>
           </p:cNvPr>
@@ -6463,7 +6191,7 @@
           <p:cNvPr id="4" name="explanation-3">
             <a:extLst xmlns:a="http://schemas.openxmlformats.org/drawingml/2006/main">
               <a:ext uri="{FF2B5EF4-FFF2-40B4-BE49-F238E27FC236}">
-                <a16:creationId xmlns:a16="http://schemas.microsoft.com/office/drawing/2014/main" id="{FF44093B-B1EB-49F6-A704-C732004EDE86}"/>
+                <a16:creationId xmlns:a16="http://schemas.microsoft.com/office/drawing/2014/main" id="{F14262F5-D88C-475B-89DF-6ADD2BA3BC55}"/>
               </a:ext>
             </a:extLst>
           </p:cNvPr>
@@ -6510,7 +6238,7 @@
                 <a:ea typeface="Arial"/>
                 <a:cs typeface="Arial"/>
               </a:rPr>
-              <a:t>Mẫu cấu trúc · Thay bằng nội dung bài học</a:t>
+              <a:t>Ví dụ để xem thiết kế · Bài của thầy cô dùng nội dung và hình từ nguồn</a:t>
             </a:r>
           </a:p>
         </p:txBody>
@@ -6520,7 +6248,7 @@
           <p:cNvPr id="5" name="explanation-4">
             <a:extLst xmlns:a="http://schemas.openxmlformats.org/drawingml/2006/main">
               <a:ext uri="{FF2B5EF4-FFF2-40B4-BE49-F238E27FC236}">
-                <a16:creationId xmlns:a16="http://schemas.microsoft.com/office/drawing/2014/main" id="{C408AAA6-36FD-4BF3-BA46-277FC79DC5DC}"/>
+                <a16:creationId xmlns:a16="http://schemas.microsoft.com/office/drawing/2014/main" id="{2CD470DD-4833-4E96-A2B6-F5DB356A1D19}"/>
               </a:ext>
             </a:extLst>
           </p:cNvPr>
@@ -6532,24 +6260,24 @@
         <p:spPr>
           <a:xfrm xmlns:a="http://schemas.openxmlformats.org/drawingml/2006/main">
             <a:off x="609600" y="2038350"/>
-            <a:ext cx="10972800" cy="1790700"/>
-          </a:xfrm>
-          <a:prstGeom xmlns:a="http://schemas.openxmlformats.org/drawingml/2006/main" prst="rect">
-            <a:avLst/>
-          </a:prstGeom>
-          <a:noFill xmlns:a="http://schemas.openxmlformats.org/drawingml/2006/main"/>
-          <a:ln xmlns:a="http://schemas.openxmlformats.org/drawingml/2006/main" w="0">
-            <a:noFill/>
-          </a:ln>
-        </p:spPr>
-        <p:txBody>
-          <a:bodyPr xmlns:a="http://schemas.openxmlformats.org/drawingml/2006/main">
-            <a:noAutofit/>
-          </a:bodyPr>
-          <a:lstStyle xmlns:a="http://schemas.openxmlformats.org/drawingml/2006/main"/>
-          <a:p xmlns:a="http://schemas.openxmlformats.org/drawingml/2006/main">
-            <a:pPr algn="l">
-              <a:defRPr sz="2400" b="0" i="0">
+            <a:ext cx="5219700" cy="1790700"/>
+          </a:xfrm>
+          <a:prstGeom xmlns:a="http://schemas.openxmlformats.org/drawingml/2006/main" prst="rect">
+            <a:avLst/>
+          </a:prstGeom>
+          <a:noFill xmlns:a="http://schemas.openxmlformats.org/drawingml/2006/main"/>
+          <a:ln xmlns:a="http://schemas.openxmlformats.org/drawingml/2006/main" w="0">
+            <a:noFill/>
+          </a:ln>
+        </p:spPr>
+        <p:txBody>
+          <a:bodyPr xmlns:a="http://schemas.openxmlformats.org/drawingml/2006/main">
+            <a:noAutofit/>
+          </a:bodyPr>
+          <a:lstStyle xmlns:a="http://schemas.openxmlformats.org/drawingml/2006/main"/>
+          <a:p xmlns:a="http://schemas.openxmlformats.org/drawingml/2006/main">
+            <a:pPr algn="l">
+              <a:defRPr sz="2100" b="0" i="0">
                 <a:solidFill>
                   <a:srgbClr val="123C37"/>
                 </a:solidFill>
@@ -6559,7 +6287,7 @@
               </a:defRPr>
             </a:pPr>
             <a:r>
-              <a:rPr sz="2400" b="0" i="0">
+              <a:rPr sz="2100" b="0" i="0">
                 <a:solidFill>
                   <a:srgbClr val="123C37"/>
                 </a:solidFill>
@@ -6567,30 +6295,7 @@
                 <a:ea typeface="Arial"/>
                 <a:cs typeface="Arial"/>
               </a:rPr>
-              <a:t>[Ý chính cần giải thích]</a:t>
-            </a:r>
-          </a:p>
-          <a:p xmlns:a="http://schemas.openxmlformats.org/drawingml/2006/main">
-            <a:pPr algn="l">
-              <a:defRPr sz="2400" b="0" i="0">
-                <a:solidFill>
-                  <a:srgbClr val="123C37"/>
-                </a:solidFill>
-                <a:latin typeface="Arial"/>
-                <a:ea typeface="Arial"/>
-                <a:cs typeface="Arial"/>
-              </a:defRPr>
-            </a:pPr>
-            <a:r>
-              <a:rPr sz="2400" b="0" i="0">
-                <a:solidFill>
-                  <a:srgbClr val="123C37"/>
-                </a:solidFill>
-                <a:latin typeface="Arial"/>
-                <a:ea typeface="Arial"/>
-                <a:cs typeface="Arial"/>
-              </a:rPr>
-              <a:t>[Mối liên hệ trong nội dung bài học]</a:t>
+              <a:t>Hơi nước ngưng tụ thành giọt nước.</a:t>
             </a:r>
           </a:p>
         </p:txBody>
@@ -6600,7 +6305,7 @@
           <p:cNvPr id="6" name="explanation-5">
             <a:extLst xmlns:a="http://schemas.openxmlformats.org/drawingml/2006/main">
               <a:ext uri="{FF2B5EF4-FFF2-40B4-BE49-F238E27FC236}">
-                <a16:creationId xmlns:a16="http://schemas.microsoft.com/office/drawing/2014/main" id="{5B112719-2653-4FC6-BF45-C722BBF9C89A}"/>
+                <a16:creationId xmlns:a16="http://schemas.microsoft.com/office/drawing/2014/main" id="{16CB77FA-CCEA-4A18-A86B-76F81B56C4F0}"/>
               </a:ext>
             </a:extLst>
           </p:cNvPr>
@@ -6612,24 +6317,24 @@
         <p:spPr>
           <a:xfrm xmlns:a="http://schemas.openxmlformats.org/drawingml/2006/main">
             <a:off x="609600" y="4152900"/>
-            <a:ext cx="10972800" cy="1790700"/>
-          </a:xfrm>
-          <a:prstGeom xmlns:a="http://schemas.openxmlformats.org/drawingml/2006/main" prst="rect">
-            <a:avLst/>
-          </a:prstGeom>
-          <a:noFill xmlns:a="http://schemas.openxmlformats.org/drawingml/2006/main"/>
-          <a:ln xmlns:a="http://schemas.openxmlformats.org/drawingml/2006/main" w="0">
-            <a:noFill/>
-          </a:ln>
-        </p:spPr>
-        <p:txBody>
-          <a:bodyPr xmlns:a="http://schemas.openxmlformats.org/drawingml/2006/main">
-            <a:noAutofit/>
-          </a:bodyPr>
-          <a:lstStyle xmlns:a="http://schemas.openxmlformats.org/drawingml/2006/main"/>
-          <a:p xmlns:a="http://schemas.openxmlformats.org/drawingml/2006/main">
-            <a:pPr algn="l">
-              <a:defRPr sz="2400" b="0" i="1">
+            <a:ext cx="5219700" cy="1790700"/>
+          </a:xfrm>
+          <a:prstGeom xmlns:a="http://schemas.openxmlformats.org/drawingml/2006/main" prst="rect">
+            <a:avLst/>
+          </a:prstGeom>
+          <a:noFill xmlns:a="http://schemas.openxmlformats.org/drawingml/2006/main"/>
+          <a:ln xmlns:a="http://schemas.openxmlformats.org/drawingml/2006/main" w="0">
+            <a:noFill/>
+          </a:ln>
+        </p:spPr>
+        <p:txBody>
+          <a:bodyPr xmlns:a="http://schemas.openxmlformats.org/drawingml/2006/main">
+            <a:noAutofit/>
+          </a:bodyPr>
+          <a:lstStyle xmlns:a="http://schemas.openxmlformats.org/drawingml/2006/main"/>
+          <a:p xmlns:a="http://schemas.openxmlformats.org/drawingml/2006/main">
+            <a:pPr algn="l">
+              <a:defRPr sz="2100" b="0" i="1">
                 <a:solidFill>
                   <a:srgbClr val="087F70"/>
                 </a:solidFill>
@@ -6639,7 +6344,7 @@
               </a:defRPr>
             </a:pPr>
             <a:r>
-              <a:rPr sz="2400" b="0" i="1">
+              <a:rPr sz="2100" b="0" i="1">
                 <a:solidFill>
                   <a:srgbClr val="087F70"/>
                 </a:solidFill>
@@ -6647,38 +6352,43 @@
                 <a:ea typeface="Arial"/>
                 <a:cs typeface="Arial"/>
               </a:rPr>
-              <a:t>[Main idea to explain]</a:t>
-            </a:r>
-          </a:p>
-          <a:p xmlns:a="http://schemas.openxmlformats.org/drawingml/2006/main">
-            <a:pPr algn="l">
-              <a:defRPr sz="2400" b="0" i="1">
-                <a:solidFill>
-                  <a:srgbClr val="087F70"/>
-                </a:solidFill>
-                <a:latin typeface="Arial"/>
-                <a:ea typeface="Arial"/>
-                <a:cs typeface="Arial"/>
-              </a:defRPr>
-            </a:pPr>
-            <a:r>
-              <a:rPr sz="2400" b="0" i="1">
-                <a:solidFill>
-                  <a:srgbClr val="087F70"/>
-                </a:solidFill>
-                <a:latin typeface="Arial"/>
-                <a:ea typeface="Arial"/>
-                <a:cs typeface="Arial"/>
-              </a:rPr>
-              <a:t>[Relationship within the lesson content]</a:t>
-            </a:r>
-          </a:p>
-        </p:txBody>
-      </p:sp>
+              <a:t>Water vapour condenses into droplets.</a:t>
+            </a:r>
+          </a:p>
+        </p:txBody>
+      </p:sp>
+      <p:pic>
+        <p:nvPicPr>
+          <p:cNvPr id="14" name=""/>
+          <p:cNvPicPr>
+            <a:picLocks xmlns:a="http://schemas.openxmlformats.org/drawingml/2006/main" noChangeAspect="1"/>
+          </p:cNvPicPr>
+          <p:nvPr/>
+        </p:nvPicPr>
+        <p:blipFill>
+          <a:blip xmlns:r="http://schemas.openxmlformats.org/officeDocument/2006/relationships" xmlns:a="http://schemas.openxmlformats.org/drawingml/2006/main" r:embed="R89bbf34f7d2a43ba">
+            <a:extLst>
+              <a:ext uri="{96DAC541-7B7A-43D3-8B79-37D633B846F1}">
+                <asvg:svgBlip xmlns:asvg="http://schemas.microsoft.com/office/drawing/2016/SVG/main" r:embed="R06e081b6c49d4531"/>
+              </a:ext>
+            </a:extLst>
+          </a:blip>
+          <a:stretch xmlns:a="http://schemas.openxmlformats.org/drawingml/2006/main"/>
+        </p:blipFill>
+        <p:spPr>
+          <a:xfrm xmlns:a="http://schemas.openxmlformats.org/drawingml/2006/main">
+            <a:off x="6629400" y="2038350"/>
+            <a:ext cx="4953000" cy="3905250"/>
+          </a:xfrm>
+          <a:prstGeom xmlns:a="http://schemas.openxmlformats.org/drawingml/2006/main" prst="rect">
+            <a:avLst/>
+          </a:prstGeom>
+        </p:spPr>
+      </p:pic>
     </p:spTree>
     <p:extLst>
       <p:ext uri="{BB962C8B-B14F-4D97-AF65-F5344CB8AC3E}">
-        <p14:creationId xmlns:p14="http://schemas.microsoft.com/office/powerpoint/2010/main" val="1872792092"/>
+        <p14:creationId xmlns:p14="http://schemas.microsoft.com/office/powerpoint/2010/main" val="727180328"/>
       </p:ext>
     </p:extLst>
   </p:cSld>
@@ -6709,7 +6419,7 @@
           <p:cNvPr id="8" name="visual-0">
             <a:extLst xmlns:a="http://schemas.openxmlformats.org/drawingml/2006/main">
               <a:ext uri="{FF2B5EF4-FFF2-40B4-BE49-F238E27FC236}">
-                <a16:creationId xmlns:a16="http://schemas.microsoft.com/office/drawing/2014/main" id="{58592FA3-C5B9-4575-8D4B-CEA3A689977B}"/>
+                <a16:creationId xmlns:a16="http://schemas.microsoft.com/office/drawing/2014/main" id="{9791FD2F-71D6-434E-96D2-FD69D787152C}"/>
               </a:ext>
             </a:extLst>
           </p:cNvPr>
@@ -6756,7 +6466,7 @@
                 <a:ea typeface="Arial"/>
                 <a:cs typeface="Arial"/>
               </a:rPr>
-              <a:t>BiliClass   /   Môn học của thầy cô   /   10–12</a:t>
+              <a:t>BiliClass   /   Khoa học · ví dụ minh họa   /   </a:t>
             </a:r>
           </a:p>
         </p:txBody>
@@ -6766,7 +6476,7 @@
           <p:cNvPr id="2" name="visual-1">
             <a:extLst xmlns:a="http://schemas.openxmlformats.org/drawingml/2006/main">
               <a:ext uri="{FF2B5EF4-FFF2-40B4-BE49-F238E27FC236}">
-                <a16:creationId xmlns:a16="http://schemas.microsoft.com/office/drawing/2014/main" id="{7214BCBC-94E0-409C-A7E5-6592434C2314}"/>
+                <a16:creationId xmlns:a16="http://schemas.microsoft.com/office/drawing/2014/main" id="{F1DC1497-39C4-4EAB-A173-1B2FF675F95C}"/>
               </a:ext>
             </a:extLst>
           </p:cNvPr>
@@ -6813,7 +6523,7 @@
                 <a:ea typeface="Arial"/>
                 <a:cs typeface="Arial"/>
               </a:rPr>
-              <a:t>Mẫu bài giảng song ngữ</a:t>
+              <a:t>Vòng tuần hoàn của nước</a:t>
             </a:r>
           </a:p>
         </p:txBody>
@@ -6823,7 +6533,7 @@
           <p:cNvPr id="3" name="visual-2">
             <a:extLst xmlns:a="http://schemas.openxmlformats.org/drawingml/2006/main">
               <a:ext uri="{FF2B5EF4-FFF2-40B4-BE49-F238E27FC236}">
-                <a16:creationId xmlns:a16="http://schemas.microsoft.com/office/drawing/2014/main" id="{854AF369-E5F2-4F7A-A1E0-97DDC56D5BB1}"/>
+                <a16:creationId xmlns:a16="http://schemas.microsoft.com/office/drawing/2014/main" id="{62EA02EA-CA06-4C68-904A-3013AE33CCBF}"/>
               </a:ext>
             </a:extLst>
           </p:cNvPr>
@@ -6880,7 +6590,7 @@
           <p:cNvPr id="4" name="visual-3">
             <a:extLst xmlns:a="http://schemas.openxmlformats.org/drawingml/2006/main">
               <a:ext uri="{FF2B5EF4-FFF2-40B4-BE49-F238E27FC236}">
-                <a16:creationId xmlns:a16="http://schemas.microsoft.com/office/drawing/2014/main" id="{41C6F644-94F2-4FE1-B750-EEE196A07DB4}"/>
+                <a16:creationId xmlns:a16="http://schemas.microsoft.com/office/drawing/2014/main" id="{154B0C1B-8D28-4C5E-8557-C9589CDEA647}"/>
               </a:ext>
             </a:extLst>
           </p:cNvPr>
@@ -6927,7 +6637,7 @@
                 <a:ea typeface="Arial"/>
                 <a:cs typeface="Arial"/>
               </a:rPr>
-              <a:t>Mẫu cấu trúc · Thay bằng nội dung bài học</a:t>
+              <a:t>Ví dụ để xem thiết kế · Bài của thầy cô dùng nội dung và hình từ nguồn</a:t>
             </a:r>
           </a:p>
         </p:txBody>
@@ -6937,87 +6647,7 @@
           <p:cNvPr id="5" name="visual-4">
             <a:extLst xmlns:a="http://schemas.openxmlformats.org/drawingml/2006/main">
               <a:ext uri="{FF2B5EF4-FFF2-40B4-BE49-F238E27FC236}">
-                <a16:creationId xmlns:a16="http://schemas.microsoft.com/office/drawing/2014/main" id="{350E6CC1-7C59-435D-9C4F-56D1BB4B2E0C}"/>
-              </a:ext>
-            </a:extLst>
-          </p:cNvPr>
-          <p:cNvSpPr>
-            <a:spLocks xmlns:a="http://schemas.openxmlformats.org/drawingml/2006/main" noGrp="1"/>
-          </p:cNvSpPr>
-          <p:nvPr/>
-        </p:nvSpPr>
-        <p:spPr>
-          <a:xfrm xmlns:a="http://schemas.openxmlformats.org/drawingml/2006/main">
-            <a:off x="6934200" y="3048000"/>
-            <a:ext cx="4343400" cy="1714500"/>
-          </a:xfrm>
-          <a:prstGeom xmlns:a="http://schemas.openxmlformats.org/drawingml/2006/main" prst="rect">
-            <a:avLst/>
-          </a:prstGeom>
-          <a:noFill xmlns:a="http://schemas.openxmlformats.org/drawingml/2006/main"/>
-          <a:ln xmlns:a="http://schemas.openxmlformats.org/drawingml/2006/main" w="0">
-            <a:noFill/>
-          </a:ln>
-        </p:spPr>
-        <p:txBody>
-          <a:bodyPr xmlns:a="http://schemas.openxmlformats.org/drawingml/2006/main">
-            <a:noAutofit/>
-          </a:bodyPr>
-          <a:lstStyle xmlns:a="http://schemas.openxmlformats.org/drawingml/2006/main"/>
-          <a:p xmlns:a="http://schemas.openxmlformats.org/drawingml/2006/main">
-            <a:pPr algn="ctr">
-              <a:defRPr sz="2100" b="0" i="0">
-                <a:solidFill>
-                  <a:srgbClr val="5E7D76"/>
-                </a:solidFill>
-                <a:latin typeface="Arial"/>
-                <a:ea typeface="Arial"/>
-                <a:cs typeface="Arial"/>
-              </a:defRPr>
-            </a:pPr>
-            <a:r>
-              <a:rPr sz="2100" b="0" i="0">
-                <a:solidFill>
-                  <a:srgbClr val="5E7D76"/>
-                </a:solidFill>
-                <a:latin typeface="Arial"/>
-                <a:ea typeface="Arial"/>
-                <a:cs typeface="Arial"/>
-              </a:rPr>
-              <a:t>[Hình từ tài liệu bài học]</a:t>
-            </a:r>
-          </a:p>
-          <a:p xmlns:a="http://schemas.openxmlformats.org/drawingml/2006/main">
-            <a:pPr algn="ctr">
-              <a:defRPr sz="2100" b="0" i="0">
-                <a:solidFill>
-                  <a:srgbClr val="5E7D76"/>
-                </a:solidFill>
-                <a:latin typeface="Arial"/>
-                <a:ea typeface="Arial"/>
-                <a:cs typeface="Arial"/>
-              </a:defRPr>
-            </a:pPr>
-            <a:r>
-              <a:rPr sz="2100" b="0" i="0">
-                <a:solidFill>
-                  <a:srgbClr val="5E7D76"/>
-                </a:solidFill>
-                <a:latin typeface="Arial"/>
-                <a:ea typeface="Arial"/>
-                <a:cs typeface="Arial"/>
-              </a:rPr>
-              <a:t>[Image from the lesson source]</a:t>
-            </a:r>
-          </a:p>
-        </p:txBody>
-      </p:sp>
-      <p:sp>
-        <p:nvSpPr>
-          <p:cNvPr id="6" name="visual-5">
-            <a:extLst xmlns:a="http://schemas.openxmlformats.org/drawingml/2006/main">
-              <a:ext uri="{FF2B5EF4-FFF2-40B4-BE49-F238E27FC236}">
-                <a16:creationId xmlns:a16="http://schemas.microsoft.com/office/drawing/2014/main" id="{1066772C-80EA-46D0-B8D3-ADAA017F5469}"/>
+                <a16:creationId xmlns:a16="http://schemas.microsoft.com/office/drawing/2014/main" id="{AFF67203-A6E1-4598-9EE2-54BDEDEE7774}"/>
               </a:ext>
             </a:extLst>
           </p:cNvPr>
@@ -7046,7 +6676,7 @@
           <a:lstStyle xmlns:a="http://schemas.openxmlformats.org/drawingml/2006/main"/>
           <a:p xmlns:a="http://schemas.openxmlformats.org/drawingml/2006/main">
             <a:pPr algn="l">
-              <a:defRPr sz="2250" b="0" i="0">
+              <a:defRPr sz="2100" b="0" i="0">
                 <a:solidFill>
                   <a:srgbClr val="123C37"/>
                 </a:solidFill>
@@ -7056,7 +6686,7 @@
               </a:defRPr>
             </a:pPr>
             <a:r>
-              <a:rPr sz="2250" b="0" i="0">
+              <a:rPr sz="2100" b="0" i="0">
                 <a:solidFill>
                   <a:srgbClr val="123C37"/>
                 </a:solidFill>
@@ -7064,40 +6694,17 @@
                 <a:ea typeface="Arial"/>
                 <a:cs typeface="Arial"/>
               </a:rPr>
-              <a:t>[Điều cần quan sát trong hình]</a:t>
-            </a:r>
-          </a:p>
-          <a:p xmlns:a="http://schemas.openxmlformats.org/drawingml/2006/main">
-            <a:pPr algn="l">
-              <a:defRPr sz="2250" b="0" i="0">
-                <a:solidFill>
-                  <a:srgbClr val="123C37"/>
-                </a:solidFill>
-                <a:latin typeface="Arial"/>
-                <a:ea typeface="Arial"/>
-                <a:cs typeface="Arial"/>
-              </a:defRPr>
-            </a:pPr>
-            <a:r>
-              <a:rPr sz="2250" b="0" i="0">
-                <a:solidFill>
-                  <a:srgbClr val="123C37"/>
-                </a:solidFill>
-                <a:latin typeface="Arial"/>
-                <a:ea typeface="Arial"/>
-                <a:cs typeface="Arial"/>
-              </a:rPr>
-              <a:t>[Chú thích từ tài liệu nguồn]</a:t>
-            </a:r>
-          </a:p>
-        </p:txBody>
-      </p:sp>
-      <p:sp>
-        <p:nvSpPr>
-          <p:cNvPr id="7" name="visual-6">
-            <a:extLst xmlns:a="http://schemas.openxmlformats.org/drawingml/2006/main">
-              <a:ext uri="{FF2B5EF4-FFF2-40B4-BE49-F238E27FC236}">
-                <a16:creationId xmlns:a16="http://schemas.microsoft.com/office/drawing/2014/main" id="{6EDCA489-8CA8-48AA-96A9-294D00CE4224}"/>
+              <a:t>Theo dõi các mũi tên trong hình.</a:t>
+            </a:r>
+          </a:p>
+        </p:txBody>
+      </p:sp>
+      <p:sp>
+        <p:nvSpPr>
+          <p:cNvPr id="6" name="visual-5">
+            <a:extLst xmlns:a="http://schemas.openxmlformats.org/drawingml/2006/main">
+              <a:ext uri="{FF2B5EF4-FFF2-40B4-BE49-F238E27FC236}">
+                <a16:creationId xmlns:a16="http://schemas.microsoft.com/office/drawing/2014/main" id="{495C14E2-926D-4232-B59B-74854050EE7C}"/>
               </a:ext>
             </a:extLst>
           </p:cNvPr>
@@ -7126,7 +6733,7 @@
           <a:lstStyle xmlns:a="http://schemas.openxmlformats.org/drawingml/2006/main"/>
           <a:p xmlns:a="http://schemas.openxmlformats.org/drawingml/2006/main">
             <a:pPr algn="l">
-              <a:defRPr sz="2250" b="0" i="1">
+              <a:defRPr sz="2100" b="0" i="1">
                 <a:solidFill>
                   <a:srgbClr val="087F70"/>
                 </a:solidFill>
@@ -7136,7 +6743,7 @@
               </a:defRPr>
             </a:pPr>
             <a:r>
-              <a:rPr sz="2250" b="0" i="1">
+              <a:rPr sz="2100" b="0" i="1">
                 <a:solidFill>
                   <a:srgbClr val="087F70"/>
                 </a:solidFill>
@@ -7144,38 +6751,43 @@
                 <a:ea typeface="Arial"/>
                 <a:cs typeface="Arial"/>
               </a:rPr>
-              <a:t>[What to observe in the image]</a:t>
-            </a:r>
-          </a:p>
-          <a:p xmlns:a="http://schemas.openxmlformats.org/drawingml/2006/main">
-            <a:pPr algn="l">
-              <a:defRPr sz="2250" b="0" i="1">
-                <a:solidFill>
-                  <a:srgbClr val="087F70"/>
-                </a:solidFill>
-                <a:latin typeface="Arial"/>
-                <a:ea typeface="Arial"/>
-                <a:cs typeface="Arial"/>
-              </a:defRPr>
-            </a:pPr>
-            <a:r>
-              <a:rPr sz="2250" b="0" i="1">
-                <a:solidFill>
-                  <a:srgbClr val="087F70"/>
-                </a:solidFill>
-                <a:latin typeface="Arial"/>
-                <a:ea typeface="Arial"/>
-                <a:cs typeface="Arial"/>
-              </a:rPr>
-              <a:t>[Caption from the source document]</a:t>
-            </a:r>
-          </a:p>
-        </p:txBody>
-      </p:sp>
+              <a:t>Follow the arrows in the diagram.</a:t>
+            </a:r>
+          </a:p>
+        </p:txBody>
+      </p:sp>
+      <p:pic>
+        <p:nvPicPr>
+          <p:cNvPr id="14" name=""/>
+          <p:cNvPicPr>
+            <a:picLocks xmlns:a="http://schemas.openxmlformats.org/drawingml/2006/main" noChangeAspect="1"/>
+          </p:cNvPicPr>
+          <p:nvPr/>
+        </p:nvPicPr>
+        <p:blipFill>
+          <a:blip xmlns:r="http://schemas.openxmlformats.org/officeDocument/2006/relationships" xmlns:a="http://schemas.openxmlformats.org/drawingml/2006/main" r:embed="Rf39cc3147f64423f">
+            <a:extLst>
+              <a:ext uri="{96DAC541-7B7A-43D3-8B79-37D633B846F1}">
+                <asvg:svgBlip xmlns:asvg="http://schemas.microsoft.com/office/drawing/2016/SVG/main" r:embed="Rb6d160dadd264233"/>
+              </a:ext>
+            </a:extLst>
+          </a:blip>
+          <a:stretch xmlns:a="http://schemas.openxmlformats.org/drawingml/2006/main"/>
+        </p:blipFill>
+        <p:spPr>
+          <a:xfrm xmlns:a="http://schemas.openxmlformats.org/drawingml/2006/main">
+            <a:off x="6629400" y="2038350"/>
+            <a:ext cx="4953000" cy="3905250"/>
+          </a:xfrm>
+          <a:prstGeom xmlns:a="http://schemas.openxmlformats.org/drawingml/2006/main" prst="rect">
+            <a:avLst/>
+          </a:prstGeom>
+        </p:spPr>
+      </p:pic>
     </p:spTree>
     <p:extLst>
       <p:ext uri="{BB962C8B-B14F-4D97-AF65-F5344CB8AC3E}">
-        <p14:creationId xmlns:p14="http://schemas.microsoft.com/office/powerpoint/2010/main" val="475182896"/>
+        <p14:creationId xmlns:p14="http://schemas.microsoft.com/office/powerpoint/2010/main" val="917908824"/>
       </p:ext>
     </p:extLst>
   </p:cSld>
@@ -7203,10 +6815,10 @@
       </p:grpSpPr>
       <p:sp>
         <p:nvSpPr>
-          <p:cNvPr id="7" name="compare-0">
-            <a:extLst xmlns:a="http://schemas.openxmlformats.org/drawingml/2006/main">
-              <a:ext uri="{FF2B5EF4-FFF2-40B4-BE49-F238E27FC236}">
-                <a16:creationId xmlns:a16="http://schemas.microsoft.com/office/drawing/2014/main" id="{FFEF47FC-5C5C-4322-A798-0569D5A55DCD}"/>
+          <p:cNvPr id="8" name="compare-0">
+            <a:extLst xmlns:a="http://schemas.openxmlformats.org/drawingml/2006/main">
+              <a:ext uri="{FF2B5EF4-FFF2-40B4-BE49-F238E27FC236}">
+                <a16:creationId xmlns:a16="http://schemas.microsoft.com/office/drawing/2014/main" id="{F7CB61B7-53D8-4D7B-8D9E-D88E3F374A20}"/>
               </a:ext>
             </a:extLst>
           </p:cNvPr>
@@ -7253,7 +6865,7 @@
                 <a:ea typeface="Arial"/>
                 <a:cs typeface="Arial"/>
               </a:rPr>
-              <a:t>BiliClass   /   Môn học của thầy cô   /   10–12</a:t>
+              <a:t>BiliClass   /   Khoa học · ví dụ minh họa   /   </a:t>
             </a:r>
           </a:p>
         </p:txBody>
@@ -7263,7 +6875,7 @@
           <p:cNvPr id="2" name="compare-1">
             <a:extLst xmlns:a="http://schemas.openxmlformats.org/drawingml/2006/main">
               <a:ext uri="{FF2B5EF4-FFF2-40B4-BE49-F238E27FC236}">
-                <a16:creationId xmlns:a16="http://schemas.microsoft.com/office/drawing/2014/main" id="{B02DB541-B7D5-4934-B7F4-A362EC066036}"/>
+                <a16:creationId xmlns:a16="http://schemas.microsoft.com/office/drawing/2014/main" id="{4FCE71BB-5039-41E3-9336-5361E57C5606}"/>
               </a:ext>
             </a:extLst>
           </p:cNvPr>
@@ -7310,7 +6922,7 @@
                 <a:ea typeface="Arial"/>
                 <a:cs typeface="Arial"/>
               </a:rPr>
-              <a:t>Mẫu bài giảng song ngữ</a:t>
+              <a:t>Vòng tuần hoàn của nước</a:t>
             </a:r>
           </a:p>
         </p:txBody>
@@ -7320,7 +6932,7 @@
           <p:cNvPr id="3" name="compare-2">
             <a:extLst xmlns:a="http://schemas.openxmlformats.org/drawingml/2006/main">
               <a:ext uri="{FF2B5EF4-FFF2-40B4-BE49-F238E27FC236}">
-                <a16:creationId xmlns:a16="http://schemas.microsoft.com/office/drawing/2014/main" id="{07245F64-954C-418E-931A-20EF87837D6A}"/>
+                <a16:creationId xmlns:a16="http://schemas.microsoft.com/office/drawing/2014/main" id="{D1340F6A-E6CE-4E57-BCCF-ECD37A881FE5}"/>
               </a:ext>
             </a:extLst>
           </p:cNvPr>
@@ -7377,7 +6989,7 @@
           <p:cNvPr id="4" name="compare-3">
             <a:extLst xmlns:a="http://schemas.openxmlformats.org/drawingml/2006/main">
               <a:ext uri="{FF2B5EF4-FFF2-40B4-BE49-F238E27FC236}">
-                <a16:creationId xmlns:a16="http://schemas.microsoft.com/office/drawing/2014/main" id="{891E8458-DDB0-46AA-AEDA-A06522474660}"/>
+                <a16:creationId xmlns:a16="http://schemas.microsoft.com/office/drawing/2014/main" id="{435973B1-6720-4E84-B53C-D24B31EB663B}"/>
               </a:ext>
             </a:extLst>
           </p:cNvPr>
@@ -7424,7 +7036,7 @@
                 <a:ea typeface="Arial"/>
                 <a:cs typeface="Arial"/>
               </a:rPr>
-              <a:t>Mẫu cấu trúc · Thay bằng nội dung bài học</a:t>
+              <a:t>Ví dụ để xem thiết kế · Bài của thầy cô dùng nội dung và hình từ nguồn</a:t>
             </a:r>
           </a:p>
         </p:txBody>
@@ -7434,7 +7046,7 @@
           <p:cNvPr id="5" name="compare-4">
             <a:extLst xmlns:a="http://schemas.openxmlformats.org/drawingml/2006/main">
               <a:ext uri="{FF2B5EF4-FFF2-40B4-BE49-F238E27FC236}">
-                <a16:creationId xmlns:a16="http://schemas.microsoft.com/office/drawing/2014/main" id="{4696E441-B331-4B9E-A973-40A15170C255}"/>
+                <a16:creationId xmlns:a16="http://schemas.microsoft.com/office/drawing/2014/main" id="{77DC53EF-D0B8-47FC-AAD8-A337D496DA4B}"/>
               </a:ext>
             </a:extLst>
           </p:cNvPr>
@@ -7446,24 +7058,24 @@
         <p:spPr>
           <a:xfrm xmlns:a="http://schemas.openxmlformats.org/drawingml/2006/main">
             <a:off x="609600" y="2038350"/>
-            <a:ext cx="10972800" cy="1790700"/>
-          </a:xfrm>
-          <a:prstGeom xmlns:a="http://schemas.openxmlformats.org/drawingml/2006/main" prst="rect">
-            <a:avLst/>
-          </a:prstGeom>
-          <a:noFill xmlns:a="http://schemas.openxmlformats.org/drawingml/2006/main"/>
-          <a:ln xmlns:a="http://schemas.openxmlformats.org/drawingml/2006/main" w="0">
-            <a:noFill/>
-          </a:ln>
-        </p:spPr>
-        <p:txBody>
-          <a:bodyPr xmlns:a="http://schemas.openxmlformats.org/drawingml/2006/main">
-            <a:noAutofit/>
-          </a:bodyPr>
-          <a:lstStyle xmlns:a="http://schemas.openxmlformats.org/drawingml/2006/main"/>
-          <a:p xmlns:a="http://schemas.openxmlformats.org/drawingml/2006/main">
-            <a:pPr algn="l">
-              <a:defRPr sz="2400" b="0" i="0">
+            <a:ext cx="5219700" cy="1790700"/>
+          </a:xfrm>
+          <a:prstGeom xmlns:a="http://schemas.openxmlformats.org/drawingml/2006/main" prst="rect">
+            <a:avLst/>
+          </a:prstGeom>
+          <a:noFill xmlns:a="http://schemas.openxmlformats.org/drawingml/2006/main"/>
+          <a:ln xmlns:a="http://schemas.openxmlformats.org/drawingml/2006/main" w="0">
+            <a:noFill/>
+          </a:ln>
+        </p:spPr>
+        <p:txBody>
+          <a:bodyPr xmlns:a="http://schemas.openxmlformats.org/drawingml/2006/main">
+            <a:noAutofit/>
+          </a:bodyPr>
+          <a:lstStyle xmlns:a="http://schemas.openxmlformats.org/drawingml/2006/main"/>
+          <a:p xmlns:a="http://schemas.openxmlformats.org/drawingml/2006/main">
+            <a:pPr algn="l">
+              <a:defRPr sz="2100" b="0" i="0">
                 <a:solidFill>
                   <a:srgbClr val="123C37"/>
                 </a:solidFill>
@@ -7473,7 +7085,7 @@
               </a:defRPr>
             </a:pPr>
             <a:r>
-              <a:rPr sz="2400" b="0" i="0">
+              <a:rPr sz="2100" b="0" i="0">
                 <a:solidFill>
                   <a:srgbClr val="123C37"/>
                 </a:solidFill>
@@ -7481,53 +7093,7 @@
                 <a:ea typeface="Arial"/>
                 <a:cs typeface="Arial"/>
               </a:rPr>
-              <a:t>[Tiêu chí so sánh]</a:t>
-            </a:r>
-          </a:p>
-          <a:p xmlns:a="http://schemas.openxmlformats.org/drawingml/2006/main">
-            <a:pPr algn="l">
-              <a:defRPr sz="2400" b="0" i="0">
-                <a:solidFill>
-                  <a:srgbClr val="123C37"/>
-                </a:solidFill>
-                <a:latin typeface="Arial"/>
-                <a:ea typeface="Arial"/>
-                <a:cs typeface="Arial"/>
-              </a:defRPr>
-            </a:pPr>
-            <a:r>
-              <a:rPr sz="2400" b="0" i="0">
-                <a:solidFill>
-                  <a:srgbClr val="123C37"/>
-                </a:solidFill>
-                <a:latin typeface="Arial"/>
-                <a:ea typeface="Arial"/>
-                <a:cs typeface="Arial"/>
-              </a:rPr>
-              <a:t>[Điểm giống nhau]</a:t>
-            </a:r>
-          </a:p>
-          <a:p xmlns:a="http://schemas.openxmlformats.org/drawingml/2006/main">
-            <a:pPr algn="l">
-              <a:defRPr sz="2400" b="0" i="0">
-                <a:solidFill>
-                  <a:srgbClr val="123C37"/>
-                </a:solidFill>
-                <a:latin typeface="Arial"/>
-                <a:ea typeface="Arial"/>
-                <a:cs typeface="Arial"/>
-              </a:defRPr>
-            </a:pPr>
-            <a:r>
-              <a:rPr sz="2400" b="0" i="0">
-                <a:solidFill>
-                  <a:srgbClr val="123C37"/>
-                </a:solidFill>
-                <a:latin typeface="Arial"/>
-                <a:ea typeface="Arial"/>
-                <a:cs typeface="Arial"/>
-              </a:rPr>
-              <a:t>[Điểm khác nhau]</a:t>
+              <a:t>Bay hơi và ngưng tụ đổi trạng thái nước.</a:t>
             </a:r>
           </a:p>
         </p:txBody>
@@ -7537,7 +7103,7 @@
           <p:cNvPr id="6" name="compare-5">
             <a:extLst xmlns:a="http://schemas.openxmlformats.org/drawingml/2006/main">
               <a:ext uri="{FF2B5EF4-FFF2-40B4-BE49-F238E27FC236}">
-                <a16:creationId xmlns:a16="http://schemas.microsoft.com/office/drawing/2014/main" id="{668EEB1D-8D3E-42F2-BD92-A0B9814A3D26}"/>
+                <a16:creationId xmlns:a16="http://schemas.microsoft.com/office/drawing/2014/main" id="{D7DBD423-1DC2-4046-B771-2D3151835AAF}"/>
               </a:ext>
             </a:extLst>
           </p:cNvPr>
@@ -7549,24 +7115,24 @@
         <p:spPr>
           <a:xfrm xmlns:a="http://schemas.openxmlformats.org/drawingml/2006/main">
             <a:off x="609600" y="4152900"/>
-            <a:ext cx="10972800" cy="1790700"/>
-          </a:xfrm>
-          <a:prstGeom xmlns:a="http://schemas.openxmlformats.org/drawingml/2006/main" prst="rect">
-            <a:avLst/>
-          </a:prstGeom>
-          <a:noFill xmlns:a="http://schemas.openxmlformats.org/drawingml/2006/main"/>
-          <a:ln xmlns:a="http://schemas.openxmlformats.org/drawingml/2006/main" w="0">
-            <a:noFill/>
-          </a:ln>
-        </p:spPr>
-        <p:txBody>
-          <a:bodyPr xmlns:a="http://schemas.openxmlformats.org/drawingml/2006/main">
-            <a:noAutofit/>
-          </a:bodyPr>
-          <a:lstStyle xmlns:a="http://schemas.openxmlformats.org/drawingml/2006/main"/>
-          <a:p xmlns:a="http://schemas.openxmlformats.org/drawingml/2006/main">
-            <a:pPr algn="l">
-              <a:defRPr sz="2400" b="0" i="1">
+            <a:ext cx="5219700" cy="1790700"/>
+          </a:xfrm>
+          <a:prstGeom xmlns:a="http://schemas.openxmlformats.org/drawingml/2006/main" prst="rect">
+            <a:avLst/>
+          </a:prstGeom>
+          <a:noFill xmlns:a="http://schemas.openxmlformats.org/drawingml/2006/main"/>
+          <a:ln xmlns:a="http://schemas.openxmlformats.org/drawingml/2006/main" w="0">
+            <a:noFill/>
+          </a:ln>
+        </p:spPr>
+        <p:txBody>
+          <a:bodyPr xmlns:a="http://schemas.openxmlformats.org/drawingml/2006/main">
+            <a:noAutofit/>
+          </a:bodyPr>
+          <a:lstStyle xmlns:a="http://schemas.openxmlformats.org/drawingml/2006/main"/>
+          <a:p xmlns:a="http://schemas.openxmlformats.org/drawingml/2006/main">
+            <a:pPr algn="l">
+              <a:defRPr sz="2100" b="0" i="1">
                 <a:solidFill>
                   <a:srgbClr val="087F70"/>
                 </a:solidFill>
@@ -7576,7 +7142,7 @@
               </a:defRPr>
             </a:pPr>
             <a:r>
-              <a:rPr sz="2400" b="0" i="1">
+              <a:rPr sz="2100" b="0" i="1">
                 <a:solidFill>
                   <a:srgbClr val="087F70"/>
                 </a:solidFill>
@@ -7584,61 +7150,43 @@
                 <a:ea typeface="Arial"/>
                 <a:cs typeface="Arial"/>
               </a:rPr>
-              <a:t>[Comparison criterion]</a:t>
-            </a:r>
-          </a:p>
-          <a:p xmlns:a="http://schemas.openxmlformats.org/drawingml/2006/main">
-            <a:pPr algn="l">
-              <a:defRPr sz="2400" b="0" i="1">
-                <a:solidFill>
-                  <a:srgbClr val="087F70"/>
-                </a:solidFill>
-                <a:latin typeface="Arial"/>
-                <a:ea typeface="Arial"/>
-                <a:cs typeface="Arial"/>
-              </a:defRPr>
-            </a:pPr>
-            <a:r>
-              <a:rPr sz="2400" b="0" i="1">
-                <a:solidFill>
-                  <a:srgbClr val="087F70"/>
-                </a:solidFill>
-                <a:latin typeface="Arial"/>
-                <a:ea typeface="Arial"/>
-                <a:cs typeface="Arial"/>
-              </a:rPr>
-              <a:t>[Similarities]</a:t>
-            </a:r>
-          </a:p>
-          <a:p xmlns:a="http://schemas.openxmlformats.org/drawingml/2006/main">
-            <a:pPr algn="l">
-              <a:defRPr sz="2400" b="0" i="1">
-                <a:solidFill>
-                  <a:srgbClr val="087F70"/>
-                </a:solidFill>
-                <a:latin typeface="Arial"/>
-                <a:ea typeface="Arial"/>
-                <a:cs typeface="Arial"/>
-              </a:defRPr>
-            </a:pPr>
-            <a:r>
-              <a:rPr sz="2400" b="0" i="1">
-                <a:solidFill>
-                  <a:srgbClr val="087F70"/>
-                </a:solidFill>
-                <a:latin typeface="Arial"/>
-                <a:ea typeface="Arial"/>
-                <a:cs typeface="Arial"/>
-              </a:rPr>
-              <a:t>[Differences]</a:t>
-            </a:r>
-          </a:p>
-        </p:txBody>
-      </p:sp>
+              <a:t>Evaporation and condensation change the state of water.</a:t>
+            </a:r>
+          </a:p>
+        </p:txBody>
+      </p:sp>
+      <p:pic>
+        <p:nvPicPr>
+          <p:cNvPr id="14" name=""/>
+          <p:cNvPicPr>
+            <a:picLocks xmlns:a="http://schemas.openxmlformats.org/drawingml/2006/main" noChangeAspect="1"/>
+          </p:cNvPicPr>
+          <p:nvPr/>
+        </p:nvPicPr>
+        <p:blipFill>
+          <a:blip xmlns:r="http://schemas.openxmlformats.org/officeDocument/2006/relationships" xmlns:a="http://schemas.openxmlformats.org/drawingml/2006/main" r:embed="R6f4bc000f51a45e0">
+            <a:extLst>
+              <a:ext uri="{96DAC541-7B7A-43D3-8B79-37D633B846F1}">
+                <asvg:svgBlip xmlns:asvg="http://schemas.microsoft.com/office/drawing/2016/SVG/main" r:embed="R6a4d8a6d304d418b"/>
+              </a:ext>
+            </a:extLst>
+          </a:blip>
+          <a:stretch xmlns:a="http://schemas.openxmlformats.org/drawingml/2006/main"/>
+        </p:blipFill>
+        <p:spPr>
+          <a:xfrm xmlns:a="http://schemas.openxmlformats.org/drawingml/2006/main">
+            <a:off x="6629400" y="2038350"/>
+            <a:ext cx="4953000" cy="3905250"/>
+          </a:xfrm>
+          <a:prstGeom xmlns:a="http://schemas.openxmlformats.org/drawingml/2006/main" prst="rect">
+            <a:avLst/>
+          </a:prstGeom>
+        </p:spPr>
+      </p:pic>
     </p:spTree>
     <p:extLst>
       <p:ext uri="{BB962C8B-B14F-4D97-AF65-F5344CB8AC3E}">
-        <p14:creationId xmlns:p14="http://schemas.microsoft.com/office/powerpoint/2010/main" val="1673475359"/>
+        <p14:creationId xmlns:p14="http://schemas.microsoft.com/office/powerpoint/2010/main" val="1189226677"/>
       </p:ext>
     </p:extLst>
   </p:cSld>
@@ -7666,10 +7214,10 @@
       </p:grpSpPr>
       <p:sp>
         <p:nvSpPr>
-          <p:cNvPr id="7" name="formula-0">
-            <a:extLst xmlns:a="http://schemas.openxmlformats.org/drawingml/2006/main">
-              <a:ext uri="{FF2B5EF4-FFF2-40B4-BE49-F238E27FC236}">
-                <a16:creationId xmlns:a16="http://schemas.microsoft.com/office/drawing/2014/main" id="{50985B10-F91B-43C3-8C8B-FDBC3C0AEE47}"/>
+          <p:cNvPr id="8" name="formula-0">
+            <a:extLst xmlns:a="http://schemas.openxmlformats.org/drawingml/2006/main">
+              <a:ext uri="{FF2B5EF4-FFF2-40B4-BE49-F238E27FC236}">
+                <a16:creationId xmlns:a16="http://schemas.microsoft.com/office/drawing/2014/main" id="{8F638959-BF06-4822-9F94-F2E2DB31065C}"/>
               </a:ext>
             </a:extLst>
           </p:cNvPr>
@@ -7716,7 +7264,7 @@
                 <a:ea typeface="Arial"/>
                 <a:cs typeface="Arial"/>
               </a:rPr>
-              <a:t>BiliClass   /   Môn học của thầy cô   /   10–12</a:t>
+              <a:t>BiliClass   /   Khoa học · ví dụ minh họa   /   </a:t>
             </a:r>
           </a:p>
         </p:txBody>
@@ -7726,7 +7274,7 @@
           <p:cNvPr id="2" name="formula-1">
             <a:extLst xmlns:a="http://schemas.openxmlformats.org/drawingml/2006/main">
               <a:ext uri="{FF2B5EF4-FFF2-40B4-BE49-F238E27FC236}">
-                <a16:creationId xmlns:a16="http://schemas.microsoft.com/office/drawing/2014/main" id="{097236A2-603C-42DE-8C17-BE21AB248127}"/>
+                <a16:creationId xmlns:a16="http://schemas.microsoft.com/office/drawing/2014/main" id="{13DCFB06-F47C-456F-BCCB-EBC1C305DF19}"/>
               </a:ext>
             </a:extLst>
           </p:cNvPr>
@@ -7773,7 +7321,7 @@
                 <a:ea typeface="Arial"/>
                 <a:cs typeface="Arial"/>
               </a:rPr>
-              <a:t>Mẫu bài giảng song ngữ</a:t>
+              <a:t>Vòng tuần hoàn của nước</a:t>
             </a:r>
           </a:p>
         </p:txBody>
@@ -7783,7 +7331,7 @@
           <p:cNvPr id="3" name="formula-2">
             <a:extLst xmlns:a="http://schemas.openxmlformats.org/drawingml/2006/main">
               <a:ext uri="{FF2B5EF4-FFF2-40B4-BE49-F238E27FC236}">
-                <a16:creationId xmlns:a16="http://schemas.microsoft.com/office/drawing/2014/main" id="{B55987A9-37F2-4A5A-9A78-E2FD07E84B4E}"/>
+                <a16:creationId xmlns:a16="http://schemas.microsoft.com/office/drawing/2014/main" id="{0C35C6D7-E7A3-4EB8-AEF3-A75C78021A6F}"/>
               </a:ext>
             </a:extLst>
           </p:cNvPr>
@@ -7840,7 +7388,7 @@
           <p:cNvPr id="4" name="formula-3">
             <a:extLst xmlns:a="http://schemas.openxmlformats.org/drawingml/2006/main">
               <a:ext uri="{FF2B5EF4-FFF2-40B4-BE49-F238E27FC236}">
-                <a16:creationId xmlns:a16="http://schemas.microsoft.com/office/drawing/2014/main" id="{77CD4B76-9940-4F02-87E5-8297EE67E5FB}"/>
+                <a16:creationId xmlns:a16="http://schemas.microsoft.com/office/drawing/2014/main" id="{00CDBD59-E665-4823-81D3-5FFA1035513F}"/>
               </a:ext>
             </a:extLst>
           </p:cNvPr>
@@ -7887,7 +7435,7 @@
                 <a:ea typeface="Arial"/>
                 <a:cs typeface="Arial"/>
               </a:rPr>
-              <a:t>Mẫu cấu trúc · Thay bằng nội dung bài học</a:t>
+              <a:t>Ví dụ để xem thiết kế · Bài của thầy cô dùng nội dung và hình từ nguồn</a:t>
             </a:r>
           </a:p>
         </p:txBody>
@@ -7897,7 +7445,7 @@
           <p:cNvPr id="5" name="formula-4">
             <a:extLst xmlns:a="http://schemas.openxmlformats.org/drawingml/2006/main">
               <a:ext uri="{FF2B5EF4-FFF2-40B4-BE49-F238E27FC236}">
-                <a16:creationId xmlns:a16="http://schemas.microsoft.com/office/drawing/2014/main" id="{ABEB9E63-5976-492F-815F-AEE9E6AFB37B}"/>
+                <a16:creationId xmlns:a16="http://schemas.microsoft.com/office/drawing/2014/main" id="{79ABC315-D448-437D-BD26-882F29A5BA55}"/>
               </a:ext>
             </a:extLst>
           </p:cNvPr>
@@ -7909,7 +7457,7 @@
         <p:spPr>
           <a:xfrm xmlns:a="http://schemas.openxmlformats.org/drawingml/2006/main">
             <a:off x="609600" y="2038350"/>
-            <a:ext cx="10972800" cy="1790700"/>
+            <a:ext cx="5219700" cy="1790700"/>
           </a:xfrm>
           <a:prstGeom xmlns:a="http://schemas.openxmlformats.org/drawingml/2006/main" prst="rect">
             <a:avLst/>
@@ -7926,7 +7474,7 @@
           <a:lstStyle xmlns:a="http://schemas.openxmlformats.org/drawingml/2006/main"/>
           <a:p xmlns:a="http://schemas.openxmlformats.org/drawingml/2006/main">
             <a:pPr algn="ctr">
-              <a:defRPr sz="3150" b="1" i="0">
+              <a:defRPr sz="2100" b="1" i="0">
                 <a:solidFill>
                   <a:srgbClr val="123C37"/>
                 </a:solidFill>
@@ -7936,7 +7484,7 @@
               </a:defRPr>
             </a:pPr>
             <a:r>
-              <a:rPr sz="3150" b="1" i="0">
+              <a:rPr sz="2100" b="1" i="0">
                 <a:solidFill>
                   <a:srgbClr val="123C37"/>
                 </a:solidFill>
@@ -7944,69 +7492,46 @@
                 <a:ea typeface="Arial"/>
                 <a:cs typeface="Arial"/>
               </a:rPr>
-              <a:t>[Công thức hoặc quy tắc]</a:t>
-            </a:r>
-          </a:p>
+              <a:t>Lỏng → khí: bay hơi</a:t>
+            </a:r>
+          </a:p>
+        </p:txBody>
+      </p:sp>
+      <p:sp>
+        <p:nvSpPr>
+          <p:cNvPr id="6" name="formula-5">
+            <a:extLst xmlns:a="http://schemas.openxmlformats.org/drawingml/2006/main">
+              <a:ext uri="{FF2B5EF4-FFF2-40B4-BE49-F238E27FC236}">
+                <a16:creationId xmlns:a16="http://schemas.microsoft.com/office/drawing/2014/main" id="{3B5F5C08-3D30-484B-818F-4F7D21A2E5A1}"/>
+              </a:ext>
+            </a:extLst>
+          </p:cNvPr>
+          <p:cNvSpPr>
+            <a:spLocks xmlns:a="http://schemas.openxmlformats.org/drawingml/2006/main" noGrp="1"/>
+          </p:cNvSpPr>
+          <p:nvPr/>
+        </p:nvSpPr>
+        <p:spPr>
+          <a:xfrm xmlns:a="http://schemas.openxmlformats.org/drawingml/2006/main">
+            <a:off x="609600" y="4152900"/>
+            <a:ext cx="5219700" cy="1790700"/>
+          </a:xfrm>
+          <a:prstGeom xmlns:a="http://schemas.openxmlformats.org/drawingml/2006/main" prst="rect">
+            <a:avLst/>
+          </a:prstGeom>
+          <a:noFill xmlns:a="http://schemas.openxmlformats.org/drawingml/2006/main"/>
+          <a:ln xmlns:a="http://schemas.openxmlformats.org/drawingml/2006/main" w="0">
+            <a:noFill/>
+          </a:ln>
+        </p:spPr>
+        <p:txBody>
+          <a:bodyPr xmlns:a="http://schemas.openxmlformats.org/drawingml/2006/main">
+            <a:noAutofit/>
+          </a:bodyPr>
+          <a:lstStyle xmlns:a="http://schemas.openxmlformats.org/drawingml/2006/main"/>
           <a:p xmlns:a="http://schemas.openxmlformats.org/drawingml/2006/main">
             <a:pPr algn="ctr">
-              <a:defRPr sz="3150" b="1" i="0">
-                <a:solidFill>
-                  <a:srgbClr val="123C37"/>
-                </a:solidFill>
-                <a:latin typeface="Arial"/>
-                <a:ea typeface="Arial"/>
-                <a:cs typeface="Arial"/>
-              </a:defRPr>
-            </a:pPr>
-            <a:r>
-              <a:rPr sz="3150" b="1" i="0">
-                <a:solidFill>
-                  <a:srgbClr val="123C37"/>
-                </a:solidFill>
-                <a:latin typeface="Arial"/>
-                <a:ea typeface="Arial"/>
-                <a:cs typeface="Arial"/>
-              </a:rPr>
-              <a:t>[Điều kiện áp dụng]</a:t>
-            </a:r>
-          </a:p>
-        </p:txBody>
-      </p:sp>
-      <p:sp>
-        <p:nvSpPr>
-          <p:cNvPr id="6" name="formula-5">
-            <a:extLst xmlns:a="http://schemas.openxmlformats.org/drawingml/2006/main">
-              <a:ext uri="{FF2B5EF4-FFF2-40B4-BE49-F238E27FC236}">
-                <a16:creationId xmlns:a16="http://schemas.microsoft.com/office/drawing/2014/main" id="{CFFF2020-FE95-4987-B0A1-8EB048326224}"/>
-              </a:ext>
-            </a:extLst>
-          </p:cNvPr>
-          <p:cNvSpPr>
-            <a:spLocks xmlns:a="http://schemas.openxmlformats.org/drawingml/2006/main" noGrp="1"/>
-          </p:cNvSpPr>
-          <p:nvPr/>
-        </p:nvSpPr>
-        <p:spPr>
-          <a:xfrm xmlns:a="http://schemas.openxmlformats.org/drawingml/2006/main">
-            <a:off x="609600" y="4152900"/>
-            <a:ext cx="10972800" cy="1790700"/>
-          </a:xfrm>
-          <a:prstGeom xmlns:a="http://schemas.openxmlformats.org/drawingml/2006/main" prst="rect">
-            <a:avLst/>
-          </a:prstGeom>
-          <a:noFill xmlns:a="http://schemas.openxmlformats.org/drawingml/2006/main"/>
-          <a:ln xmlns:a="http://schemas.openxmlformats.org/drawingml/2006/main" w="0">
-            <a:noFill/>
-          </a:ln>
-        </p:spPr>
-        <p:txBody>
-          <a:bodyPr xmlns:a="http://schemas.openxmlformats.org/drawingml/2006/main">
-            <a:noAutofit/>
-          </a:bodyPr>
-          <a:lstStyle xmlns:a="http://schemas.openxmlformats.org/drawingml/2006/main"/>
-          <a:p xmlns:a="http://schemas.openxmlformats.org/drawingml/2006/main">
-            <a:pPr algn="ctr">
-              <a:defRPr sz="3150" b="1" i="1">
+              <a:defRPr sz="2100" b="1" i="1">
                 <a:solidFill>
                   <a:srgbClr val="087F70"/>
                 </a:solidFill>
@@ -8016,7 +7541,7 @@
               </a:defRPr>
             </a:pPr>
             <a:r>
-              <a:rPr sz="3150" b="1" i="1">
+              <a:rPr sz="2100" b="1" i="1">
                 <a:solidFill>
                   <a:srgbClr val="087F70"/>
                 </a:solidFill>
@@ -8024,38 +7549,43 @@
                 <a:ea typeface="Arial"/>
                 <a:cs typeface="Arial"/>
               </a:rPr>
-              <a:t>[Formula or rule]</a:t>
-            </a:r>
-          </a:p>
-          <a:p xmlns:a="http://schemas.openxmlformats.org/drawingml/2006/main">
-            <a:pPr algn="ctr">
-              <a:defRPr sz="3150" b="1" i="1">
-                <a:solidFill>
-                  <a:srgbClr val="087F70"/>
-                </a:solidFill>
-                <a:latin typeface="Arial"/>
-                <a:ea typeface="Arial"/>
-                <a:cs typeface="Arial"/>
-              </a:defRPr>
-            </a:pPr>
-            <a:r>
-              <a:rPr sz="3150" b="1" i="1">
-                <a:solidFill>
-                  <a:srgbClr val="087F70"/>
-                </a:solidFill>
-                <a:latin typeface="Arial"/>
-                <a:ea typeface="Arial"/>
-                <a:cs typeface="Arial"/>
-              </a:rPr>
-              <a:t>[Conditions of use]</a:t>
-            </a:r>
-          </a:p>
-        </p:txBody>
-      </p:sp>
+              <a:t>Liquid → gas: evaporation</a:t>
+            </a:r>
+          </a:p>
+        </p:txBody>
+      </p:sp>
+      <p:pic>
+        <p:nvPicPr>
+          <p:cNvPr id="14" name=""/>
+          <p:cNvPicPr>
+            <a:picLocks xmlns:a="http://schemas.openxmlformats.org/drawingml/2006/main" noChangeAspect="1"/>
+          </p:cNvPicPr>
+          <p:nvPr/>
+        </p:nvPicPr>
+        <p:blipFill>
+          <a:blip xmlns:r="http://schemas.openxmlformats.org/officeDocument/2006/relationships" xmlns:a="http://schemas.openxmlformats.org/drawingml/2006/main" r:embed="R370f5d73a0bc4619">
+            <a:extLst>
+              <a:ext uri="{96DAC541-7B7A-43D3-8B79-37D633B846F1}">
+                <asvg:svgBlip xmlns:asvg="http://schemas.microsoft.com/office/drawing/2016/SVG/main" r:embed="R8f628014f79d4168"/>
+              </a:ext>
+            </a:extLst>
+          </a:blip>
+          <a:stretch xmlns:a="http://schemas.openxmlformats.org/drawingml/2006/main"/>
+        </p:blipFill>
+        <p:spPr>
+          <a:xfrm xmlns:a="http://schemas.openxmlformats.org/drawingml/2006/main">
+            <a:off x="6629400" y="2038350"/>
+            <a:ext cx="4953000" cy="3905250"/>
+          </a:xfrm>
+          <a:prstGeom xmlns:a="http://schemas.openxmlformats.org/drawingml/2006/main" prst="rect">
+            <a:avLst/>
+          </a:prstGeom>
+        </p:spPr>
+      </p:pic>
     </p:spTree>
     <p:extLst>
       <p:ext uri="{BB962C8B-B14F-4D97-AF65-F5344CB8AC3E}">
-        <p14:creationId xmlns:p14="http://schemas.microsoft.com/office/powerpoint/2010/main" val="1922838041"/>
+        <p14:creationId xmlns:p14="http://schemas.microsoft.com/office/powerpoint/2010/main" val="2097666073"/>
       </p:ext>
     </p:extLst>
   </p:cSld>
